--- a/reports/Heart_Disease_MLOps_Presentation.pptx
+++ b/reports/Heart_Disease_MLOps_Presentation.pptx
@@ -4,24 +4,27 @@
   <p:sldMasterIdLst>
     <p:sldMasterId id="2147483648" r:id="rId1"/>
   </p:sldMasterIdLst>
+  <p:notesMasterIdLst>
+    <p:notesMasterId r:id="rId17"/>
+  </p:notesMasterIdLst>
   <p:sldIdLst>
-    <p:sldId id="256" r:id="rId7"/>
-    <p:sldId id="257" r:id="rId9"/>
-    <p:sldId id="258" r:id="rId10"/>
-    <p:sldId id="259" r:id="rId11"/>
-    <p:sldId id="260" r:id="rId12"/>
-    <p:sldId id="261" r:id="rId13"/>
-    <p:sldId id="262" r:id="rId14"/>
-    <p:sldId id="263" r:id="rId15"/>
-    <p:sldId id="264" r:id="rId16"/>
-    <p:sldId id="265" r:id="rId17"/>
-    <p:sldId id="266" r:id="rId18"/>
-    <p:sldId id="267" r:id="rId19"/>
-    <p:sldId id="268" r:id="rId20"/>
-    <p:sldId id="269" r:id="rId21"/>
-    <p:sldId id="270" r:id="rId22"/>
+    <p:sldId id="256" r:id="rId2"/>
+    <p:sldId id="257" r:id="rId3"/>
+    <p:sldId id="258" r:id="rId4"/>
+    <p:sldId id="259" r:id="rId5"/>
+    <p:sldId id="260" r:id="rId6"/>
+    <p:sldId id="261" r:id="rId7"/>
+    <p:sldId id="262" r:id="rId8"/>
+    <p:sldId id="263" r:id="rId9"/>
+    <p:sldId id="264" r:id="rId10"/>
+    <p:sldId id="265" r:id="rId11"/>
+    <p:sldId id="266" r:id="rId12"/>
+    <p:sldId id="267" r:id="rId13"/>
+    <p:sldId id="268" r:id="rId14"/>
+    <p:sldId id="269" r:id="rId15"/>
+    <p:sldId id="270" r:id="rId16"/>
   </p:sldIdLst>
-  <p:sldSz cx="12191695" cy="6858000" type="screen4x3"/>
+  <p:sldSz cx="12192000" cy="6858000"/>
   <p:notesSz cx="6858000" cy="9144000"/>
   <p:defaultTextStyle>
     <a:defPPr>
@@ -118,18 +121,68 @@
       </a:defRPr>
     </a:lvl9pPr>
   </p:defaultTextStyle>
+  <p:extLst>
+    <p:ext uri="{EFAFB233-063F-42B5-8137-9DF3F51BA10A}">
+      <p15:sldGuideLst xmlns:p15="http://schemas.microsoft.com/office/powerpoint/2012/main">
+        <p15:guide id="1" orient="horz" pos="2160">
+          <p15:clr>
+            <a:srgbClr val="A4A3A4"/>
+          </p15:clr>
+        </p15:guide>
+        <p15:guide id="2" pos="2880">
+          <p15:clr>
+            <a:srgbClr val="A4A3A4"/>
+          </p15:clr>
+        </p15:guide>
+      </p15:sldGuideLst>
+    </p:ext>
+  </p:extLst>
 </p:presentation>
 </file>
 
+<file path=ppt/changesInfos/changesInfo1.xml><?xml version="1.0" encoding="utf-8"?>
+<pc:chgInfo xmlns:a="http://schemas.openxmlformats.org/drawingml/2006/main" xmlns:r="http://schemas.openxmlformats.org/officeDocument/2006/relationships" xmlns:ac="http://schemas.microsoft.com/office/drawing/2013/main/command" xmlns:pc="http://schemas.microsoft.com/office/powerpoint/2013/main/command">
+  <pc:docChgLst>
+    <pc:chgData name="Bala Gangadhara Tilak Mamidipalli" userId="cc6dced0-af62-4b81-9fa9-0d57949abe2e" providerId="ADAL" clId="{A41D7614-3A55-5359-8898-3B322E14D330}"/>
+    <pc:docChg chg="modSld">
+      <pc:chgData name="Bala Gangadhara Tilak Mamidipalli" userId="cc6dced0-af62-4b81-9fa9-0d57949abe2e" providerId="ADAL" clId="{A41D7614-3A55-5359-8898-3B322E14D330}" dt="2026-10-18T21:47:59.992" v="1" actId="20577"/>
+      <pc:docMkLst>
+        <pc:docMk/>
+      </pc:docMkLst>
+      <pc:sldChg chg="modSp mod">
+        <pc:chgData name="Bala Gangadhara Tilak Mamidipalli" userId="cc6dced0-af62-4b81-9fa9-0d57949abe2e" providerId="ADAL" clId="{A41D7614-3A55-5359-8898-3B322E14D330}" dt="2026-10-18T21:47:59.992" v="1" actId="20577"/>
+        <pc:sldMkLst>
+          <pc:docMk/>
+          <pc:sldMk cId="0" sldId="270"/>
+        </pc:sldMkLst>
+        <pc:spChg chg="mod">
+          <ac:chgData name="Bala Gangadhara Tilak Mamidipalli" userId="cc6dced0-af62-4b81-9fa9-0d57949abe2e" providerId="ADAL" clId="{A41D7614-3A55-5359-8898-3B322E14D330}" dt="2026-10-18T21:47:59.992" v="1" actId="20577"/>
+          <ac:spMkLst>
+            <pc:docMk/>
+            <pc:sldMk cId="0" sldId="270"/>
+            <ac:spMk id="8" creationId="{00000000-0000-0000-0000-000000000000}"/>
+          </ac:spMkLst>
+        </pc:spChg>
+      </pc:sldChg>
+    </pc:docChg>
+  </pc:docChgLst>
+</pc:chgInfo>
+</file>
+
 <file path=ppt/charts/chart1.xml><?xml version="1.0" encoding="utf-8"?>
-<c:chartSpace xmlns:c="http://schemas.openxmlformats.org/drawingml/2006/chart" xmlns:a="http://schemas.openxmlformats.org/drawingml/2006/main" xmlns:r="http://schemas.openxmlformats.org/officeDocument/2006/relationships">
+<c:chartSpace xmlns:c="http://schemas.openxmlformats.org/drawingml/2006/chart" xmlns:a="http://schemas.openxmlformats.org/drawingml/2006/main" xmlns:r="http://schemas.openxmlformats.org/officeDocument/2006/relationships" xmlns:c16r2="http://schemas.microsoft.com/office/drawing/2015/06/chart">
   <c:date1904 val="0"/>
+  <c:lang val="en-US"/>
+  <c:roundedCorners val="1"/>
+  <c:style val="2"/>
   <c:chart>
     <c:autoTitleDeleted val="0"/>
     <c:plotArea>
+      <c:layout/>
       <c:barChart>
         <c:barDir val="col"/>
         <c:grouping val="clustered"/>
+        <c:varyColors val="1"/>
         <c:ser>
           <c:idx val="0"/>
           <c:order val="0"/>
@@ -149,6 +202,40 @@
               <a:srgbClr val="14213D"/>
             </a:solidFill>
           </c:spPr>
+          <c:invertIfNegative val="1"/>
+          <c:dLbls>
+            <c:numFmt formatCode="0.000" sourceLinked="0"/>
+            <c:spPr>
+              <a:noFill/>
+              <a:ln>
+                <a:noFill/>
+              </a:ln>
+              <a:effectLst/>
+            </c:spPr>
+            <c:txPr>
+              <a:bodyPr/>
+              <a:lstStyle/>
+              <a:p>
+                <a:pPr>
+                  <a:defRPr sz="1100"/>
+                </a:pPr>
+                <a:endParaRPr lang="en-US"/>
+              </a:p>
+            </c:txPr>
+            <c:dLblPos val="outEnd"/>
+            <c:showLegendKey val="0"/>
+            <c:showVal val="1"/>
+            <c:showCatName val="0"/>
+            <c:showSerName val="0"/>
+            <c:showPercent val="0"/>
+            <c:showBubbleSize val="0"/>
+            <c:showLeaderLines val="0"/>
+            <c:extLst>
+              <c:ext xmlns:c15="http://schemas.microsoft.com/office/drawing/2012/chart" uri="{CE6537A1-D6FC-4f65-9D91-7224C49458BB}">
+                <c15:showLeaderLines val="0"/>
+              </c:ext>
+            </c:extLst>
+          </c:dLbls>
           <c:cat>
             <c:strRef>
               <c:f>Sheet1!$A$2:$A$5</c:f>
@@ -176,20 +263,34 @@
                 <c:formatCode>General</c:formatCode>
                 <c:ptCount val="4"/>
                 <c:pt idx="0">
-                  <c:v>0.904</c:v>
+                  <c:v>0.90400000000000003</c:v>
                 </c:pt>
                 <c:pt idx="1">
-                  <c:v>0.905</c:v>
+                  <c:v>0.90500000000000003</c:v>
                 </c:pt>
                 <c:pt idx="2">
-                  <c:v>0.891</c:v>
+                  <c:v>0.89100000000000001</c:v>
                 </c:pt>
                 <c:pt idx="3">
-                  <c:v>0.883</c:v>
+                  <c:v>0.88300000000000001</c:v>
                 </c:pt>
               </c:numCache>
             </c:numRef>
           </c:val>
+          <c:extLst>
+            <c:ext xmlns:c14="http://schemas.microsoft.com/office/drawing/2007/8/2/chart" uri="{6F2FDCE9-48DA-4B69-8628-5D25D57E5C99}">
+              <c14:invertSolidFillFmt>
+                <c14:spPr xmlns:c14="http://schemas.microsoft.com/office/drawing/2007/8/2/chart">
+                  <a:solidFill>
+                    <a:srgbClr val="FFFFFF"/>
+                  </a:solidFill>
+                </c14:spPr>
+              </c14:invertSolidFillFmt>
+            </c:ext>
+            <c:ext xmlns:c16="http://schemas.microsoft.com/office/drawing/2014/chart" uri="{C3380CC4-5D6E-409C-BE32-E72D297353CC}">
+              <c16:uniqueId val="{00000000-E669-ED41-BA4B-16B193EDD09A}"/>
+            </c:ext>
+          </c:extLst>
         </c:ser>
         <c:ser>
           <c:idx val="1"/>
@@ -210,6 +311,40 @@
               <a:srgbClr val="2A9D8F"/>
             </a:solidFill>
           </c:spPr>
+          <c:invertIfNegative val="1"/>
+          <c:dLbls>
+            <c:numFmt formatCode="0.000" sourceLinked="0"/>
+            <c:spPr>
+              <a:noFill/>
+              <a:ln>
+                <a:noFill/>
+              </a:ln>
+              <a:effectLst/>
+            </c:spPr>
+            <c:txPr>
+              <a:bodyPr/>
+              <a:lstStyle/>
+              <a:p>
+                <a:pPr>
+                  <a:defRPr sz="1100"/>
+                </a:pPr>
+                <a:endParaRPr lang="en-US"/>
+              </a:p>
+            </c:txPr>
+            <c:dLblPos val="outEnd"/>
+            <c:showLegendKey val="0"/>
+            <c:showVal val="1"/>
+            <c:showCatName val="0"/>
+            <c:showSerName val="0"/>
+            <c:showPercent val="0"/>
+            <c:showBubbleSize val="0"/>
+            <c:showLeaderLines val="0"/>
+            <c:extLst>
+              <c:ext xmlns:c15="http://schemas.microsoft.com/office/drawing/2012/chart" uri="{CE6537A1-D6FC-4f65-9D91-7224C49458BB}">
+                <c15:showLeaderLines val="0"/>
+              </c:ext>
+            </c:extLst>
+          </c:dLbls>
           <c:cat>
             <c:strRef>
               <c:f>Sheet1!$A$2:$A$5</c:f>
@@ -237,32 +372,36 @@
                 <c:formatCode>General</c:formatCode>
                 <c:ptCount val="4"/>
                 <c:pt idx="0">
-                  <c:v>0.969</c:v>
+                  <c:v>0.96899999999999997</c:v>
                 </c:pt>
                 <c:pt idx="1">
                   <c:v>0.97</c:v>
                 </c:pt>
                 <c:pt idx="2">
-                  <c:v>0.965</c:v>
+                  <c:v>0.96499999999999997</c:v>
                 </c:pt>
                 <c:pt idx="3">
-                  <c:v>0.958</c:v>
+                  <c:v>0.95799999999999996</c:v>
                 </c:pt>
               </c:numCache>
             </c:numRef>
           </c:val>
+          <c:extLst>
+            <c:ext xmlns:c14="http://schemas.microsoft.com/office/drawing/2007/8/2/chart" uri="{6F2FDCE9-48DA-4B69-8628-5D25D57E5C99}">
+              <c14:invertSolidFillFmt>
+                <c14:spPr xmlns:c14="http://schemas.microsoft.com/office/drawing/2007/8/2/chart">
+                  <a:solidFill>
+                    <a:srgbClr val="FFFFFF"/>
+                  </a:solidFill>
+                </c14:spPr>
+              </c14:invertSolidFillFmt>
+            </c:ext>
+            <c:ext xmlns:c16="http://schemas.microsoft.com/office/drawing/2014/chart" uri="{C3380CC4-5D6E-409C-BE32-E72D297353CC}">
+              <c16:uniqueId val="{00000001-E669-ED41-BA4B-16B193EDD09A}"/>
+            </c:ext>
+          </c:extLst>
         </c:ser>
         <c:dLbls>
-          <c:numFmt formatCode="0.000" sourceLinked="0"/>
-          <c:txPr>
-            <a:bodyPr/>
-            <a:lstStyle/>
-            <a:p>
-              <a:pPr>
-                <a:defRPr sz="1100"/>
-              </a:pPr>
-            </a:p>
-          </c:txPr>
           <c:dLblPos val="outEnd"/>
           <c:showLegendKey val="0"/>
           <c:showVal val="1"/>
@@ -270,7 +409,6 @@
           <c:showSerName val="0"/>
           <c:showPercent val="0"/>
           <c:showBubbleSize val="0"/>
-          <c:showLeaderLines val="1"/>
         </c:dLbls>
         <c:gapWidth val="60"/>
         <c:axId val="-2068027336"/>
@@ -283,6 +421,7 @@
         </c:scaling>
         <c:delete val="0"/>
         <c:axPos val="b"/>
+        <c:numFmt formatCode="General" sourceLinked="0"/>
         <c:majorTickMark val="out"/>
         <c:minorTickMark val="none"/>
         <c:tickLblPos val="nextTo"/>
@@ -293,6 +432,7 @@
             <a:pPr>
               <a:defRPr sz="1200"/>
             </a:pPr>
+            <a:endParaRPr lang="en-US"/>
           </a:p>
         </c:txPr>
         <c:crossAx val="-2113994440"/>
@@ -305,7 +445,8 @@
       <c:valAx>
         <c:axId val="-2113994440"/>
         <c:scaling>
-          <c:max val="1.0"/>
+          <c:orientation val="minMax"/>
+          <c:max val="1"/>
           <c:min val="0.8"/>
         </c:scaling>
         <c:delete val="0"/>
@@ -319,6 +460,7 @@
             </a:ln>
           </c:spPr>
         </c:majorGridlines>
+        <c:numFmt formatCode="General" sourceLinked="1"/>
         <c:majorTickMark val="out"/>
         <c:minorTickMark val="none"/>
         <c:tickLblPos val="nextTo"/>
@@ -329,10 +471,12 @@
             <a:pPr>
               <a:defRPr sz="1100"/>
             </a:pPr>
+            <a:endParaRPr lang="en-US"/>
           </a:p>
         </c:txPr>
         <c:crossAx val="-2068027336"/>
         <c:crosses val="autoZero"/>
+        <c:crossBetween val="between"/>
       </c:valAx>
     </c:plotArea>
     <c:legend>
@@ -345,10 +489,13 @@
           <a:pPr>
             <a:defRPr sz="1200"/>
           </a:pPr>
+          <a:endParaRPr lang="en-US"/>
         </a:p>
       </c:txPr>
     </c:legend>
+    <c:plotVisOnly val="1"/>
     <c:dispBlanksAs val="gap"/>
+    <c:showDLblsOverMax val="1"/>
   </c:chart>
   <c:txPr>
     <a:bodyPr/>
@@ -367,7 +514,7 @@
 </file>
 
 <file path=ppt/notesMasters/notesMaster1.xml><?xml version="1.0" encoding="utf-8"?>
-<p:notesMaster xmlns:a="http://schemas.openxmlformats.org/drawingml/2006/main" xmlns:p="http://schemas.openxmlformats.org/presentationml/2006/main" xmlns:r="http://schemas.openxmlformats.org/officeDocument/2006/relationships">
+<p:notesMaster xmlns:a="http://schemas.openxmlformats.org/drawingml/2006/main" xmlns:r="http://schemas.openxmlformats.org/officeDocument/2006/relationships" xmlns:p="http://schemas.openxmlformats.org/presentationml/2006/main">
   <p:cSld>
     <p:bg>
       <p:bgRef idx="1001">
@@ -388,241 +535,16 @@
           <a:chExt cx="0" cy="0"/>
         </a:xfrm>
       </p:grpSpPr>
-      <p:sp>
-        <p:nvSpPr>
-          <p:cNvPr id="2" name="Header Placeholder 1"/>
-          <p:cNvSpPr>
-            <a:spLocks noGrp="1"/>
-          </p:cNvSpPr>
-          <p:nvPr>
-            <p:ph type="hdr" sz="quarter"/>
-          </p:nvPr>
-        </p:nvSpPr>
-        <p:spPr>
-          <a:xfrm>
-            <a:off x="0" y="0"/>
-            <a:ext cx="2971800" cy="457200"/>
-          </a:xfrm>
-          <a:prstGeom prst="rect">
-            <a:avLst/>
-          </a:prstGeom>
-        </p:spPr>
-        <p:txBody>
-          <a:bodyPr vert="horz" lIns="91440" tIns="45720" rIns="91440" bIns="45720" rtlCol="0"/>
-          <a:lstStyle>
-            <a:lvl1pPr algn="l">
-              <a:defRPr sz="1200"/>
-            </a:lvl1pPr>
-          </a:lstStyle>
-          <a:p>
-            <a:endParaRPr lang="en-US"/>
-          </a:p>
-        </p:txBody>
-      </p:sp>
-      <p:sp>
-        <p:nvSpPr>
-          <p:cNvPr id="3" name="Date Placeholder 2"/>
-          <p:cNvSpPr>
-            <a:spLocks noGrp="1"/>
-          </p:cNvSpPr>
-          <p:nvPr>
-            <p:ph type="dt" idx="1"/>
-          </p:nvPr>
-        </p:nvSpPr>
-        <p:spPr>
-          <a:xfrm>
-            <a:off x="3884613" y="0"/>
-            <a:ext cx="2971800" cy="457200"/>
-          </a:xfrm>
-          <a:prstGeom prst="rect">
-            <a:avLst/>
-          </a:prstGeom>
-        </p:spPr>
-        <p:txBody>
-          <a:bodyPr vert="horz" lIns="91440" tIns="45720" rIns="91440" bIns="45720" rtlCol="0"/>
-          <a:lstStyle>
-            <a:lvl1pPr algn="r">
-              <a:defRPr sz="1200"/>
-            </a:lvl1pPr>
-          </a:lstStyle>
-          <a:p>
-            <a:fld id="{0F89C1C7-3DCD-1040-A9CF-14679D8B5DDD}" type="datetimeFigureOut">
-              <a:rPr lang="en-US" smtClean="0"/>
-              <a:t>10/17/16</a:t>
-            </a:fld>
-            <a:endParaRPr lang="en-US"/>
-          </a:p>
-        </p:txBody>
-      </p:sp>
-      <p:sp>
-        <p:nvSpPr>
-          <p:cNvPr id="4" name="Slide Image Placeholder 3"/>
-          <p:cNvSpPr>
-            <a:spLocks noGrp="1" noRot="1" noChangeAspect="1"/>
-          </p:cNvSpPr>
-          <p:nvPr>
-            <p:ph type="sldImg" idx="2"/>
-          </p:nvPr>
-        </p:nvSpPr>
-        <p:spPr>
-          <a:xfrm>
-            <a:off x="1143000" y="685800"/>
-            <a:ext cx="4572000" cy="3429000"/>
-          </a:xfrm>
-          <a:prstGeom prst="rect">
-            <a:avLst/>
-          </a:prstGeom>
-          <a:noFill/>
-          <a:ln w="12700">
-            <a:solidFill>
-              <a:prstClr val="black"/>
-            </a:solidFill>
-          </a:ln>
-        </p:spPr>
-        <p:txBody>
-          <a:bodyPr vert="horz" lIns="91440" tIns="45720" rIns="91440" bIns="45720" rtlCol="0" anchor="ctr"/>
-          <a:lstStyle/>
-          <a:p>
-            <a:endParaRPr lang="en-US"/>
-          </a:p>
-        </p:txBody>
-      </p:sp>
-      <p:sp>
-        <p:nvSpPr>
-          <p:cNvPr id="5" name="Notes Placeholder 4"/>
-          <p:cNvSpPr>
-            <a:spLocks noGrp="1"/>
-          </p:cNvSpPr>
-          <p:nvPr>
-            <p:ph type="body" sz="quarter" idx="3"/>
-          </p:nvPr>
-        </p:nvSpPr>
-        <p:spPr>
-          <a:xfrm>
-            <a:off x="685800" y="4343400"/>
-            <a:ext cx="5486400" cy="4114800"/>
-          </a:xfrm>
-          <a:prstGeom prst="rect">
-            <a:avLst/>
-          </a:prstGeom>
-        </p:spPr>
-        <p:txBody>
-          <a:bodyPr vert="horz" lIns="91440" tIns="45720" rIns="91440" bIns="45720" rtlCol="0"/>
-          <a:lstStyle/>
-          <a:p>
-            <a:pPr lvl="0"/>
-            <a:r>
-              <a:rPr lang="en-US" smtClean="0"/>
-              <a:t>Click to edit Master text styles</a:t>
-            </a:r>
-          </a:p>
-          <a:p>
-            <a:pPr lvl="1"/>
-            <a:r>
-              <a:rPr lang="en-US" smtClean="0"/>
-              <a:t>Second level</a:t>
-            </a:r>
-          </a:p>
-          <a:p>
-            <a:pPr lvl="2"/>
-            <a:r>
-              <a:rPr lang="en-US" smtClean="0"/>
-              <a:t>Third level</a:t>
-            </a:r>
-          </a:p>
-          <a:p>
-            <a:pPr lvl="3"/>
-            <a:r>
-              <a:rPr lang="en-US" smtClean="0"/>
-              <a:t>Fourth level</a:t>
-            </a:r>
-          </a:p>
-          <a:p>
-            <a:pPr lvl="4"/>
-            <a:r>
-              <a:rPr lang="en-US" smtClean="0"/>
-              <a:t>Fifth level</a:t>
-            </a:r>
-            <a:endParaRPr lang="en-US"/>
-          </a:p>
-        </p:txBody>
-      </p:sp>
-      <p:sp>
-        <p:nvSpPr>
-          <p:cNvPr id="6" name="Footer Placeholder 5"/>
-          <p:cNvSpPr>
-            <a:spLocks noGrp="1"/>
-          </p:cNvSpPr>
-          <p:nvPr>
-            <p:ph type="ftr" sz="quarter" idx="4"/>
-          </p:nvPr>
-        </p:nvSpPr>
-        <p:spPr>
-          <a:xfrm>
-            <a:off x="0" y="8685213"/>
-            <a:ext cx="2971800" cy="457200"/>
-          </a:xfrm>
-          <a:prstGeom prst="rect">
-            <a:avLst/>
-          </a:prstGeom>
-        </p:spPr>
-        <p:txBody>
-          <a:bodyPr vert="horz" lIns="91440" tIns="45720" rIns="91440" bIns="45720" rtlCol="0" anchor="b"/>
-          <a:lstStyle>
-            <a:lvl1pPr algn="l">
-              <a:defRPr sz="1200"/>
-            </a:lvl1pPr>
-          </a:lstStyle>
-          <a:p>
-            <a:endParaRPr lang="en-US"/>
-          </a:p>
-        </p:txBody>
-      </p:sp>
-      <p:sp>
-        <p:nvSpPr>
-          <p:cNvPr id="7" name="Slide Number Placeholder 6"/>
-          <p:cNvSpPr>
-            <a:spLocks noGrp="1"/>
-          </p:cNvSpPr>
-          <p:nvPr>
-            <p:ph type="sldNum" sz="quarter" idx="5"/>
-          </p:nvPr>
-        </p:nvSpPr>
-        <p:spPr>
-          <a:xfrm>
-            <a:off x="3884613" y="8685213"/>
-            <a:ext cx="2971800" cy="457200"/>
-          </a:xfrm>
-          <a:prstGeom prst="rect">
-            <a:avLst/>
-          </a:prstGeom>
-        </p:spPr>
-        <p:txBody>
-          <a:bodyPr vert="horz" lIns="91440" tIns="45720" rIns="91440" bIns="45720" rtlCol="0" anchor="b"/>
-          <a:lstStyle>
-            <a:lvl1pPr algn="r">
-              <a:defRPr sz="1200"/>
-            </a:lvl1pPr>
-          </a:lstStyle>
-          <a:p>
-            <a:fld id="{BB5E49A5-4136-284D-997B-48E1D791AD67}" type="slidenum">
-              <a:rPr lang="en-US" smtClean="0"/>
-              <a:t>‹#›</a:t>
-            </a:fld>
-            <a:endParaRPr lang="en-US"/>
-          </a:p>
-        </p:txBody>
-      </p:sp>
     </p:spTree>
     <p:extLst>
       <p:ext uri="{BB962C8B-B14F-4D97-AF65-F5344CB8AC3E}">
-        <p14:creationId xmlns:p14="http://schemas.microsoft.com/office/powerpoint/2010/main" val="2623252185"/>
+        <p14:creationId xmlns:p14="http://schemas.microsoft.com/office/powerpoint/2010/main" val="641042796"/>
       </p:ext>
     </p:extLst>
   </p:cSld>
   <p:clrMap bg1="lt1" tx1="dk1" bg2="lt2" tx2="dk2" accent1="accent1" accent2="accent2" accent3="accent3" accent4="accent4" accent5="accent5" accent6="accent6" hlink="hlink" folHlink="folHlink"/>
   <p:notesStyle>
-    <a:lvl1pPr marL="0" algn="l" defTabSz="457200" rtl="0" eaLnBrk="1" latinLnBrk="0" hangingPunct="1">
+    <a:lvl1pPr marL="0" algn="l" defTabSz="914400" rtl="0" eaLnBrk="1" latinLnBrk="0" hangingPunct="1">
       <a:defRPr sz="1200" kern="1200">
         <a:solidFill>
           <a:schemeClr val="tx1"/>
@@ -632,7 +554,7 @@
         <a:cs typeface="+mn-cs"/>
       </a:defRPr>
     </a:lvl1pPr>
-    <a:lvl2pPr marL="457200" algn="l" defTabSz="457200" rtl="0" eaLnBrk="1" latinLnBrk="0" hangingPunct="1">
+    <a:lvl2pPr marL="457200" algn="l" defTabSz="914400" rtl="0" eaLnBrk="1" latinLnBrk="0" hangingPunct="1">
       <a:defRPr sz="1200" kern="1200">
         <a:solidFill>
           <a:schemeClr val="tx1"/>
@@ -642,7 +564,7 @@
         <a:cs typeface="+mn-cs"/>
       </a:defRPr>
     </a:lvl2pPr>
-    <a:lvl3pPr marL="914400" algn="l" defTabSz="457200" rtl="0" eaLnBrk="1" latinLnBrk="0" hangingPunct="1">
+    <a:lvl3pPr marL="914400" algn="l" defTabSz="914400" rtl="0" eaLnBrk="1" latinLnBrk="0" hangingPunct="1">
       <a:defRPr sz="1200" kern="1200">
         <a:solidFill>
           <a:schemeClr val="tx1"/>
@@ -652,7 +574,7 @@
         <a:cs typeface="+mn-cs"/>
       </a:defRPr>
     </a:lvl3pPr>
-    <a:lvl4pPr marL="1371600" algn="l" defTabSz="457200" rtl="0" eaLnBrk="1" latinLnBrk="0" hangingPunct="1">
+    <a:lvl4pPr marL="1371600" algn="l" defTabSz="914400" rtl="0" eaLnBrk="1" latinLnBrk="0" hangingPunct="1">
       <a:defRPr sz="1200" kern="1200">
         <a:solidFill>
           <a:schemeClr val="tx1"/>
@@ -662,7 +584,7 @@
         <a:cs typeface="+mn-cs"/>
       </a:defRPr>
     </a:lvl4pPr>
-    <a:lvl5pPr marL="1828800" algn="l" defTabSz="457200" rtl="0" eaLnBrk="1" latinLnBrk="0" hangingPunct="1">
+    <a:lvl5pPr marL="1828800" algn="l" defTabSz="914400" rtl="0" eaLnBrk="1" latinLnBrk="0" hangingPunct="1">
       <a:defRPr sz="1200" kern="1200">
         <a:solidFill>
           <a:schemeClr val="tx1"/>
@@ -672,7 +594,7 @@
         <a:cs typeface="+mn-cs"/>
       </a:defRPr>
     </a:lvl5pPr>
-    <a:lvl6pPr marL="2286000" algn="l" defTabSz="457200" rtl="0" eaLnBrk="1" latinLnBrk="0" hangingPunct="1">
+    <a:lvl6pPr marL="2286000" algn="l" defTabSz="914400" rtl="0" eaLnBrk="1" latinLnBrk="0" hangingPunct="1">
       <a:defRPr sz="1200" kern="1200">
         <a:solidFill>
           <a:schemeClr val="tx1"/>
@@ -682,7 +604,7 @@
         <a:cs typeface="+mn-cs"/>
       </a:defRPr>
     </a:lvl6pPr>
-    <a:lvl7pPr marL="2743200" algn="l" defTabSz="457200" rtl="0" eaLnBrk="1" latinLnBrk="0" hangingPunct="1">
+    <a:lvl7pPr marL="2743200" algn="l" defTabSz="914400" rtl="0" eaLnBrk="1" latinLnBrk="0" hangingPunct="1">
       <a:defRPr sz="1200" kern="1200">
         <a:solidFill>
           <a:schemeClr val="tx1"/>
@@ -692,7 +614,7 @@
         <a:cs typeface="+mn-cs"/>
       </a:defRPr>
     </a:lvl7pPr>
-    <a:lvl8pPr marL="3200400" algn="l" defTabSz="457200" rtl="0" eaLnBrk="1" latinLnBrk="0" hangingPunct="1">
+    <a:lvl8pPr marL="3200400" algn="l" defTabSz="914400" rtl="0" eaLnBrk="1" latinLnBrk="0" hangingPunct="1">
       <a:defRPr sz="1200" kern="1200">
         <a:solidFill>
           <a:schemeClr val="tx1"/>
@@ -702,7 +624,7 @@
         <a:cs typeface="+mn-cs"/>
       </a:defRPr>
     </a:lvl8pPr>
-    <a:lvl9pPr marL="3657600" algn="l" defTabSz="457200" rtl="0" eaLnBrk="1" latinLnBrk="0" hangingPunct="1">
+    <a:lvl9pPr marL="3657600" algn="l" defTabSz="914400" rtl="0" eaLnBrk="1" latinLnBrk="0" hangingPunct="1">
       <a:defRPr sz="1200" kern="1200">
         <a:solidFill>
           <a:schemeClr val="tx1"/>
@@ -717,7 +639,7 @@
 </file>
 
 <file path=ppt/notesSlides/notesSlide1.xml><?xml version="1.0" encoding="utf-8"?>
-<p:notes xmlns:a="http://schemas.openxmlformats.org/drawingml/2006/main" xmlns:p="http://schemas.openxmlformats.org/presentationml/2006/main" xmlns:r="http://schemas.openxmlformats.org/officeDocument/2006/relationships">
+<p:notes xmlns:a="http://schemas.openxmlformats.org/drawingml/2006/main" xmlns:r="http://schemas.openxmlformats.org/officeDocument/2006/relationships" xmlns:p="http://schemas.openxmlformats.org/presentationml/2006/main">
   <p:cSld>
     <p:spTree>
       <p:nvGrpSpPr>
@@ -737,7 +659,7 @@
         <p:nvSpPr>
           <p:cNvPr id="2" name="Slide Image Placeholder 1"/>
           <p:cNvSpPr>
-            <a:spLocks noGrp="1"/>
+            <a:spLocks noGrp="1" noRot="1" noChangeAspect="1"/>
           </p:cNvSpPr>
           <p:nvPr>
             <p:ph type="sldImg" idx="2"/>
@@ -752,7 +674,7 @@
             <a:spLocks noGrp="1"/>
           </p:cNvSpPr>
           <p:nvPr>
-            <p:ph type="body" idx="3" sz="quarter"/>
+            <p:ph type="body" sz="quarter" idx="3"/>
           </p:nvPr>
         </p:nvSpPr>
         <p:spPr/>
@@ -773,7 +695,7 @@
             <a:spLocks noGrp="1"/>
           </p:cNvSpPr>
           <p:nvPr>
-            <p:ph type="sldNum" idx="5" sz="quarter"/>
+            <p:ph type="sldNum" sz="quarter" idx="5"/>
           </p:nvPr>
         </p:nvSpPr>
         <p:spPr/>
@@ -787,7 +709,7 @@
 </file>
 
 <file path=ppt/notesSlides/notesSlide10.xml><?xml version="1.0" encoding="utf-8"?>
-<p:notes xmlns:a="http://schemas.openxmlformats.org/drawingml/2006/main" xmlns:p="http://schemas.openxmlformats.org/presentationml/2006/main" xmlns:r="http://schemas.openxmlformats.org/officeDocument/2006/relationships">
+<p:notes xmlns:a="http://schemas.openxmlformats.org/drawingml/2006/main" xmlns:r="http://schemas.openxmlformats.org/officeDocument/2006/relationships" xmlns:p="http://schemas.openxmlformats.org/presentationml/2006/main">
   <p:cSld>
     <p:spTree>
       <p:nvGrpSpPr>
@@ -807,7 +729,7 @@
         <p:nvSpPr>
           <p:cNvPr id="2" name="Slide Image Placeholder 1"/>
           <p:cNvSpPr>
-            <a:spLocks noGrp="1"/>
+            <a:spLocks noGrp="1" noRot="1" noChangeAspect="1"/>
           </p:cNvSpPr>
           <p:nvPr>
             <p:ph type="sldImg" idx="2"/>
@@ -822,7 +744,7 @@
             <a:spLocks noGrp="1"/>
           </p:cNvSpPr>
           <p:nvPr>
-            <p:ph type="body" idx="3" sz="quarter"/>
+            <p:ph type="body" sz="quarter" idx="3"/>
           </p:nvPr>
         </p:nvSpPr>
         <p:spPr/>
@@ -843,7 +765,7 @@
             <a:spLocks noGrp="1"/>
           </p:cNvSpPr>
           <p:nvPr>
-            <p:ph type="sldNum" idx="5" sz="quarter"/>
+            <p:ph type="sldNum" sz="quarter" idx="5"/>
           </p:nvPr>
         </p:nvSpPr>
         <p:spPr/>
@@ -857,7 +779,7 @@
 </file>
 
 <file path=ppt/notesSlides/notesSlide11.xml><?xml version="1.0" encoding="utf-8"?>
-<p:notes xmlns:a="http://schemas.openxmlformats.org/drawingml/2006/main" xmlns:p="http://schemas.openxmlformats.org/presentationml/2006/main" xmlns:r="http://schemas.openxmlformats.org/officeDocument/2006/relationships">
+<p:notes xmlns:a="http://schemas.openxmlformats.org/drawingml/2006/main" xmlns:r="http://schemas.openxmlformats.org/officeDocument/2006/relationships" xmlns:p="http://schemas.openxmlformats.org/presentationml/2006/main">
   <p:cSld>
     <p:spTree>
       <p:nvGrpSpPr>
@@ -877,7 +799,7 @@
         <p:nvSpPr>
           <p:cNvPr id="2" name="Slide Image Placeholder 1"/>
           <p:cNvSpPr>
-            <a:spLocks noGrp="1"/>
+            <a:spLocks noGrp="1" noRot="1" noChangeAspect="1"/>
           </p:cNvSpPr>
           <p:nvPr>
             <p:ph type="sldImg" idx="2"/>
@@ -892,7 +814,7 @@
             <a:spLocks noGrp="1"/>
           </p:cNvSpPr>
           <p:nvPr>
-            <p:ph type="body" idx="3" sz="quarter"/>
+            <p:ph type="body" sz="quarter" idx="3"/>
           </p:nvPr>
         </p:nvSpPr>
         <p:spPr/>
@@ -913,7 +835,7 @@
             <a:spLocks noGrp="1"/>
           </p:cNvSpPr>
           <p:nvPr>
-            <p:ph type="sldNum" idx="5" sz="quarter"/>
+            <p:ph type="sldNum" sz="quarter" idx="5"/>
           </p:nvPr>
         </p:nvSpPr>
         <p:spPr/>
@@ -927,7 +849,7 @@
 </file>
 
 <file path=ppt/notesSlides/notesSlide12.xml><?xml version="1.0" encoding="utf-8"?>
-<p:notes xmlns:a="http://schemas.openxmlformats.org/drawingml/2006/main" xmlns:p="http://schemas.openxmlformats.org/presentationml/2006/main" xmlns:r="http://schemas.openxmlformats.org/officeDocument/2006/relationships">
+<p:notes xmlns:a="http://schemas.openxmlformats.org/drawingml/2006/main" xmlns:r="http://schemas.openxmlformats.org/officeDocument/2006/relationships" xmlns:p="http://schemas.openxmlformats.org/presentationml/2006/main">
   <p:cSld>
     <p:spTree>
       <p:nvGrpSpPr>
@@ -947,7 +869,7 @@
         <p:nvSpPr>
           <p:cNvPr id="2" name="Slide Image Placeholder 1"/>
           <p:cNvSpPr>
-            <a:spLocks noGrp="1"/>
+            <a:spLocks noGrp="1" noRot="1" noChangeAspect="1"/>
           </p:cNvSpPr>
           <p:nvPr>
             <p:ph type="sldImg" idx="2"/>
@@ -962,7 +884,7 @@
             <a:spLocks noGrp="1"/>
           </p:cNvSpPr>
           <p:nvPr>
-            <p:ph type="body" idx="3" sz="quarter"/>
+            <p:ph type="body" sz="quarter" idx="3"/>
           </p:nvPr>
         </p:nvSpPr>
         <p:spPr/>
@@ -983,7 +905,7 @@
             <a:spLocks noGrp="1"/>
           </p:cNvSpPr>
           <p:nvPr>
-            <p:ph type="sldNum" idx="5" sz="quarter"/>
+            <p:ph type="sldNum" sz="quarter" idx="5"/>
           </p:nvPr>
         </p:nvSpPr>
         <p:spPr/>
@@ -997,7 +919,7 @@
 </file>
 
 <file path=ppt/notesSlides/notesSlide13.xml><?xml version="1.0" encoding="utf-8"?>
-<p:notes xmlns:a="http://schemas.openxmlformats.org/drawingml/2006/main" xmlns:p="http://schemas.openxmlformats.org/presentationml/2006/main" xmlns:r="http://schemas.openxmlformats.org/officeDocument/2006/relationships">
+<p:notes xmlns:a="http://schemas.openxmlformats.org/drawingml/2006/main" xmlns:r="http://schemas.openxmlformats.org/officeDocument/2006/relationships" xmlns:p="http://schemas.openxmlformats.org/presentationml/2006/main">
   <p:cSld>
     <p:spTree>
       <p:nvGrpSpPr>
@@ -1017,7 +939,7 @@
         <p:nvSpPr>
           <p:cNvPr id="2" name="Slide Image Placeholder 1"/>
           <p:cNvSpPr>
-            <a:spLocks noGrp="1"/>
+            <a:spLocks noGrp="1" noRot="1" noChangeAspect="1"/>
           </p:cNvSpPr>
           <p:nvPr>
             <p:ph type="sldImg" idx="2"/>
@@ -1032,7 +954,7 @@
             <a:spLocks noGrp="1"/>
           </p:cNvSpPr>
           <p:nvPr>
-            <p:ph type="body" idx="3" sz="quarter"/>
+            <p:ph type="body" sz="quarter" idx="3"/>
           </p:nvPr>
         </p:nvSpPr>
         <p:spPr/>
@@ -1053,7 +975,7 @@
             <a:spLocks noGrp="1"/>
           </p:cNvSpPr>
           <p:nvPr>
-            <p:ph type="sldNum" idx="5" sz="quarter"/>
+            <p:ph type="sldNum" sz="quarter" idx="5"/>
           </p:nvPr>
         </p:nvSpPr>
         <p:spPr/>
@@ -1067,7 +989,7 @@
 </file>
 
 <file path=ppt/notesSlides/notesSlide14.xml><?xml version="1.0" encoding="utf-8"?>
-<p:notes xmlns:a="http://schemas.openxmlformats.org/drawingml/2006/main" xmlns:p="http://schemas.openxmlformats.org/presentationml/2006/main" xmlns:r="http://schemas.openxmlformats.org/officeDocument/2006/relationships">
+<p:notes xmlns:a="http://schemas.openxmlformats.org/drawingml/2006/main" xmlns:r="http://schemas.openxmlformats.org/officeDocument/2006/relationships" xmlns:p="http://schemas.openxmlformats.org/presentationml/2006/main">
   <p:cSld>
     <p:spTree>
       <p:nvGrpSpPr>
@@ -1087,7 +1009,7 @@
         <p:nvSpPr>
           <p:cNvPr id="2" name="Slide Image Placeholder 1"/>
           <p:cNvSpPr>
-            <a:spLocks noGrp="1"/>
+            <a:spLocks noGrp="1" noRot="1" noChangeAspect="1"/>
           </p:cNvSpPr>
           <p:nvPr>
             <p:ph type="sldImg" idx="2"/>
@@ -1102,7 +1024,7 @@
             <a:spLocks noGrp="1"/>
           </p:cNvSpPr>
           <p:nvPr>
-            <p:ph type="body" idx="3" sz="quarter"/>
+            <p:ph type="body" sz="quarter" idx="3"/>
           </p:nvPr>
         </p:nvSpPr>
         <p:spPr/>
@@ -1123,7 +1045,7 @@
             <a:spLocks noGrp="1"/>
           </p:cNvSpPr>
           <p:nvPr>
-            <p:ph type="sldNum" idx="5" sz="quarter"/>
+            <p:ph type="sldNum" sz="quarter" idx="5"/>
           </p:nvPr>
         </p:nvSpPr>
         <p:spPr/>
@@ -1137,7 +1059,7 @@
 </file>
 
 <file path=ppt/notesSlides/notesSlide15.xml><?xml version="1.0" encoding="utf-8"?>
-<p:notes xmlns:a="http://schemas.openxmlformats.org/drawingml/2006/main" xmlns:p="http://schemas.openxmlformats.org/presentationml/2006/main" xmlns:r="http://schemas.openxmlformats.org/officeDocument/2006/relationships">
+<p:notes xmlns:a="http://schemas.openxmlformats.org/drawingml/2006/main" xmlns:r="http://schemas.openxmlformats.org/officeDocument/2006/relationships" xmlns:p="http://schemas.openxmlformats.org/presentationml/2006/main">
   <p:cSld>
     <p:spTree>
       <p:nvGrpSpPr>
@@ -1157,7 +1079,7 @@
         <p:nvSpPr>
           <p:cNvPr id="2" name="Slide Image Placeholder 1"/>
           <p:cNvSpPr>
-            <a:spLocks noGrp="1"/>
+            <a:spLocks noGrp="1" noRot="1" noChangeAspect="1"/>
           </p:cNvSpPr>
           <p:nvPr>
             <p:ph type="sldImg" idx="2"/>
@@ -1172,7 +1094,7 @@
             <a:spLocks noGrp="1"/>
           </p:cNvSpPr>
           <p:nvPr>
-            <p:ph type="body" idx="3" sz="quarter"/>
+            <p:ph type="body" sz="quarter" idx="3"/>
           </p:nvPr>
         </p:nvSpPr>
         <p:spPr/>
@@ -1193,7 +1115,7 @@
             <a:spLocks noGrp="1"/>
           </p:cNvSpPr>
           <p:nvPr>
-            <p:ph type="sldNum" idx="5" sz="quarter"/>
+            <p:ph type="sldNum" sz="quarter" idx="5"/>
           </p:nvPr>
         </p:nvSpPr>
         <p:spPr/>
@@ -1207,7 +1129,7 @@
 </file>
 
 <file path=ppt/notesSlides/notesSlide2.xml><?xml version="1.0" encoding="utf-8"?>
-<p:notes xmlns:a="http://schemas.openxmlformats.org/drawingml/2006/main" xmlns:p="http://schemas.openxmlformats.org/presentationml/2006/main" xmlns:r="http://schemas.openxmlformats.org/officeDocument/2006/relationships">
+<p:notes xmlns:a="http://schemas.openxmlformats.org/drawingml/2006/main" xmlns:r="http://schemas.openxmlformats.org/officeDocument/2006/relationships" xmlns:p="http://schemas.openxmlformats.org/presentationml/2006/main">
   <p:cSld>
     <p:spTree>
       <p:nvGrpSpPr>
@@ -1227,7 +1149,7 @@
         <p:nvSpPr>
           <p:cNvPr id="2" name="Slide Image Placeholder 1"/>
           <p:cNvSpPr>
-            <a:spLocks noGrp="1"/>
+            <a:spLocks noGrp="1" noRot="1" noChangeAspect="1"/>
           </p:cNvSpPr>
           <p:nvPr>
             <p:ph type="sldImg" idx="2"/>
@@ -1242,7 +1164,7 @@
             <a:spLocks noGrp="1"/>
           </p:cNvSpPr>
           <p:nvPr>
-            <p:ph type="body" idx="3" sz="quarter"/>
+            <p:ph type="body" sz="quarter" idx="3"/>
           </p:nvPr>
         </p:nvSpPr>
         <p:spPr/>
@@ -1263,7 +1185,7 @@
             <a:spLocks noGrp="1"/>
           </p:cNvSpPr>
           <p:nvPr>
-            <p:ph type="sldNum" idx="5" sz="quarter"/>
+            <p:ph type="sldNum" sz="quarter" idx="5"/>
           </p:nvPr>
         </p:nvSpPr>
         <p:spPr/>
@@ -1277,7 +1199,7 @@
 </file>
 
 <file path=ppt/notesSlides/notesSlide3.xml><?xml version="1.0" encoding="utf-8"?>
-<p:notes xmlns:a="http://schemas.openxmlformats.org/drawingml/2006/main" xmlns:p="http://schemas.openxmlformats.org/presentationml/2006/main" xmlns:r="http://schemas.openxmlformats.org/officeDocument/2006/relationships">
+<p:notes xmlns:a="http://schemas.openxmlformats.org/drawingml/2006/main" xmlns:r="http://schemas.openxmlformats.org/officeDocument/2006/relationships" xmlns:p="http://schemas.openxmlformats.org/presentationml/2006/main">
   <p:cSld>
     <p:spTree>
       <p:nvGrpSpPr>
@@ -1297,7 +1219,7 @@
         <p:nvSpPr>
           <p:cNvPr id="2" name="Slide Image Placeholder 1"/>
           <p:cNvSpPr>
-            <a:spLocks noGrp="1"/>
+            <a:spLocks noGrp="1" noRot="1" noChangeAspect="1"/>
           </p:cNvSpPr>
           <p:nvPr>
             <p:ph type="sldImg" idx="2"/>
@@ -1312,7 +1234,7 @@
             <a:spLocks noGrp="1"/>
           </p:cNvSpPr>
           <p:nvPr>
-            <p:ph type="body" idx="3" sz="quarter"/>
+            <p:ph type="body" sz="quarter" idx="3"/>
           </p:nvPr>
         </p:nvSpPr>
         <p:spPr/>
@@ -1333,7 +1255,7 @@
             <a:spLocks noGrp="1"/>
           </p:cNvSpPr>
           <p:nvPr>
-            <p:ph type="sldNum" idx="5" sz="quarter"/>
+            <p:ph type="sldNum" sz="quarter" idx="5"/>
           </p:nvPr>
         </p:nvSpPr>
         <p:spPr/>
@@ -1347,7 +1269,7 @@
 </file>
 
 <file path=ppt/notesSlides/notesSlide4.xml><?xml version="1.0" encoding="utf-8"?>
-<p:notes xmlns:a="http://schemas.openxmlformats.org/drawingml/2006/main" xmlns:p="http://schemas.openxmlformats.org/presentationml/2006/main" xmlns:r="http://schemas.openxmlformats.org/officeDocument/2006/relationships">
+<p:notes xmlns:a="http://schemas.openxmlformats.org/drawingml/2006/main" xmlns:r="http://schemas.openxmlformats.org/officeDocument/2006/relationships" xmlns:p="http://schemas.openxmlformats.org/presentationml/2006/main">
   <p:cSld>
     <p:spTree>
       <p:nvGrpSpPr>
@@ -1367,7 +1289,7 @@
         <p:nvSpPr>
           <p:cNvPr id="2" name="Slide Image Placeholder 1"/>
           <p:cNvSpPr>
-            <a:spLocks noGrp="1"/>
+            <a:spLocks noGrp="1" noRot="1" noChangeAspect="1"/>
           </p:cNvSpPr>
           <p:nvPr>
             <p:ph type="sldImg" idx="2"/>
@@ -1382,7 +1304,7 @@
             <a:spLocks noGrp="1"/>
           </p:cNvSpPr>
           <p:nvPr>
-            <p:ph type="body" idx="3" sz="quarter"/>
+            <p:ph type="body" sz="quarter" idx="3"/>
           </p:nvPr>
         </p:nvSpPr>
         <p:spPr/>
@@ -1403,7 +1325,7 @@
             <a:spLocks noGrp="1"/>
           </p:cNvSpPr>
           <p:nvPr>
-            <p:ph type="sldNum" idx="5" sz="quarter"/>
+            <p:ph type="sldNum" sz="quarter" idx="5"/>
           </p:nvPr>
         </p:nvSpPr>
         <p:spPr/>
@@ -1417,7 +1339,7 @@
 </file>
 
 <file path=ppt/notesSlides/notesSlide5.xml><?xml version="1.0" encoding="utf-8"?>
-<p:notes xmlns:a="http://schemas.openxmlformats.org/drawingml/2006/main" xmlns:p="http://schemas.openxmlformats.org/presentationml/2006/main" xmlns:r="http://schemas.openxmlformats.org/officeDocument/2006/relationships">
+<p:notes xmlns:a="http://schemas.openxmlformats.org/drawingml/2006/main" xmlns:r="http://schemas.openxmlformats.org/officeDocument/2006/relationships" xmlns:p="http://schemas.openxmlformats.org/presentationml/2006/main">
   <p:cSld>
     <p:spTree>
       <p:nvGrpSpPr>
@@ -1437,7 +1359,7 @@
         <p:nvSpPr>
           <p:cNvPr id="2" name="Slide Image Placeholder 1"/>
           <p:cNvSpPr>
-            <a:spLocks noGrp="1"/>
+            <a:spLocks noGrp="1" noRot="1" noChangeAspect="1"/>
           </p:cNvSpPr>
           <p:nvPr>
             <p:ph type="sldImg" idx="2"/>
@@ -1452,7 +1374,7 @@
             <a:spLocks noGrp="1"/>
           </p:cNvSpPr>
           <p:nvPr>
-            <p:ph type="body" idx="3" sz="quarter"/>
+            <p:ph type="body" sz="quarter" idx="3"/>
           </p:nvPr>
         </p:nvSpPr>
         <p:spPr/>
@@ -1473,7 +1395,7 @@
             <a:spLocks noGrp="1"/>
           </p:cNvSpPr>
           <p:nvPr>
-            <p:ph type="sldNum" idx="5" sz="quarter"/>
+            <p:ph type="sldNum" sz="quarter" idx="5"/>
           </p:nvPr>
         </p:nvSpPr>
         <p:spPr/>
@@ -1487,7 +1409,7 @@
 </file>
 
 <file path=ppt/notesSlides/notesSlide6.xml><?xml version="1.0" encoding="utf-8"?>
-<p:notes xmlns:a="http://schemas.openxmlformats.org/drawingml/2006/main" xmlns:p="http://schemas.openxmlformats.org/presentationml/2006/main" xmlns:r="http://schemas.openxmlformats.org/officeDocument/2006/relationships">
+<p:notes xmlns:a="http://schemas.openxmlformats.org/drawingml/2006/main" xmlns:r="http://schemas.openxmlformats.org/officeDocument/2006/relationships" xmlns:p="http://schemas.openxmlformats.org/presentationml/2006/main">
   <p:cSld>
     <p:spTree>
       <p:nvGrpSpPr>
@@ -1507,7 +1429,7 @@
         <p:nvSpPr>
           <p:cNvPr id="2" name="Slide Image Placeholder 1"/>
           <p:cNvSpPr>
-            <a:spLocks noGrp="1"/>
+            <a:spLocks noGrp="1" noRot="1" noChangeAspect="1"/>
           </p:cNvSpPr>
           <p:nvPr>
             <p:ph type="sldImg" idx="2"/>
@@ -1522,7 +1444,7 @@
             <a:spLocks noGrp="1"/>
           </p:cNvSpPr>
           <p:nvPr>
-            <p:ph type="body" idx="3" sz="quarter"/>
+            <p:ph type="body" sz="quarter" idx="3"/>
           </p:nvPr>
         </p:nvSpPr>
         <p:spPr/>
@@ -1543,7 +1465,7 @@
             <a:spLocks noGrp="1"/>
           </p:cNvSpPr>
           <p:nvPr>
-            <p:ph type="sldNum" idx="5" sz="quarter"/>
+            <p:ph type="sldNum" sz="quarter" idx="5"/>
           </p:nvPr>
         </p:nvSpPr>
         <p:spPr/>
@@ -1557,7 +1479,7 @@
 </file>
 
 <file path=ppt/notesSlides/notesSlide7.xml><?xml version="1.0" encoding="utf-8"?>
-<p:notes xmlns:a="http://schemas.openxmlformats.org/drawingml/2006/main" xmlns:p="http://schemas.openxmlformats.org/presentationml/2006/main" xmlns:r="http://schemas.openxmlformats.org/officeDocument/2006/relationships">
+<p:notes xmlns:a="http://schemas.openxmlformats.org/drawingml/2006/main" xmlns:r="http://schemas.openxmlformats.org/officeDocument/2006/relationships" xmlns:p="http://schemas.openxmlformats.org/presentationml/2006/main">
   <p:cSld>
     <p:spTree>
       <p:nvGrpSpPr>
@@ -1577,7 +1499,7 @@
         <p:nvSpPr>
           <p:cNvPr id="2" name="Slide Image Placeholder 1"/>
           <p:cNvSpPr>
-            <a:spLocks noGrp="1"/>
+            <a:spLocks noGrp="1" noRot="1" noChangeAspect="1"/>
           </p:cNvSpPr>
           <p:nvPr>
             <p:ph type="sldImg" idx="2"/>
@@ -1592,7 +1514,7 @@
             <a:spLocks noGrp="1"/>
           </p:cNvSpPr>
           <p:nvPr>
-            <p:ph type="body" idx="3" sz="quarter"/>
+            <p:ph type="body" sz="quarter" idx="3"/>
           </p:nvPr>
         </p:nvSpPr>
         <p:spPr/>
@@ -1613,7 +1535,7 @@
             <a:spLocks noGrp="1"/>
           </p:cNvSpPr>
           <p:nvPr>
-            <p:ph type="sldNum" idx="5" sz="quarter"/>
+            <p:ph type="sldNum" sz="quarter" idx="5"/>
           </p:nvPr>
         </p:nvSpPr>
         <p:spPr/>
@@ -1627,7 +1549,7 @@
 </file>
 
 <file path=ppt/notesSlides/notesSlide8.xml><?xml version="1.0" encoding="utf-8"?>
-<p:notes xmlns:a="http://schemas.openxmlformats.org/drawingml/2006/main" xmlns:p="http://schemas.openxmlformats.org/presentationml/2006/main" xmlns:r="http://schemas.openxmlformats.org/officeDocument/2006/relationships">
+<p:notes xmlns:a="http://schemas.openxmlformats.org/drawingml/2006/main" xmlns:r="http://schemas.openxmlformats.org/officeDocument/2006/relationships" xmlns:p="http://schemas.openxmlformats.org/presentationml/2006/main">
   <p:cSld>
     <p:spTree>
       <p:nvGrpSpPr>
@@ -1647,7 +1569,7 @@
         <p:nvSpPr>
           <p:cNvPr id="2" name="Slide Image Placeholder 1"/>
           <p:cNvSpPr>
-            <a:spLocks noGrp="1"/>
+            <a:spLocks noGrp="1" noRot="1" noChangeAspect="1"/>
           </p:cNvSpPr>
           <p:nvPr>
             <p:ph type="sldImg" idx="2"/>
@@ -1662,7 +1584,7 @@
             <a:spLocks noGrp="1"/>
           </p:cNvSpPr>
           <p:nvPr>
-            <p:ph type="body" idx="3" sz="quarter"/>
+            <p:ph type="body" sz="quarter" idx="3"/>
           </p:nvPr>
         </p:nvSpPr>
         <p:spPr/>
@@ -1683,7 +1605,7 @@
             <a:spLocks noGrp="1"/>
           </p:cNvSpPr>
           <p:nvPr>
-            <p:ph type="sldNum" idx="5" sz="quarter"/>
+            <p:ph type="sldNum" sz="quarter" idx="5"/>
           </p:nvPr>
         </p:nvSpPr>
         <p:spPr/>
@@ -1697,7 +1619,7 @@
 </file>
 
 <file path=ppt/notesSlides/notesSlide9.xml><?xml version="1.0" encoding="utf-8"?>
-<p:notes xmlns:a="http://schemas.openxmlformats.org/drawingml/2006/main" xmlns:p="http://schemas.openxmlformats.org/presentationml/2006/main" xmlns:r="http://schemas.openxmlformats.org/officeDocument/2006/relationships">
+<p:notes xmlns:a="http://schemas.openxmlformats.org/drawingml/2006/main" xmlns:r="http://schemas.openxmlformats.org/officeDocument/2006/relationships" xmlns:p="http://schemas.openxmlformats.org/presentationml/2006/main">
   <p:cSld>
     <p:spTree>
       <p:nvGrpSpPr>
@@ -1717,7 +1639,7 @@
         <p:nvSpPr>
           <p:cNvPr id="2" name="Slide Image Placeholder 1"/>
           <p:cNvSpPr>
-            <a:spLocks noGrp="1"/>
+            <a:spLocks noGrp="1" noRot="1" noChangeAspect="1"/>
           </p:cNvSpPr>
           <p:nvPr>
             <p:ph type="sldImg" idx="2"/>
@@ -1732,7 +1654,7 @@
             <a:spLocks noGrp="1"/>
           </p:cNvSpPr>
           <p:nvPr>
-            <p:ph type="body" idx="3" sz="quarter"/>
+            <p:ph type="body" sz="quarter" idx="3"/>
           </p:nvPr>
         </p:nvSpPr>
         <p:spPr/>
@@ -1753,7 +1675,7 @@
             <a:spLocks noGrp="1"/>
           </p:cNvSpPr>
           <p:nvPr>
-            <p:ph type="sldNum" idx="5" sz="quarter"/>
+            <p:ph type="sldNum" sz="quarter" idx="5"/>
           </p:nvPr>
         </p:nvSpPr>
         <p:spPr/>
@@ -1804,10 +1726,9 @@
           <a:lstStyle/>
           <a:p>
             <a:r>
-              <a:rPr lang="en-US" smtClean="0"/>
+              <a:rPr lang="en-US"/>
               <a:t>Click to edit Master title style</a:t>
             </a:r>
-            <a:endParaRPr lang="en-US"/>
           </a:p>
         </p:txBody>
       </p:sp>
@@ -1923,10 +1844,9 @@
           </a:lstStyle>
           <a:p>
             <a:r>
-              <a:rPr lang="en-US" smtClean="0"/>
+              <a:rPr lang="en-US"/>
               <a:t>Click to edit Master subtitle style</a:t>
             </a:r>
-            <a:endParaRPr lang="en-US"/>
           </a:p>
         </p:txBody>
       </p:sp>
@@ -1947,7 +1867,7 @@
           <a:p>
             <a:fld id="{5BCAD085-E8A6-8845-BD4E-CB4CCA059FC4}" type="datetimeFigureOut">
               <a:rPr lang="en-US" smtClean="0"/>
-              <a:t>1/27/13</a:t>
+              <a:t>10/19/26</a:t>
             </a:fld>
             <a:endParaRPr lang="en-US"/>
           </a:p>
@@ -2041,10 +1961,9 @@
           <a:lstStyle/>
           <a:p>
             <a:r>
-              <a:rPr lang="en-US" smtClean="0"/>
+              <a:rPr lang="en-US"/>
               <a:t>Click to edit Master title style</a:t>
             </a:r>
-            <a:endParaRPr lang="en-US"/>
           </a:p>
         </p:txBody>
       </p:sp>
@@ -2065,38 +1984,37 @@
           <a:p>
             <a:pPr lvl="0"/>
             <a:r>
-              <a:rPr lang="en-US" smtClean="0"/>
+              <a:rPr lang="en-US"/>
               <a:t>Click to edit Master text styles</a:t>
             </a:r>
           </a:p>
           <a:p>
             <a:pPr lvl="1"/>
             <a:r>
-              <a:rPr lang="en-US" smtClean="0"/>
+              <a:rPr lang="en-US"/>
               <a:t>Second level</a:t>
             </a:r>
           </a:p>
           <a:p>
             <a:pPr lvl="2"/>
             <a:r>
-              <a:rPr lang="en-US" smtClean="0"/>
+              <a:rPr lang="en-US"/>
               <a:t>Third level</a:t>
             </a:r>
           </a:p>
           <a:p>
             <a:pPr lvl="3"/>
             <a:r>
-              <a:rPr lang="en-US" smtClean="0"/>
+              <a:rPr lang="en-US"/>
               <a:t>Fourth level</a:t>
             </a:r>
           </a:p>
           <a:p>
             <a:pPr lvl="4"/>
             <a:r>
-              <a:rPr lang="en-US" smtClean="0"/>
+              <a:rPr lang="en-US"/>
               <a:t>Fifth level</a:t>
             </a:r>
-            <a:endParaRPr lang="en-US"/>
           </a:p>
         </p:txBody>
       </p:sp>
@@ -2117,7 +2035,7 @@
           <a:p>
             <a:fld id="{5BCAD085-E8A6-8845-BD4E-CB4CCA059FC4}" type="datetimeFigureOut">
               <a:rPr lang="en-US" smtClean="0"/>
-              <a:t>1/27/13</a:t>
+              <a:t>10/19/26</a:t>
             </a:fld>
             <a:endParaRPr lang="en-US"/>
           </a:p>
@@ -2216,10 +2134,9 @@
           <a:lstStyle/>
           <a:p>
             <a:r>
-              <a:rPr lang="en-US" smtClean="0"/>
+              <a:rPr lang="en-US"/>
               <a:t>Click to edit Master title style</a:t>
             </a:r>
-            <a:endParaRPr lang="en-US"/>
           </a:p>
         </p:txBody>
       </p:sp>
@@ -2245,38 +2162,37 @@
           <a:p>
             <a:pPr lvl="0"/>
             <a:r>
-              <a:rPr lang="en-US" smtClean="0"/>
+              <a:rPr lang="en-US"/>
               <a:t>Click to edit Master text styles</a:t>
             </a:r>
           </a:p>
           <a:p>
             <a:pPr lvl="1"/>
             <a:r>
-              <a:rPr lang="en-US" smtClean="0"/>
+              <a:rPr lang="en-US"/>
               <a:t>Second level</a:t>
             </a:r>
           </a:p>
           <a:p>
             <a:pPr lvl="2"/>
             <a:r>
-              <a:rPr lang="en-US" smtClean="0"/>
+              <a:rPr lang="en-US"/>
               <a:t>Third level</a:t>
             </a:r>
           </a:p>
           <a:p>
             <a:pPr lvl="3"/>
             <a:r>
-              <a:rPr lang="en-US" smtClean="0"/>
+              <a:rPr lang="en-US"/>
               <a:t>Fourth level</a:t>
             </a:r>
           </a:p>
           <a:p>
             <a:pPr lvl="4"/>
             <a:r>
-              <a:rPr lang="en-US" smtClean="0"/>
+              <a:rPr lang="en-US"/>
               <a:t>Fifth level</a:t>
             </a:r>
-            <a:endParaRPr lang="en-US"/>
           </a:p>
         </p:txBody>
       </p:sp>
@@ -2297,7 +2213,7 @@
           <a:p>
             <a:fld id="{5BCAD085-E8A6-8845-BD4E-CB4CCA059FC4}" type="datetimeFigureOut">
               <a:rPr lang="en-US" smtClean="0"/>
-              <a:t>1/27/13</a:t>
+              <a:t>10/19/26</a:t>
             </a:fld>
             <a:endParaRPr lang="en-US"/>
           </a:p>
@@ -2391,10 +2307,9 @@
           <a:lstStyle/>
           <a:p>
             <a:r>
-              <a:rPr lang="en-US" smtClean="0"/>
+              <a:rPr lang="en-US"/>
               <a:t>Click to edit Master title style</a:t>
             </a:r>
-            <a:endParaRPr lang="en-US"/>
           </a:p>
         </p:txBody>
       </p:sp>
@@ -2415,38 +2330,37 @@
           <a:p>
             <a:pPr lvl="0"/>
             <a:r>
-              <a:rPr lang="en-US" smtClean="0"/>
+              <a:rPr lang="en-US"/>
               <a:t>Click to edit Master text styles</a:t>
             </a:r>
           </a:p>
           <a:p>
             <a:pPr lvl="1"/>
             <a:r>
-              <a:rPr lang="en-US" smtClean="0"/>
+              <a:rPr lang="en-US"/>
               <a:t>Second level</a:t>
             </a:r>
           </a:p>
           <a:p>
             <a:pPr lvl="2"/>
             <a:r>
-              <a:rPr lang="en-US" smtClean="0"/>
+              <a:rPr lang="en-US"/>
               <a:t>Third level</a:t>
             </a:r>
           </a:p>
           <a:p>
             <a:pPr lvl="3"/>
             <a:r>
-              <a:rPr lang="en-US" smtClean="0"/>
+              <a:rPr lang="en-US"/>
               <a:t>Fourth level</a:t>
             </a:r>
           </a:p>
           <a:p>
             <a:pPr lvl="4"/>
             <a:r>
-              <a:rPr lang="en-US" smtClean="0"/>
+              <a:rPr lang="en-US"/>
               <a:t>Fifth level</a:t>
             </a:r>
-            <a:endParaRPr lang="en-US"/>
           </a:p>
         </p:txBody>
       </p:sp>
@@ -2467,7 +2381,7 @@
           <a:p>
             <a:fld id="{5BCAD085-E8A6-8845-BD4E-CB4CCA059FC4}" type="datetimeFigureOut">
               <a:rPr lang="en-US" smtClean="0"/>
-              <a:t>1/27/13</a:t>
+              <a:t>10/19/26</a:t>
             </a:fld>
             <a:endParaRPr lang="en-US"/>
           </a:p>
@@ -2570,10 +2484,9 @@
           </a:lstStyle>
           <a:p>
             <a:r>
-              <a:rPr lang="en-US" smtClean="0"/>
+              <a:rPr lang="en-US"/>
               <a:t>Click to edit Master title style</a:t>
             </a:r>
-            <a:endParaRPr lang="en-US"/>
           </a:p>
         </p:txBody>
       </p:sp>
@@ -2690,7 +2603,7 @@
           <a:p>
             <a:pPr lvl="0"/>
             <a:r>
-              <a:rPr lang="en-US" smtClean="0"/>
+              <a:rPr lang="en-US"/>
               <a:t>Click to edit Master text styles</a:t>
             </a:r>
           </a:p>
@@ -2713,7 +2626,7 @@
           <a:p>
             <a:fld id="{5BCAD085-E8A6-8845-BD4E-CB4CCA059FC4}" type="datetimeFigureOut">
               <a:rPr lang="en-US" smtClean="0"/>
-              <a:t>1/27/13</a:t>
+              <a:t>10/19/26</a:t>
             </a:fld>
             <a:endParaRPr lang="en-US"/>
           </a:p>
@@ -2807,10 +2720,9 @@
           <a:lstStyle/>
           <a:p>
             <a:r>
-              <a:rPr lang="en-US" smtClean="0"/>
+              <a:rPr lang="en-US"/>
               <a:t>Click to edit Master title style</a:t>
             </a:r>
-            <a:endParaRPr lang="en-US"/>
           </a:p>
         </p:txBody>
       </p:sp>
@@ -2864,38 +2776,37 @@
           <a:p>
             <a:pPr lvl="0"/>
             <a:r>
-              <a:rPr lang="en-US" smtClean="0"/>
+              <a:rPr lang="en-US"/>
               <a:t>Click to edit Master text styles</a:t>
             </a:r>
           </a:p>
           <a:p>
             <a:pPr lvl="1"/>
             <a:r>
-              <a:rPr lang="en-US" smtClean="0"/>
+              <a:rPr lang="en-US"/>
               <a:t>Second level</a:t>
             </a:r>
           </a:p>
           <a:p>
             <a:pPr lvl="2"/>
             <a:r>
-              <a:rPr lang="en-US" smtClean="0"/>
+              <a:rPr lang="en-US"/>
               <a:t>Third level</a:t>
             </a:r>
           </a:p>
           <a:p>
             <a:pPr lvl="3"/>
             <a:r>
-              <a:rPr lang="en-US" smtClean="0"/>
+              <a:rPr lang="en-US"/>
               <a:t>Fourth level</a:t>
             </a:r>
           </a:p>
           <a:p>
             <a:pPr lvl="4"/>
             <a:r>
-              <a:rPr lang="en-US" smtClean="0"/>
+              <a:rPr lang="en-US"/>
               <a:t>Fifth level</a:t>
             </a:r>
-            <a:endParaRPr lang="en-US"/>
           </a:p>
         </p:txBody>
       </p:sp>
@@ -2949,38 +2860,37 @@
           <a:p>
             <a:pPr lvl="0"/>
             <a:r>
-              <a:rPr lang="en-US" smtClean="0"/>
+              <a:rPr lang="en-US"/>
               <a:t>Click to edit Master text styles</a:t>
             </a:r>
           </a:p>
           <a:p>
             <a:pPr lvl="1"/>
             <a:r>
-              <a:rPr lang="en-US" smtClean="0"/>
+              <a:rPr lang="en-US"/>
               <a:t>Second level</a:t>
             </a:r>
           </a:p>
           <a:p>
             <a:pPr lvl="2"/>
             <a:r>
-              <a:rPr lang="en-US" smtClean="0"/>
+              <a:rPr lang="en-US"/>
               <a:t>Third level</a:t>
             </a:r>
           </a:p>
           <a:p>
             <a:pPr lvl="3"/>
             <a:r>
-              <a:rPr lang="en-US" smtClean="0"/>
+              <a:rPr lang="en-US"/>
               <a:t>Fourth level</a:t>
             </a:r>
           </a:p>
           <a:p>
             <a:pPr lvl="4"/>
             <a:r>
-              <a:rPr lang="en-US" smtClean="0"/>
+              <a:rPr lang="en-US"/>
               <a:t>Fifth level</a:t>
             </a:r>
-            <a:endParaRPr lang="en-US"/>
           </a:p>
         </p:txBody>
       </p:sp>
@@ -3001,7 +2911,7 @@
           <a:p>
             <a:fld id="{5BCAD085-E8A6-8845-BD4E-CB4CCA059FC4}" type="datetimeFigureOut">
               <a:rPr lang="en-US" smtClean="0"/>
-              <a:t>1/27/13</a:t>
+              <a:t>10/19/26</a:t>
             </a:fld>
             <a:endParaRPr lang="en-US"/>
           </a:p>
@@ -3099,10 +3009,9 @@
           </a:lstStyle>
           <a:p>
             <a:r>
-              <a:rPr lang="en-US" smtClean="0"/>
+              <a:rPr lang="en-US"/>
               <a:t>Click to edit Master title style</a:t>
             </a:r>
-            <a:endParaRPr lang="en-US"/>
           </a:p>
         </p:txBody>
       </p:sp>
@@ -3165,7 +3074,7 @@
           <a:p>
             <a:pPr lvl="0"/>
             <a:r>
-              <a:rPr lang="en-US" smtClean="0"/>
+              <a:rPr lang="en-US"/>
               <a:t>Click to edit Master text styles</a:t>
             </a:r>
           </a:p>
@@ -3221,38 +3130,37 @@
           <a:p>
             <a:pPr lvl="0"/>
             <a:r>
-              <a:rPr lang="en-US" smtClean="0"/>
+              <a:rPr lang="en-US"/>
               <a:t>Click to edit Master text styles</a:t>
             </a:r>
           </a:p>
           <a:p>
             <a:pPr lvl="1"/>
             <a:r>
-              <a:rPr lang="en-US" smtClean="0"/>
+              <a:rPr lang="en-US"/>
               <a:t>Second level</a:t>
             </a:r>
           </a:p>
           <a:p>
             <a:pPr lvl="2"/>
             <a:r>
-              <a:rPr lang="en-US" smtClean="0"/>
+              <a:rPr lang="en-US"/>
               <a:t>Third level</a:t>
             </a:r>
           </a:p>
           <a:p>
             <a:pPr lvl="3"/>
             <a:r>
-              <a:rPr lang="en-US" smtClean="0"/>
+              <a:rPr lang="en-US"/>
               <a:t>Fourth level</a:t>
             </a:r>
           </a:p>
           <a:p>
             <a:pPr lvl="4"/>
             <a:r>
-              <a:rPr lang="en-US" smtClean="0"/>
+              <a:rPr lang="en-US"/>
               <a:t>Fifth level</a:t>
             </a:r>
-            <a:endParaRPr lang="en-US"/>
           </a:p>
         </p:txBody>
       </p:sp>
@@ -3315,7 +3223,7 @@
           <a:p>
             <a:pPr lvl="0"/>
             <a:r>
-              <a:rPr lang="en-US" smtClean="0"/>
+              <a:rPr lang="en-US"/>
               <a:t>Click to edit Master text styles</a:t>
             </a:r>
           </a:p>
@@ -3371,38 +3279,37 @@
           <a:p>
             <a:pPr lvl="0"/>
             <a:r>
-              <a:rPr lang="en-US" smtClean="0"/>
+              <a:rPr lang="en-US"/>
               <a:t>Click to edit Master text styles</a:t>
             </a:r>
           </a:p>
           <a:p>
             <a:pPr lvl="1"/>
             <a:r>
-              <a:rPr lang="en-US" smtClean="0"/>
+              <a:rPr lang="en-US"/>
               <a:t>Second level</a:t>
             </a:r>
           </a:p>
           <a:p>
             <a:pPr lvl="2"/>
             <a:r>
-              <a:rPr lang="en-US" smtClean="0"/>
+              <a:rPr lang="en-US"/>
               <a:t>Third level</a:t>
             </a:r>
           </a:p>
           <a:p>
             <a:pPr lvl="3"/>
             <a:r>
-              <a:rPr lang="en-US" smtClean="0"/>
+              <a:rPr lang="en-US"/>
               <a:t>Fourth level</a:t>
             </a:r>
           </a:p>
           <a:p>
             <a:pPr lvl="4"/>
             <a:r>
-              <a:rPr lang="en-US" smtClean="0"/>
+              <a:rPr lang="en-US"/>
               <a:t>Fifth level</a:t>
             </a:r>
-            <a:endParaRPr lang="en-US"/>
           </a:p>
         </p:txBody>
       </p:sp>
@@ -3423,7 +3330,7 @@
           <a:p>
             <a:fld id="{5BCAD085-E8A6-8845-BD4E-CB4CCA059FC4}" type="datetimeFigureOut">
               <a:rPr lang="en-US" smtClean="0"/>
-              <a:t>1/27/13</a:t>
+              <a:t>10/19/26</a:t>
             </a:fld>
             <a:endParaRPr lang="en-US"/>
           </a:p>
@@ -3517,10 +3424,9 @@
           <a:lstStyle/>
           <a:p>
             <a:r>
-              <a:rPr lang="en-US" smtClean="0"/>
+              <a:rPr lang="en-US"/>
               <a:t>Click to edit Master title style</a:t>
             </a:r>
-            <a:endParaRPr lang="en-US"/>
           </a:p>
         </p:txBody>
       </p:sp>
@@ -3541,7 +3447,7 @@
           <a:p>
             <a:fld id="{5BCAD085-E8A6-8845-BD4E-CB4CCA059FC4}" type="datetimeFigureOut">
               <a:rPr lang="en-US" smtClean="0"/>
-              <a:t>1/27/13</a:t>
+              <a:t>10/19/26</a:t>
             </a:fld>
             <a:endParaRPr lang="en-US"/>
           </a:p>
@@ -3636,7 +3542,7 @@
           <a:p>
             <a:fld id="{5BCAD085-E8A6-8845-BD4E-CB4CCA059FC4}" type="datetimeFigureOut">
               <a:rPr lang="en-US" smtClean="0"/>
-              <a:t>1/27/13</a:t>
+              <a:t>10/19/26</a:t>
             </a:fld>
             <a:endParaRPr lang="en-US"/>
           </a:p>
@@ -3739,10 +3645,9 @@
           </a:lstStyle>
           <a:p>
             <a:r>
-              <a:rPr lang="en-US" smtClean="0"/>
+              <a:rPr lang="en-US"/>
               <a:t>Click to edit Master title style</a:t>
             </a:r>
-            <a:endParaRPr lang="en-US"/>
           </a:p>
         </p:txBody>
       </p:sp>
@@ -3796,38 +3701,37 @@
           <a:p>
             <a:pPr lvl="0"/>
             <a:r>
-              <a:rPr lang="en-US" smtClean="0"/>
+              <a:rPr lang="en-US"/>
               <a:t>Click to edit Master text styles</a:t>
             </a:r>
           </a:p>
           <a:p>
             <a:pPr lvl="1"/>
             <a:r>
-              <a:rPr lang="en-US" smtClean="0"/>
+              <a:rPr lang="en-US"/>
               <a:t>Second level</a:t>
             </a:r>
           </a:p>
           <a:p>
             <a:pPr lvl="2"/>
             <a:r>
-              <a:rPr lang="en-US" smtClean="0"/>
+              <a:rPr lang="en-US"/>
               <a:t>Third level</a:t>
             </a:r>
           </a:p>
           <a:p>
             <a:pPr lvl="3"/>
             <a:r>
-              <a:rPr lang="en-US" smtClean="0"/>
+              <a:rPr lang="en-US"/>
               <a:t>Fourth level</a:t>
             </a:r>
           </a:p>
           <a:p>
             <a:pPr lvl="4"/>
             <a:r>
-              <a:rPr lang="en-US" smtClean="0"/>
+              <a:rPr lang="en-US"/>
               <a:t>Fifth level</a:t>
             </a:r>
-            <a:endParaRPr lang="en-US"/>
           </a:p>
         </p:txBody>
       </p:sp>
@@ -3890,7 +3794,7 @@
           <a:p>
             <a:pPr lvl="0"/>
             <a:r>
-              <a:rPr lang="en-US" smtClean="0"/>
+              <a:rPr lang="en-US"/>
               <a:t>Click to edit Master text styles</a:t>
             </a:r>
           </a:p>
@@ -3913,7 +3817,7 @@
           <a:p>
             <a:fld id="{5BCAD085-E8A6-8845-BD4E-CB4CCA059FC4}" type="datetimeFigureOut">
               <a:rPr lang="en-US" smtClean="0"/>
-              <a:t>1/27/13</a:t>
+              <a:t>10/19/26</a:t>
             </a:fld>
             <a:endParaRPr lang="en-US"/>
           </a:p>
@@ -4016,10 +3920,9 @@
           </a:lstStyle>
           <a:p>
             <a:r>
-              <a:rPr lang="en-US" smtClean="0"/>
+              <a:rPr lang="en-US"/>
               <a:t>Click to edit Master title style</a:t>
             </a:r>
-            <a:endParaRPr lang="en-US"/>
           </a:p>
         </p:txBody>
       </p:sp>
@@ -4143,7 +4046,7 @@
           <a:p>
             <a:pPr lvl="0"/>
             <a:r>
-              <a:rPr lang="en-US" smtClean="0"/>
+              <a:rPr lang="en-US"/>
               <a:t>Click to edit Master text styles</a:t>
             </a:r>
           </a:p>
@@ -4166,7 +4069,7 @@
           <a:p>
             <a:fld id="{5BCAD085-E8A6-8845-BD4E-CB4CCA059FC4}" type="datetimeFigureOut">
               <a:rPr lang="en-US" smtClean="0"/>
-              <a:t>1/27/13</a:t>
+              <a:t>10/19/26</a:t>
             </a:fld>
             <a:endParaRPr lang="en-US"/>
           </a:p>
@@ -4275,10 +4178,9 @@
           <a:lstStyle/>
           <a:p>
             <a:r>
-              <a:rPr lang="en-US" smtClean="0"/>
+              <a:rPr lang="en-US"/>
               <a:t>Click to edit Master title style</a:t>
             </a:r>
-            <a:endParaRPr lang="en-US"/>
           </a:p>
         </p:txBody>
       </p:sp>
@@ -4309,38 +4211,37 @@
           <a:p>
             <a:pPr lvl="0"/>
             <a:r>
-              <a:rPr lang="en-US" smtClean="0"/>
+              <a:rPr lang="en-US"/>
               <a:t>Click to edit Master text styles</a:t>
             </a:r>
           </a:p>
           <a:p>
             <a:pPr lvl="1"/>
             <a:r>
-              <a:rPr lang="en-US" smtClean="0"/>
+              <a:rPr lang="en-US"/>
               <a:t>Second level</a:t>
             </a:r>
           </a:p>
           <a:p>
             <a:pPr lvl="2"/>
             <a:r>
-              <a:rPr lang="en-US" smtClean="0"/>
+              <a:rPr lang="en-US"/>
               <a:t>Third level</a:t>
             </a:r>
           </a:p>
           <a:p>
             <a:pPr lvl="3"/>
             <a:r>
-              <a:rPr lang="en-US" smtClean="0"/>
+              <a:rPr lang="en-US"/>
               <a:t>Fourth level</a:t>
             </a:r>
           </a:p>
           <a:p>
             <a:pPr lvl="4"/>
             <a:r>
-              <a:rPr lang="en-US" smtClean="0"/>
+              <a:rPr lang="en-US"/>
               <a:t>Fifth level</a:t>
             </a:r>
-            <a:endParaRPr lang="en-US"/>
           </a:p>
         </p:txBody>
       </p:sp>
@@ -4379,7 +4280,7 @@
           <a:p>
             <a:fld id="{5BCAD085-E8A6-8845-BD4E-CB4CCA059FC4}" type="datetimeFigureOut">
               <a:rPr lang="en-US" smtClean="0"/>
-              <a:t>1/27/13</a:t>
+              <a:t>10/19/26</a:t>
             </a:fld>
             <a:endParaRPr lang="en-US"/>
           </a:p>
@@ -4738,7 +4639,7 @@
 </file>
 
 <file path=ppt/slides/slide1.xml><?xml version="1.0" encoding="utf-8"?>
-<p:sld xmlns:a="http://schemas.openxmlformats.org/drawingml/2006/main" xmlns:p="http://schemas.openxmlformats.org/presentationml/2006/main" xmlns:r="http://schemas.openxmlformats.org/officeDocument/2006/relationships">
+<p:sld xmlns:a="http://schemas.openxmlformats.org/drawingml/2006/main" xmlns:r="http://schemas.openxmlformats.org/officeDocument/2006/relationships" xmlns:p="http://schemas.openxmlformats.org/presentationml/2006/main">
   <p:cSld>
     <p:bg>
       <p:bgPr>
@@ -4754,7 +4655,14 @@
         <p:cNvGrpSpPr/>
         <p:nvPr/>
       </p:nvGrpSpPr>
-      <p:grpSpPr/>
+      <p:grpSpPr>
+        <a:xfrm>
+          <a:off x="0" y="0"/>
+          <a:ext cx="0" cy="0"/>
+          <a:chOff x="0" y="0"/>
+          <a:chExt cx="0" cy="0"/>
+        </a:xfrm>
+      </p:grpSpPr>
       <p:sp>
         <p:nvSpPr>
           <p:cNvPr id="2" name="Rectangle 1"/>
@@ -4796,6 +4704,7 @@
           <a:lstStyle/>
           <a:p>
             <a:pPr algn="ctr"/>
+            <a:endParaRPr/>
           </a:p>
         </p:txBody>
       </p:sp>
@@ -4816,7 +4725,7 @@
           <a:noFill/>
         </p:spPr>
         <p:txBody>
-          <a:bodyPr wrap="square" lIns="0" rIns="0" tIns="0" bIns="0" anchor="t">
+          <a:bodyPr wrap="square" lIns="0" tIns="0" rIns="0" bIns="0" anchor="t">
             <a:spAutoFit/>
           </a:bodyPr>
           <a:lstStyle/>
@@ -4851,7 +4760,7 @@
           <a:noFill/>
         </p:spPr>
         <p:txBody>
-          <a:bodyPr wrap="square" lIns="0" rIns="0" tIns="0" bIns="0" anchor="t">
+          <a:bodyPr wrap="square" lIns="0" tIns="0" rIns="0" bIns="0" anchor="t">
             <a:spAutoFit/>
           </a:bodyPr>
           <a:lstStyle/>
@@ -4898,7 +4807,7 @@
           <a:noFill/>
         </p:spPr>
         <p:txBody>
-          <a:bodyPr wrap="square" lIns="0" rIns="0" tIns="0" bIns="0" anchor="t">
+          <a:bodyPr wrap="square" lIns="0" tIns="0" rIns="0" bIns="0" anchor="t">
             <a:spAutoFit/>
           </a:bodyPr>
           <a:lstStyle/>
@@ -4933,7 +4842,7 @@
           <a:noFill/>
         </p:spPr>
         <p:txBody>
-          <a:bodyPr wrap="square" lIns="0" rIns="0" tIns="0" bIns="0" anchor="t">
+          <a:bodyPr wrap="square" lIns="0" tIns="0" rIns="0" bIns="0" anchor="t">
             <a:spAutoFit/>
           </a:bodyPr>
           <a:lstStyle/>
@@ -4984,7 +4893,7 @@
 </file>
 
 <file path=ppt/slides/slide10.xml><?xml version="1.0" encoding="utf-8"?>
-<p:sld xmlns:a="http://schemas.openxmlformats.org/drawingml/2006/main" xmlns:p="http://schemas.openxmlformats.org/presentationml/2006/main" xmlns:r="http://schemas.openxmlformats.org/officeDocument/2006/relationships">
+<p:sld xmlns:a="http://schemas.openxmlformats.org/drawingml/2006/main" xmlns:r="http://schemas.openxmlformats.org/officeDocument/2006/relationships" xmlns:p="http://schemas.openxmlformats.org/presentationml/2006/main">
   <p:cSld>
     <p:bg>
       <p:bgPr>
@@ -5000,7 +4909,14 @@
         <p:cNvGrpSpPr/>
         <p:nvPr/>
       </p:nvGrpSpPr>
-      <p:grpSpPr/>
+      <p:grpSpPr>
+        <a:xfrm>
+          <a:off x="0" y="0"/>
+          <a:ext cx="0" cy="0"/>
+          <a:chOff x="0" y="0"/>
+          <a:chExt cx="0" cy="0"/>
+        </a:xfrm>
+      </p:grpSpPr>
       <p:sp>
         <p:nvSpPr>
           <p:cNvPr id="2" name="TextBox 1"/>
@@ -5018,7 +4934,7 @@
           <a:noFill/>
         </p:spPr>
         <p:txBody>
-          <a:bodyPr wrap="square" lIns="0" rIns="0" tIns="0" bIns="0" anchor="t">
+          <a:bodyPr wrap="square" lIns="0" tIns="0" rIns="0" bIns="0" anchor="t">
             <a:spAutoFit/>
           </a:bodyPr>
           <a:lstStyle/>
@@ -5053,7 +4969,7 @@
           <a:noFill/>
         </p:spPr>
         <p:txBody>
-          <a:bodyPr wrap="square" lIns="0" rIns="0" tIns="0" bIns="0" anchor="t">
+          <a:bodyPr wrap="square" lIns="0" tIns="0" rIns="0" bIns="0" anchor="t">
             <a:spAutoFit/>
           </a:bodyPr>
           <a:lstStyle/>
@@ -5112,6 +5028,7 @@
           <a:lstStyle/>
           <a:p>
             <a:pPr algn="ctr"/>
+            <a:endParaRPr/>
           </a:p>
         </p:txBody>
       </p:sp>
@@ -5132,7 +5049,7 @@
           <a:noFill/>
         </p:spPr>
         <p:txBody>
-          <a:bodyPr wrap="square" lIns="0" rIns="0" tIns="0" bIns="0" anchor="t">
+          <a:bodyPr wrap="square" lIns="0" tIns="0" rIns="0" bIns="0" anchor="t">
             <a:spAutoFit/>
           </a:bodyPr>
           <a:lstStyle/>
@@ -5167,7 +5084,7 @@
           <a:noFill/>
         </p:spPr>
         <p:txBody>
-          <a:bodyPr wrap="square" lIns="0" rIns="0" tIns="0" bIns="0" anchor="t">
+          <a:bodyPr wrap="square" lIns="0" tIns="0" rIns="0" bIns="0" anchor="t">
             <a:spAutoFit/>
           </a:bodyPr>
           <a:lstStyle/>
@@ -5202,7 +5119,7 @@
           <a:noFill/>
         </p:spPr>
         <p:txBody>
-          <a:bodyPr wrap="square" lIns="0" rIns="0" tIns="0" bIns="0">
+          <a:bodyPr wrap="square" lIns="0" tIns="0" rIns="0" bIns="0">
             <a:spAutoFit/>
           </a:bodyPr>
           <a:lstStyle/>
@@ -5453,6 +5370,7 @@
           <a:lstStyle/>
           <a:p>
             <a:pPr algn="ctr"/>
+            <a:endParaRPr/>
           </a:p>
         </p:txBody>
       </p:sp>
@@ -5473,7 +5391,7 @@
           <a:noFill/>
         </p:spPr>
         <p:txBody>
-          <a:bodyPr wrap="square" lIns="0" rIns="0" tIns="0" bIns="0" anchor="t">
+          <a:bodyPr wrap="square" lIns="0" tIns="0" rIns="0" bIns="0" anchor="t">
             <a:spAutoFit/>
           </a:bodyPr>
           <a:lstStyle/>
@@ -5503,6 +5421,15 @@
           </a:p>
           <a:p>
             <a:pPr algn="l"/>
+            <a:endParaRPr sz="1500" b="0">
+              <a:solidFill>
+                <a:srgbClr val="C9D3E6"/>
+              </a:solidFill>
+              <a:latin typeface="Calibri"/>
+            </a:endParaRPr>
+          </a:p>
+          <a:p>
+            <a:pPr algn="l"/>
             <a:r>
               <a:rPr sz="1500" b="0">
                 <a:solidFill>
@@ -5510,7 +5437,7 @@
                 </a:solidFill>
                 <a:latin typeface="Calibri"/>
               </a:rPr>
-              <a:t/>
+              <a:t>$ make test</a:t>
             </a:r>
           </a:p>
           <a:p>
@@ -5522,11 +5449,20 @@
                 </a:solidFill>
                 <a:latin typeface="Calibri"/>
               </a:rPr>
-              <a:t>$ make test</a:t>
+              <a:t>37 passed</a:t>
             </a:r>
           </a:p>
           <a:p>
             <a:pPr algn="l"/>
+            <a:endParaRPr sz="1500" b="0">
+              <a:solidFill>
+                <a:srgbClr val="C9D3E6"/>
+              </a:solidFill>
+              <a:latin typeface="Calibri"/>
+            </a:endParaRPr>
+          </a:p>
+          <a:p>
+            <a:pPr algn="l"/>
             <a:r>
               <a:rPr sz="1500" b="0">
                 <a:solidFill>
@@ -5534,7 +5470,7 @@
                 </a:solidFill>
                 <a:latin typeface="Calibri"/>
               </a:rPr>
-              <a:t>37 passed</a:t>
+              <a:t>$ make train</a:t>
             </a:r>
           </a:p>
           <a:p>
@@ -5546,11 +5482,20 @@
                 </a:solidFill>
                 <a:latin typeface="Calibri"/>
               </a:rPr>
-              <a:t/>
+              <a:t>Selected logreg -&gt; models/model.joblib</a:t>
             </a:r>
           </a:p>
           <a:p>
             <a:pPr algn="l"/>
+            <a:endParaRPr sz="1500" b="0">
+              <a:solidFill>
+                <a:srgbClr val="C9D3E6"/>
+              </a:solidFill>
+              <a:latin typeface="Calibri"/>
+            </a:endParaRPr>
+          </a:p>
+          <a:p>
+            <a:pPr algn="l"/>
             <a:r>
               <a:rPr sz="1500" b="0">
                 <a:solidFill>
@@ -5558,7 +5503,7 @@
                 </a:solidFill>
                 <a:latin typeface="Calibri"/>
               </a:rPr>
-              <a:t>$ make train</a:t>
+              <a:t>$ make docker-build docker-run smoke</a:t>
             </a:r>
           </a:p>
           <a:p>
@@ -5570,56 +5515,17 @@
                 </a:solidFill>
                 <a:latin typeface="Calibri"/>
               </a:rPr>
-              <a:t>Selected logreg -&gt; models/model.joblib</a:t>
+              <a:t>SMOKE TEST PASSED</a:t>
             </a:r>
           </a:p>
           <a:p>
             <a:pPr algn="l"/>
-            <a:r>
-              <a:rPr sz="1500" b="0">
-                <a:solidFill>
-                  <a:srgbClr val="C9D3E6"/>
-                </a:solidFill>
-                <a:latin typeface="Calibri"/>
-              </a:rPr>
-              <a:t/>
-            </a:r>
-          </a:p>
-          <a:p>
-            <a:pPr algn="l"/>
-            <a:r>
-              <a:rPr sz="1500" b="0">
-                <a:solidFill>
-                  <a:srgbClr val="C9D3E6"/>
-                </a:solidFill>
-                <a:latin typeface="Calibri"/>
-              </a:rPr>
-              <a:t>$ make docker-build docker-run smoke</a:t>
-            </a:r>
-          </a:p>
-          <a:p>
-            <a:pPr algn="l"/>
-            <a:r>
-              <a:rPr sz="1500" b="0">
-                <a:solidFill>
-                  <a:srgbClr val="C9D3E6"/>
-                </a:solidFill>
-                <a:latin typeface="Calibri"/>
-              </a:rPr>
-              <a:t>SMOKE TEST PASSED</a:t>
-            </a:r>
-          </a:p>
-          <a:p>
-            <a:pPr algn="l"/>
-            <a:r>
-              <a:rPr sz="1500" b="0">
-                <a:solidFill>
-                  <a:srgbClr val="C9D3E6"/>
-                </a:solidFill>
-                <a:latin typeface="Calibri"/>
-              </a:rPr>
-              <a:t/>
-            </a:r>
+            <a:endParaRPr sz="1500" b="0">
+              <a:solidFill>
+                <a:srgbClr val="C9D3E6"/>
+              </a:solidFill>
+              <a:latin typeface="Calibri"/>
+            </a:endParaRPr>
           </a:p>
           <a:p>
             <a:pPr algn="l"/>
@@ -5656,7 +5562,7 @@
 </file>
 
 <file path=ppt/slides/slide11.xml><?xml version="1.0" encoding="utf-8"?>
-<p:sld xmlns:a="http://schemas.openxmlformats.org/drawingml/2006/main" xmlns:p="http://schemas.openxmlformats.org/presentationml/2006/main" xmlns:r="http://schemas.openxmlformats.org/officeDocument/2006/relationships">
+<p:sld xmlns:a="http://schemas.openxmlformats.org/drawingml/2006/main" xmlns:r="http://schemas.openxmlformats.org/officeDocument/2006/relationships" xmlns:p="http://schemas.openxmlformats.org/presentationml/2006/main">
   <p:cSld>
     <p:bg>
       <p:bgPr>
@@ -5672,7 +5578,14 @@
         <p:cNvGrpSpPr/>
         <p:nvPr/>
       </p:nvGrpSpPr>
-      <p:grpSpPr/>
+      <p:grpSpPr>
+        <a:xfrm>
+          <a:off x="0" y="0"/>
+          <a:ext cx="0" cy="0"/>
+          <a:chOff x="0" y="0"/>
+          <a:chExt cx="0" cy="0"/>
+        </a:xfrm>
+      </p:grpSpPr>
       <p:sp>
         <p:nvSpPr>
           <p:cNvPr id="2" name="TextBox 1"/>
@@ -5690,7 +5603,7 @@
           <a:noFill/>
         </p:spPr>
         <p:txBody>
-          <a:bodyPr wrap="square" lIns="0" rIns="0" tIns="0" bIns="0" anchor="t">
+          <a:bodyPr wrap="square" lIns="0" tIns="0" rIns="0" bIns="0" anchor="t">
             <a:spAutoFit/>
           </a:bodyPr>
           <a:lstStyle/>
@@ -5725,7 +5638,7 @@
           <a:noFill/>
         </p:spPr>
         <p:txBody>
-          <a:bodyPr wrap="square" lIns="0" rIns="0" tIns="0" bIns="0" anchor="t">
+          <a:bodyPr wrap="square" lIns="0" tIns="0" rIns="0" bIns="0" anchor="t">
             <a:spAutoFit/>
           </a:bodyPr>
           <a:lstStyle/>
@@ -5784,6 +5697,7 @@
           <a:lstStyle/>
           <a:p>
             <a:pPr algn="ctr"/>
+            <a:endParaRPr/>
           </a:p>
         </p:txBody>
       </p:sp>
@@ -5804,7 +5718,7 @@
           <a:noFill/>
         </p:spPr>
         <p:txBody>
-          <a:bodyPr wrap="square" lIns="0" rIns="0" tIns="0" bIns="0" anchor="t">
+          <a:bodyPr wrap="square" lIns="0" tIns="0" rIns="0" bIns="0" anchor="t">
             <a:spAutoFit/>
           </a:bodyPr>
           <a:lstStyle/>
@@ -5839,7 +5753,7 @@
           <a:noFill/>
         </p:spPr>
         <p:txBody>
-          <a:bodyPr wrap="square" lIns="0" rIns="0" tIns="0" bIns="0" anchor="t">
+          <a:bodyPr wrap="square" lIns="0" tIns="0" rIns="0" bIns="0" anchor="t">
             <a:spAutoFit/>
           </a:bodyPr>
           <a:lstStyle/>
@@ -5898,6 +5812,7 @@
           <a:lstStyle/>
           <a:p>
             <a:pPr algn="ctr"/>
+            <a:endParaRPr/>
           </a:p>
         </p:txBody>
       </p:sp>
@@ -5918,7 +5833,7 @@
           <a:noFill/>
         </p:spPr>
         <p:txBody>
-          <a:bodyPr wrap="square" lIns="0" rIns="0" tIns="0" bIns="0" anchor="ctr">
+          <a:bodyPr wrap="square" lIns="0" tIns="0" rIns="0" bIns="0" anchor="ctr">
             <a:spAutoFit/>
           </a:bodyPr>
           <a:lstStyle/>
@@ -5977,6 +5892,7 @@
           <a:lstStyle/>
           <a:p>
             <a:pPr algn="ctr"/>
+            <a:endParaRPr/>
           </a:p>
         </p:txBody>
       </p:sp>
@@ -5997,7 +5913,7 @@
           <a:noFill/>
         </p:spPr>
         <p:txBody>
-          <a:bodyPr wrap="square" lIns="0" rIns="0" tIns="0" bIns="0" anchor="ctr">
+          <a:bodyPr wrap="square" lIns="0" tIns="0" rIns="0" bIns="0" anchor="ctr">
             <a:spAutoFit/>
           </a:bodyPr>
           <a:lstStyle/>
@@ -6056,6 +5972,7 @@
           <a:lstStyle/>
           <a:p>
             <a:pPr algn="ctr"/>
+            <a:endParaRPr/>
           </a:p>
         </p:txBody>
       </p:sp>
@@ -6076,7 +5993,7 @@
           <a:noFill/>
         </p:spPr>
         <p:txBody>
-          <a:bodyPr wrap="square" lIns="0" rIns="0" tIns="0" bIns="0" anchor="ctr">
+          <a:bodyPr wrap="square" lIns="0" tIns="0" rIns="0" bIns="0" anchor="ctr">
             <a:spAutoFit/>
           </a:bodyPr>
           <a:lstStyle/>
@@ -6135,6 +6052,7 @@
           <a:lstStyle/>
           <a:p>
             <a:pPr algn="ctr"/>
+            <a:endParaRPr/>
           </a:p>
         </p:txBody>
       </p:sp>
@@ -6155,7 +6073,7 @@
           <a:noFill/>
         </p:spPr>
         <p:txBody>
-          <a:bodyPr wrap="square" lIns="0" rIns="0" tIns="0" bIns="0" anchor="ctr">
+          <a:bodyPr wrap="square" lIns="0" tIns="0" rIns="0" bIns="0" anchor="ctr">
             <a:spAutoFit/>
           </a:bodyPr>
           <a:lstStyle/>
@@ -6214,6 +6132,7 @@
           <a:lstStyle/>
           <a:p>
             <a:pPr algn="ctr"/>
+            <a:endParaRPr/>
           </a:p>
         </p:txBody>
       </p:sp>
@@ -6234,7 +6153,7 @@
           <a:noFill/>
         </p:spPr>
         <p:txBody>
-          <a:bodyPr wrap="square" lIns="0" rIns="0" tIns="0" bIns="0" anchor="ctr">
+          <a:bodyPr wrap="square" lIns="0" tIns="0" rIns="0" bIns="0" anchor="ctr">
             <a:spAutoFit/>
           </a:bodyPr>
           <a:lstStyle/>
@@ -6255,70 +6174,6 @@
       <p:pic>
         <p:nvPicPr>
           <p:cNvPr id="17" name="Picture 16" descr="04_github_actions_pipeline.png"/>
-          <p:cNvPicPr>
-            <a:picLocks noChangeAspect="1"/>
-          </p:cNvPicPr>
-          <p:nvPr/>
-        </p:nvPicPr>
-        <p:blipFill>
-          <a:blip r:embed="rId2"/>
-          <a:stretch>
-            <a:fillRect/>
-          </a:stretch>
-        </p:blipFill>
-        <p:spPr>
-          <a:xfrm>
-            <a:off x="1111059" y="2331720"/>
-            <a:ext cx="5824602" cy="3429000"/>
-          </a:xfrm>
-          <a:prstGeom prst="rect">
-            <a:avLst/>
-          </a:prstGeom>
-          <a:ln w="9525">
-            <a:solidFill>
-              <a:srgbClr val="D9DCE1"/>
-            </a:solidFill>
-          </a:ln>
-        </p:spPr>
-      </p:pic>
-      <p:sp>
-        <p:nvSpPr>
-          <p:cNvPr id="18" name="TextBox 17"/>
-          <p:cNvSpPr txBox="1"/>
-          <p:nvPr/>
-        </p:nvSpPr>
-        <p:spPr>
-          <a:xfrm>
-            <a:off x="548640" y="5806440"/>
-            <a:ext cx="6949440" cy="274320"/>
-          </a:xfrm>
-          <a:prstGeom prst="rect">
-            <a:avLst/>
-          </a:prstGeom>
-          <a:noFill/>
-        </p:spPr>
-        <p:txBody>
-          <a:bodyPr wrap="square" lIns="0" rIns="0" tIns="0" bIns="0" anchor="t">
-            <a:spAutoFit/>
-          </a:bodyPr>
-          <a:lstStyle/>
-          <a:p>
-            <a:pPr algn="ctr"/>
-            <a:r>
-              <a:rPr sz="1100" b="0">
-                <a:solidFill>
-                  <a:srgbClr val="6B7280"/>
-                </a:solidFill>
-                <a:latin typeface="Calibri"/>
-              </a:rPr>
-              <a:t>Green run on main</a:t>
-            </a:r>
-          </a:p>
-        </p:txBody>
-      </p:sp>
-      <p:pic>
-        <p:nvPicPr>
-          <p:cNvPr id="19" name="Picture 18" descr="06_github_actions_failure.png"/>
           <p:cNvPicPr>
             <a:picLocks noChangeAspect="1"/>
           </p:cNvPicPr>
@@ -6332,8 +6187,8 @@
         </p:blipFill>
         <p:spPr>
           <a:xfrm>
-            <a:off x="7726679" y="2888840"/>
-            <a:ext cx="3931920" cy="2314759"/>
+            <a:off x="1111059" y="2331720"/>
+            <a:ext cx="5824602" cy="3429000"/>
           </a:xfrm>
           <a:prstGeom prst="rect">
             <a:avLst/>
@@ -6347,6 +6202,70 @@
       </p:pic>
       <p:sp>
         <p:nvSpPr>
+          <p:cNvPr id="18" name="TextBox 17"/>
+          <p:cNvSpPr txBox="1"/>
+          <p:nvPr/>
+        </p:nvSpPr>
+        <p:spPr>
+          <a:xfrm>
+            <a:off x="548640" y="5806440"/>
+            <a:ext cx="6949440" cy="274320"/>
+          </a:xfrm>
+          <a:prstGeom prst="rect">
+            <a:avLst/>
+          </a:prstGeom>
+          <a:noFill/>
+        </p:spPr>
+        <p:txBody>
+          <a:bodyPr wrap="square" lIns="0" tIns="0" rIns="0" bIns="0" anchor="t">
+            <a:spAutoFit/>
+          </a:bodyPr>
+          <a:lstStyle/>
+          <a:p>
+            <a:pPr algn="ctr"/>
+            <a:r>
+              <a:rPr sz="1100" b="0">
+                <a:solidFill>
+                  <a:srgbClr val="6B7280"/>
+                </a:solidFill>
+                <a:latin typeface="Calibri"/>
+              </a:rPr>
+              <a:t>Green run on main</a:t>
+            </a:r>
+          </a:p>
+        </p:txBody>
+      </p:sp>
+      <p:pic>
+        <p:nvPicPr>
+          <p:cNvPr id="19" name="Picture 18" descr="06_github_actions_failure.png"/>
+          <p:cNvPicPr>
+            <a:picLocks noChangeAspect="1"/>
+          </p:cNvPicPr>
+          <p:nvPr/>
+        </p:nvPicPr>
+        <p:blipFill>
+          <a:blip r:embed="rId4"/>
+          <a:stretch>
+            <a:fillRect/>
+          </a:stretch>
+        </p:blipFill>
+        <p:spPr>
+          <a:xfrm>
+            <a:off x="7726679" y="2888840"/>
+            <a:ext cx="3931920" cy="2314759"/>
+          </a:xfrm>
+          <a:prstGeom prst="rect">
+            <a:avLst/>
+          </a:prstGeom>
+          <a:ln w="9525">
+            <a:solidFill>
+              <a:srgbClr val="D9DCE1"/>
+            </a:solidFill>
+          </a:ln>
+        </p:spPr>
+      </p:pic>
+      <p:sp>
+        <p:nvSpPr>
           <p:cNvPr id="20" name="TextBox 19"/>
           <p:cNvSpPr txBox="1"/>
           <p:nvPr/>
@@ -6362,7 +6281,7 @@
           <a:noFill/>
         </p:spPr>
         <p:txBody>
-          <a:bodyPr wrap="square" lIns="0" rIns="0" tIns="0" bIns="0" anchor="t">
+          <a:bodyPr wrap="square" lIns="0" tIns="0" rIns="0" bIns="0" anchor="t">
             <a:spAutoFit/>
           </a:bodyPr>
           <a:lstStyle/>
@@ -6389,7 +6308,7 @@
 </file>
 
 <file path=ppt/slides/slide12.xml><?xml version="1.0" encoding="utf-8"?>
-<p:sld xmlns:a="http://schemas.openxmlformats.org/drawingml/2006/main" xmlns:p="http://schemas.openxmlformats.org/presentationml/2006/main" xmlns:r="http://schemas.openxmlformats.org/officeDocument/2006/relationships">
+<p:sld xmlns:a="http://schemas.openxmlformats.org/drawingml/2006/main" xmlns:r="http://schemas.openxmlformats.org/officeDocument/2006/relationships" xmlns:p="http://schemas.openxmlformats.org/presentationml/2006/main">
   <p:cSld>
     <p:bg>
       <p:bgPr>
@@ -6405,7 +6324,14 @@
         <p:cNvGrpSpPr/>
         <p:nvPr/>
       </p:nvGrpSpPr>
-      <p:grpSpPr/>
+      <p:grpSpPr>
+        <a:xfrm>
+          <a:off x="0" y="0"/>
+          <a:ext cx="0" cy="0"/>
+          <a:chOff x="0" y="0"/>
+          <a:chExt cx="0" cy="0"/>
+        </a:xfrm>
+      </p:grpSpPr>
       <p:sp>
         <p:nvSpPr>
           <p:cNvPr id="2" name="TextBox 1"/>
@@ -6423,7 +6349,7 @@
           <a:noFill/>
         </p:spPr>
         <p:txBody>
-          <a:bodyPr wrap="square" lIns="0" rIns="0" tIns="0" bIns="0" anchor="t">
+          <a:bodyPr wrap="square" lIns="0" tIns="0" rIns="0" bIns="0" anchor="t">
             <a:spAutoFit/>
           </a:bodyPr>
           <a:lstStyle/>
@@ -6458,7 +6384,7 @@
           <a:noFill/>
         </p:spPr>
         <p:txBody>
-          <a:bodyPr wrap="square" lIns="0" rIns="0" tIns="0" bIns="0" anchor="t">
+          <a:bodyPr wrap="square" lIns="0" tIns="0" rIns="0" bIns="0" anchor="t">
             <a:spAutoFit/>
           </a:bodyPr>
           <a:lstStyle/>
@@ -6517,6 +6443,7 @@
           <a:lstStyle/>
           <a:p>
             <a:pPr algn="ctr"/>
+            <a:endParaRPr/>
           </a:p>
         </p:txBody>
       </p:sp>
@@ -6537,7 +6464,7 @@
           <a:noFill/>
         </p:spPr>
         <p:txBody>
-          <a:bodyPr wrap="square" lIns="0" rIns="0" tIns="0" bIns="0" anchor="t">
+          <a:bodyPr wrap="square" lIns="0" tIns="0" rIns="0" bIns="0" anchor="t">
             <a:spAutoFit/>
           </a:bodyPr>
           <a:lstStyle/>
@@ -6572,7 +6499,7 @@
           <a:noFill/>
         </p:spPr>
         <p:txBody>
-          <a:bodyPr wrap="square" lIns="0" rIns="0" tIns="0" bIns="0" anchor="t">
+          <a:bodyPr wrap="square" lIns="0" tIns="0" rIns="0" bIns="0" anchor="t">
             <a:spAutoFit/>
           </a:bodyPr>
           <a:lstStyle/>
@@ -6609,8 +6536,20 @@
                 <a:tableStyleId>{5C22544A-7EE6-4342-B048-85BDC9FD1C3A}</a:tableStyleId>
               </a:tblPr>
               <a:tblGrid>
-                <a:gridCol w="2103120"/>
-                <a:gridCol w="3017520"/>
+                <a:gridCol w="2103120">
+                  <a:extLst>
+                    <a:ext uri="{9D8B030D-6E8A-4147-A177-3AD203B41FA5}">
+                      <a16:colId xmlns:a16="http://schemas.microsoft.com/office/drawing/2014/main" val="20000"/>
+                    </a:ext>
+                  </a:extLst>
+                </a:gridCol>
+                <a:gridCol w="3017520">
+                  <a:extLst>
+                    <a:ext uri="{9D8B030D-6E8A-4147-A177-3AD203B41FA5}">
+                      <a16:colId xmlns:a16="http://schemas.microsoft.com/office/drawing/2014/main" val="20001"/>
+                    </a:ext>
+                  </a:extLst>
+                </a:gridCol>
               </a:tblGrid>
               <a:tr h="457200">
                 <a:tc>
@@ -6657,6 +6596,11 @@
                     </a:solidFill>
                   </a:tcPr>
                 </a:tc>
+                <a:extLst>
+                  <a:ext uri="{0D108BD9-81ED-4DB2-BD59-A6C34878D82A}">
+                    <a16:rowId xmlns:a16="http://schemas.microsoft.com/office/drawing/2014/main" val="10000"/>
+                  </a:ext>
+                </a:extLst>
               </a:tr>
               <a:tr h="457200">
                 <a:tc>
@@ -6703,6 +6647,11 @@
                     </a:solidFill>
                   </a:tcPr>
                 </a:tc>
+                <a:extLst>
+                  <a:ext uri="{0D108BD9-81ED-4DB2-BD59-A6C34878D82A}">
+                    <a16:rowId xmlns:a16="http://schemas.microsoft.com/office/drawing/2014/main" val="10001"/>
+                  </a:ext>
+                </a:extLst>
               </a:tr>
               <a:tr h="457200">
                 <a:tc>
@@ -6749,6 +6698,11 @@
                     </a:solidFill>
                   </a:tcPr>
                 </a:tc>
+                <a:extLst>
+                  <a:ext uri="{0D108BD9-81ED-4DB2-BD59-A6C34878D82A}">
+                    <a16:rowId xmlns:a16="http://schemas.microsoft.com/office/drawing/2014/main" val="10002"/>
+                  </a:ext>
+                </a:extLst>
               </a:tr>
               <a:tr h="457200">
                 <a:tc>
@@ -6795,6 +6749,11 @@
                     </a:solidFill>
                   </a:tcPr>
                 </a:tc>
+                <a:extLst>
+                  <a:ext uri="{0D108BD9-81ED-4DB2-BD59-A6C34878D82A}">
+                    <a16:rowId xmlns:a16="http://schemas.microsoft.com/office/drawing/2014/main" val="10003"/>
+                  </a:ext>
+                </a:extLst>
               </a:tr>
               <a:tr h="457200">
                 <a:tc>
@@ -6841,6 +6800,11 @@
                     </a:solidFill>
                   </a:tcPr>
                 </a:tc>
+                <a:extLst>
+                  <a:ext uri="{0D108BD9-81ED-4DB2-BD59-A6C34878D82A}">
+                    <a16:rowId xmlns:a16="http://schemas.microsoft.com/office/drawing/2014/main" val="10004"/>
+                  </a:ext>
+                </a:extLst>
               </a:tr>
               <a:tr h="457200">
                 <a:tc>
@@ -6887,6 +6851,11 @@
                     </a:solidFill>
                   </a:tcPr>
                 </a:tc>
+                <a:extLst>
+                  <a:ext uri="{0D108BD9-81ED-4DB2-BD59-A6C34878D82A}">
+                    <a16:rowId xmlns:a16="http://schemas.microsoft.com/office/drawing/2014/main" val="10005"/>
+                  </a:ext>
+                </a:extLst>
               </a:tr>
             </a:tbl>
           </a:graphicData>
@@ -6909,7 +6878,7 @@
           <a:noFill/>
         </p:spPr>
         <p:txBody>
-          <a:bodyPr wrap="square" lIns="0" rIns="0" tIns="0" bIns="0">
+          <a:bodyPr wrap="square" lIns="0" tIns="0" rIns="0" bIns="0">
             <a:spAutoFit/>
           </a:bodyPr>
           <a:lstStyle/>
@@ -6986,70 +6955,6 @@
       <p:pic>
         <p:nvPicPr>
           <p:cNvPr id="9" name="Picture 8" descr="08_swagger_predict.png"/>
-          <p:cNvPicPr>
-            <a:picLocks noChangeAspect="1"/>
-          </p:cNvPicPr>
-          <p:nvPr/>
-        </p:nvPicPr>
-        <p:blipFill>
-          <a:blip r:embed="rId2"/>
-          <a:stretch>
-            <a:fillRect/>
-          </a:stretch>
-        </p:blipFill>
-        <p:spPr>
-          <a:xfrm>
-            <a:off x="6820735" y="1371600"/>
-            <a:ext cx="3960729" cy="2331720"/>
-          </a:xfrm>
-          <a:prstGeom prst="rect">
-            <a:avLst/>
-          </a:prstGeom>
-          <a:ln w="9525">
-            <a:solidFill>
-              <a:srgbClr val="D9DCE1"/>
-            </a:solidFill>
-          </a:ln>
-        </p:spPr>
-      </p:pic>
-      <p:sp>
-        <p:nvSpPr>
-          <p:cNvPr id="10" name="TextBox 9"/>
-          <p:cNvSpPr txBox="1"/>
-          <p:nvPr/>
-        </p:nvSpPr>
-        <p:spPr>
-          <a:xfrm>
-            <a:off x="5943600" y="3749040"/>
-            <a:ext cx="5715000" cy="274320"/>
-          </a:xfrm>
-          <a:prstGeom prst="rect">
-            <a:avLst/>
-          </a:prstGeom>
-          <a:noFill/>
-        </p:spPr>
-        <p:txBody>
-          <a:bodyPr wrap="square" lIns="0" rIns="0" tIns="0" bIns="0" anchor="t">
-            <a:spAutoFit/>
-          </a:bodyPr>
-          <a:lstStyle/>
-          <a:p>
-            <a:pPr algn="ctr"/>
-            <a:r>
-              <a:rPr sz="1100" b="0">
-                <a:solidFill>
-                  <a:srgbClr val="6B7280"/>
-                </a:solidFill>
-                <a:latin typeface="Calibri"/>
-              </a:rPr>
-              <a:t>Swagger /predict</a:t>
-            </a:r>
-          </a:p>
-        </p:txBody>
-      </p:sp>
-      <p:pic>
-        <p:nvPicPr>
-          <p:cNvPr id="11" name="Picture 10" descr="07_docker_build_run.png"/>
           <p:cNvPicPr>
             <a:picLocks noChangeAspect="1"/>
           </p:cNvPicPr>
@@ -7063,8 +6968,8 @@
         </p:blipFill>
         <p:spPr>
           <a:xfrm>
-            <a:off x="7014888" y="3931920"/>
-            <a:ext cx="3572423" cy="2103120"/>
+            <a:off x="6820735" y="1371600"/>
+            <a:ext cx="3960729" cy="2331720"/>
           </a:xfrm>
           <a:prstGeom prst="rect">
             <a:avLst/>
@@ -7078,6 +6983,70 @@
       </p:pic>
       <p:sp>
         <p:nvSpPr>
+          <p:cNvPr id="10" name="TextBox 9"/>
+          <p:cNvSpPr txBox="1"/>
+          <p:nvPr/>
+        </p:nvSpPr>
+        <p:spPr>
+          <a:xfrm>
+            <a:off x="5943600" y="3749040"/>
+            <a:ext cx="5715000" cy="274320"/>
+          </a:xfrm>
+          <a:prstGeom prst="rect">
+            <a:avLst/>
+          </a:prstGeom>
+          <a:noFill/>
+        </p:spPr>
+        <p:txBody>
+          <a:bodyPr wrap="square" lIns="0" tIns="0" rIns="0" bIns="0" anchor="t">
+            <a:spAutoFit/>
+          </a:bodyPr>
+          <a:lstStyle/>
+          <a:p>
+            <a:pPr algn="ctr"/>
+            <a:r>
+              <a:rPr sz="1100" b="0">
+                <a:solidFill>
+                  <a:srgbClr val="6B7280"/>
+                </a:solidFill>
+                <a:latin typeface="Calibri"/>
+              </a:rPr>
+              <a:t>Swagger /predict</a:t>
+            </a:r>
+          </a:p>
+        </p:txBody>
+      </p:sp>
+      <p:pic>
+        <p:nvPicPr>
+          <p:cNvPr id="11" name="Picture 10" descr="07_docker_build_run.png"/>
+          <p:cNvPicPr>
+            <a:picLocks noChangeAspect="1"/>
+          </p:cNvPicPr>
+          <p:nvPr/>
+        </p:nvPicPr>
+        <p:blipFill>
+          <a:blip r:embed="rId4"/>
+          <a:stretch>
+            <a:fillRect/>
+          </a:stretch>
+        </p:blipFill>
+        <p:spPr>
+          <a:xfrm>
+            <a:off x="7014888" y="3931920"/>
+            <a:ext cx="3572423" cy="2103120"/>
+          </a:xfrm>
+          <a:prstGeom prst="rect">
+            <a:avLst/>
+          </a:prstGeom>
+          <a:ln w="9525">
+            <a:solidFill>
+              <a:srgbClr val="D9DCE1"/>
+            </a:solidFill>
+          </a:ln>
+        </p:spPr>
+      </p:pic>
+      <p:sp>
+        <p:nvSpPr>
           <p:cNvPr id="12" name="TextBox 11"/>
           <p:cNvSpPr txBox="1"/>
           <p:nvPr/>
@@ -7093,7 +7062,7 @@
           <a:noFill/>
         </p:spPr>
         <p:txBody>
-          <a:bodyPr wrap="square" lIns="0" rIns="0" tIns="0" bIns="0" anchor="t">
+          <a:bodyPr wrap="square" lIns="0" tIns="0" rIns="0" bIns="0" anchor="t">
             <a:spAutoFit/>
           </a:bodyPr>
           <a:lstStyle/>
@@ -7120,7 +7089,7 @@
 </file>
 
 <file path=ppt/slides/slide13.xml><?xml version="1.0" encoding="utf-8"?>
-<p:sld xmlns:a="http://schemas.openxmlformats.org/drawingml/2006/main" xmlns:p="http://schemas.openxmlformats.org/presentationml/2006/main" xmlns:r="http://schemas.openxmlformats.org/officeDocument/2006/relationships">
+<p:sld xmlns:a="http://schemas.openxmlformats.org/drawingml/2006/main" xmlns:r="http://schemas.openxmlformats.org/officeDocument/2006/relationships" xmlns:p="http://schemas.openxmlformats.org/presentationml/2006/main">
   <p:cSld>
     <p:bg>
       <p:bgPr>
@@ -7136,7 +7105,14 @@
         <p:cNvGrpSpPr/>
         <p:nvPr/>
       </p:nvGrpSpPr>
-      <p:grpSpPr/>
+      <p:grpSpPr>
+        <a:xfrm>
+          <a:off x="0" y="0"/>
+          <a:ext cx="0" cy="0"/>
+          <a:chOff x="0" y="0"/>
+          <a:chExt cx="0" cy="0"/>
+        </a:xfrm>
+      </p:grpSpPr>
       <p:sp>
         <p:nvSpPr>
           <p:cNvPr id="2" name="TextBox 1"/>
@@ -7154,7 +7130,7 @@
           <a:noFill/>
         </p:spPr>
         <p:txBody>
-          <a:bodyPr wrap="square" lIns="0" rIns="0" tIns="0" bIns="0" anchor="t">
+          <a:bodyPr wrap="square" lIns="0" tIns="0" rIns="0" bIns="0" anchor="t">
             <a:spAutoFit/>
           </a:bodyPr>
           <a:lstStyle/>
@@ -7189,7 +7165,7 @@
           <a:noFill/>
         </p:spPr>
         <p:txBody>
-          <a:bodyPr wrap="square" lIns="0" rIns="0" tIns="0" bIns="0" anchor="t">
+          <a:bodyPr wrap="square" lIns="0" tIns="0" rIns="0" bIns="0" anchor="t">
             <a:spAutoFit/>
           </a:bodyPr>
           <a:lstStyle/>
@@ -7248,6 +7224,7 @@
           <a:lstStyle/>
           <a:p>
             <a:pPr algn="ctr"/>
+            <a:endParaRPr/>
           </a:p>
         </p:txBody>
       </p:sp>
@@ -7268,7 +7245,7 @@
           <a:noFill/>
         </p:spPr>
         <p:txBody>
-          <a:bodyPr wrap="square" lIns="0" rIns="0" tIns="0" bIns="0" anchor="t">
+          <a:bodyPr wrap="square" lIns="0" tIns="0" rIns="0" bIns="0" anchor="t">
             <a:spAutoFit/>
           </a:bodyPr>
           <a:lstStyle/>
@@ -7303,7 +7280,7 @@
           <a:noFill/>
         </p:spPr>
         <p:txBody>
-          <a:bodyPr wrap="square" lIns="0" rIns="0" tIns="0" bIns="0" anchor="t">
+          <a:bodyPr wrap="square" lIns="0" tIns="0" rIns="0" bIns="0" anchor="t">
             <a:spAutoFit/>
           </a:bodyPr>
           <a:lstStyle/>
@@ -7338,7 +7315,7 @@
           <a:noFill/>
         </p:spPr>
         <p:txBody>
-          <a:bodyPr wrap="square" lIns="0" rIns="0" tIns="0" bIns="0">
+          <a:bodyPr wrap="square" lIns="0" tIns="0" rIns="0" bIns="0">
             <a:spAutoFit/>
           </a:bodyPr>
           <a:lstStyle/>
@@ -7551,70 +7528,6 @@
       <p:pic>
         <p:nvPicPr>
           <p:cNvPr id="8" name="Picture 7" descr="09_k8s_resources.png"/>
-          <p:cNvPicPr>
-            <a:picLocks noChangeAspect="1"/>
-          </p:cNvPicPr>
-          <p:nvPr/>
-        </p:nvPicPr>
-        <p:blipFill>
-          <a:blip r:embed="rId2"/>
-          <a:stretch>
-            <a:fillRect/>
-          </a:stretch>
-        </p:blipFill>
-        <p:spPr>
-          <a:xfrm>
-            <a:off x="6441196" y="1371600"/>
-            <a:ext cx="3805407" cy="2240280"/>
-          </a:xfrm>
-          <a:prstGeom prst="rect">
-            <a:avLst/>
-          </a:prstGeom>
-          <a:ln w="9525">
-            <a:solidFill>
-              <a:srgbClr val="D9DCE1"/>
-            </a:solidFill>
-          </a:ln>
-        </p:spPr>
-      </p:pic>
-      <p:sp>
-        <p:nvSpPr>
-          <p:cNvPr id="9" name="TextBox 8"/>
-          <p:cNvSpPr txBox="1"/>
-          <p:nvPr/>
-        </p:nvSpPr>
-        <p:spPr>
-          <a:xfrm>
-            <a:off x="5029200" y="3657600"/>
-            <a:ext cx="6629400" cy="274320"/>
-          </a:xfrm>
-          <a:prstGeom prst="rect">
-            <a:avLst/>
-          </a:prstGeom>
-          <a:noFill/>
-        </p:spPr>
-        <p:txBody>
-          <a:bodyPr wrap="square" lIns="0" rIns="0" tIns="0" bIns="0" anchor="t">
-            <a:spAutoFit/>
-          </a:bodyPr>
-          <a:lstStyle/>
-          <a:p>
-            <a:pPr algn="ctr"/>
-            <a:r>
-              <a:rPr sz="1100" b="0">
-                <a:solidFill>
-                  <a:srgbClr val="6B7280"/>
-                </a:solidFill>
-                <a:latin typeface="Calibri"/>
-              </a:rPr>
-              <a:t>Cluster resources</a:t>
-            </a:r>
-          </a:p>
-        </p:txBody>
-      </p:sp>
-      <p:pic>
-        <p:nvPicPr>
-          <p:cNvPr id="10" name="Picture 9" descr="10_k8s_predict_ingress.png"/>
           <p:cNvPicPr>
             <a:picLocks noChangeAspect="1"/>
           </p:cNvPicPr>
@@ -7628,8 +7541,8 @@
         </p:blipFill>
         <p:spPr>
           <a:xfrm>
-            <a:off x="6557688" y="3931920"/>
-            <a:ext cx="3572423" cy="2103120"/>
+            <a:off x="6441196" y="1371600"/>
+            <a:ext cx="3805407" cy="2240280"/>
           </a:xfrm>
           <a:prstGeom prst="rect">
             <a:avLst/>
@@ -7643,6 +7556,70 @@
       </p:pic>
       <p:sp>
         <p:nvSpPr>
+          <p:cNvPr id="9" name="TextBox 8"/>
+          <p:cNvSpPr txBox="1"/>
+          <p:nvPr/>
+        </p:nvSpPr>
+        <p:spPr>
+          <a:xfrm>
+            <a:off x="5029200" y="3657600"/>
+            <a:ext cx="6629400" cy="274320"/>
+          </a:xfrm>
+          <a:prstGeom prst="rect">
+            <a:avLst/>
+          </a:prstGeom>
+          <a:noFill/>
+        </p:spPr>
+        <p:txBody>
+          <a:bodyPr wrap="square" lIns="0" tIns="0" rIns="0" bIns="0" anchor="t">
+            <a:spAutoFit/>
+          </a:bodyPr>
+          <a:lstStyle/>
+          <a:p>
+            <a:pPr algn="ctr"/>
+            <a:r>
+              <a:rPr sz="1100" b="0">
+                <a:solidFill>
+                  <a:srgbClr val="6B7280"/>
+                </a:solidFill>
+                <a:latin typeface="Calibri"/>
+              </a:rPr>
+              <a:t>Cluster resources</a:t>
+            </a:r>
+          </a:p>
+        </p:txBody>
+      </p:sp>
+      <p:pic>
+        <p:nvPicPr>
+          <p:cNvPr id="10" name="Picture 9" descr="10_k8s_predict_ingress.png"/>
+          <p:cNvPicPr>
+            <a:picLocks noChangeAspect="1"/>
+          </p:cNvPicPr>
+          <p:nvPr/>
+        </p:nvPicPr>
+        <p:blipFill>
+          <a:blip r:embed="rId4"/>
+          <a:stretch>
+            <a:fillRect/>
+          </a:stretch>
+        </p:blipFill>
+        <p:spPr>
+          <a:xfrm>
+            <a:off x="6557688" y="3931920"/>
+            <a:ext cx="3572423" cy="2103120"/>
+          </a:xfrm>
+          <a:prstGeom prst="rect">
+            <a:avLst/>
+          </a:prstGeom>
+          <a:ln w="9525">
+            <a:solidFill>
+              <a:srgbClr val="D9DCE1"/>
+            </a:solidFill>
+          </a:ln>
+        </p:spPr>
+      </p:pic>
+      <p:sp>
+        <p:nvSpPr>
           <p:cNvPr id="11" name="TextBox 10"/>
           <p:cNvSpPr txBox="1"/>
           <p:nvPr/>
@@ -7658,7 +7635,7 @@
           <a:noFill/>
         </p:spPr>
         <p:txBody>
-          <a:bodyPr wrap="square" lIns="0" rIns="0" tIns="0" bIns="0" anchor="t">
+          <a:bodyPr wrap="square" lIns="0" tIns="0" rIns="0" bIns="0" anchor="t">
             <a:spAutoFit/>
           </a:bodyPr>
           <a:lstStyle/>
@@ -7685,7 +7662,7 @@
 </file>
 
 <file path=ppt/slides/slide14.xml><?xml version="1.0" encoding="utf-8"?>
-<p:sld xmlns:a="http://schemas.openxmlformats.org/drawingml/2006/main" xmlns:p="http://schemas.openxmlformats.org/presentationml/2006/main" xmlns:r="http://schemas.openxmlformats.org/officeDocument/2006/relationships">
+<p:sld xmlns:a="http://schemas.openxmlformats.org/drawingml/2006/main" xmlns:r="http://schemas.openxmlformats.org/officeDocument/2006/relationships" xmlns:p="http://schemas.openxmlformats.org/presentationml/2006/main">
   <p:cSld>
     <p:bg>
       <p:bgPr>
@@ -7701,7 +7678,14 @@
         <p:cNvGrpSpPr/>
         <p:nvPr/>
       </p:nvGrpSpPr>
-      <p:grpSpPr/>
+      <p:grpSpPr>
+        <a:xfrm>
+          <a:off x="0" y="0"/>
+          <a:ext cx="0" cy="0"/>
+          <a:chOff x="0" y="0"/>
+          <a:chExt cx="0" cy="0"/>
+        </a:xfrm>
+      </p:grpSpPr>
       <p:sp>
         <p:nvSpPr>
           <p:cNvPr id="2" name="TextBox 1"/>
@@ -7719,7 +7703,7 @@
           <a:noFill/>
         </p:spPr>
         <p:txBody>
-          <a:bodyPr wrap="square" lIns="0" rIns="0" tIns="0" bIns="0" anchor="t">
+          <a:bodyPr wrap="square" lIns="0" tIns="0" rIns="0" bIns="0" anchor="t">
             <a:spAutoFit/>
           </a:bodyPr>
           <a:lstStyle/>
@@ -7754,7 +7738,7 @@
           <a:noFill/>
         </p:spPr>
         <p:txBody>
-          <a:bodyPr wrap="square" lIns="0" rIns="0" tIns="0" bIns="0" anchor="t">
+          <a:bodyPr wrap="square" lIns="0" tIns="0" rIns="0" bIns="0" anchor="t">
             <a:spAutoFit/>
           </a:bodyPr>
           <a:lstStyle/>
@@ -7813,6 +7797,7 @@
           <a:lstStyle/>
           <a:p>
             <a:pPr algn="ctr"/>
+            <a:endParaRPr/>
           </a:p>
         </p:txBody>
       </p:sp>
@@ -7833,7 +7818,7 @@
           <a:noFill/>
         </p:spPr>
         <p:txBody>
-          <a:bodyPr wrap="square" lIns="0" rIns="0" tIns="0" bIns="0" anchor="t">
+          <a:bodyPr wrap="square" lIns="0" tIns="0" rIns="0" bIns="0" anchor="t">
             <a:spAutoFit/>
           </a:bodyPr>
           <a:lstStyle/>
@@ -7868,7 +7853,7 @@
           <a:noFill/>
         </p:spPr>
         <p:txBody>
-          <a:bodyPr wrap="square" lIns="0" rIns="0" tIns="0" bIns="0" anchor="t">
+          <a:bodyPr wrap="square" lIns="0" tIns="0" rIns="0" bIns="0" anchor="t">
             <a:spAutoFit/>
           </a:bodyPr>
           <a:lstStyle/>
@@ -7889,70 +7874,6 @@
       <p:pic>
         <p:nvPicPr>
           <p:cNvPr id="7" name="Picture 6" descr="12_grafana_dashboard.png"/>
-          <p:cNvPicPr>
-            <a:picLocks noChangeAspect="1"/>
-          </p:cNvPicPr>
-          <p:nvPr/>
-        </p:nvPicPr>
-        <p:blipFill>
-          <a:blip r:embed="rId2"/>
-          <a:stretch>
-            <a:fillRect/>
-          </a:stretch>
-        </p:blipFill>
-        <p:spPr>
-          <a:xfrm>
-            <a:off x="729641" y="1371600"/>
-            <a:ext cx="6678877" cy="3931920"/>
-          </a:xfrm>
-          <a:prstGeom prst="rect">
-            <a:avLst/>
-          </a:prstGeom>
-          <a:ln w="9525">
-            <a:solidFill>
-              <a:srgbClr val="D9DCE1"/>
-            </a:solidFill>
-          </a:ln>
-        </p:spPr>
-      </p:pic>
-      <p:sp>
-        <p:nvSpPr>
-          <p:cNvPr id="8" name="TextBox 7"/>
-          <p:cNvSpPr txBox="1"/>
-          <p:nvPr/>
-        </p:nvSpPr>
-        <p:spPr>
-          <a:xfrm>
-            <a:off x="548640" y="5349240"/>
-            <a:ext cx="7040880" cy="274320"/>
-          </a:xfrm>
-          <a:prstGeom prst="rect">
-            <a:avLst/>
-          </a:prstGeom>
-          <a:noFill/>
-        </p:spPr>
-        <p:txBody>
-          <a:bodyPr wrap="square" lIns="0" rIns="0" tIns="0" bIns="0" anchor="t">
-            <a:spAutoFit/>
-          </a:bodyPr>
-          <a:lstStyle/>
-          <a:p>
-            <a:pPr algn="ctr"/>
-            <a:r>
-              <a:rPr sz="1100" b="0">
-                <a:solidFill>
-                  <a:srgbClr val="6B7280"/>
-                </a:solidFill>
-                <a:latin typeface="Calibri"/>
-              </a:rPr>
-              <a:t>Grafana dashboard</a:t>
-            </a:r>
-          </a:p>
-        </p:txBody>
-      </p:sp>
-      <p:pic>
-        <p:nvPicPr>
-          <p:cNvPr id="9" name="Picture 8" descr="13_api_json_logs.png"/>
           <p:cNvPicPr>
             <a:picLocks noChangeAspect="1"/>
           </p:cNvPicPr>
@@ -7966,8 +7887,8 @@
         </p:blipFill>
         <p:spPr>
           <a:xfrm>
-            <a:off x="8185133" y="1371600"/>
-            <a:ext cx="3106454" cy="1828800"/>
+            <a:off x="729641" y="1371600"/>
+            <a:ext cx="6678877" cy="3931920"/>
           </a:xfrm>
           <a:prstGeom prst="rect">
             <a:avLst/>
@@ -7981,6 +7902,70 @@
       </p:pic>
       <p:sp>
         <p:nvSpPr>
+          <p:cNvPr id="8" name="TextBox 7"/>
+          <p:cNvSpPr txBox="1"/>
+          <p:nvPr/>
+        </p:nvSpPr>
+        <p:spPr>
+          <a:xfrm>
+            <a:off x="548640" y="5349240"/>
+            <a:ext cx="7040880" cy="274320"/>
+          </a:xfrm>
+          <a:prstGeom prst="rect">
+            <a:avLst/>
+          </a:prstGeom>
+          <a:noFill/>
+        </p:spPr>
+        <p:txBody>
+          <a:bodyPr wrap="square" lIns="0" tIns="0" rIns="0" bIns="0" anchor="t">
+            <a:spAutoFit/>
+          </a:bodyPr>
+          <a:lstStyle/>
+          <a:p>
+            <a:pPr algn="ctr"/>
+            <a:r>
+              <a:rPr sz="1100" b="0">
+                <a:solidFill>
+                  <a:srgbClr val="6B7280"/>
+                </a:solidFill>
+                <a:latin typeface="Calibri"/>
+              </a:rPr>
+              <a:t>Grafana dashboard</a:t>
+            </a:r>
+          </a:p>
+        </p:txBody>
+      </p:sp>
+      <p:pic>
+        <p:nvPicPr>
+          <p:cNvPr id="9" name="Picture 8" descr="13_api_json_logs.png"/>
+          <p:cNvPicPr>
+            <a:picLocks noChangeAspect="1"/>
+          </p:cNvPicPr>
+          <p:nvPr/>
+        </p:nvPicPr>
+        <p:blipFill>
+          <a:blip r:embed="rId4"/>
+          <a:stretch>
+            <a:fillRect/>
+          </a:stretch>
+        </p:blipFill>
+        <p:spPr>
+          <a:xfrm>
+            <a:off x="8185133" y="1371600"/>
+            <a:ext cx="3106454" cy="1828800"/>
+          </a:xfrm>
+          <a:prstGeom prst="rect">
+            <a:avLst/>
+          </a:prstGeom>
+          <a:ln w="9525">
+            <a:solidFill>
+              <a:srgbClr val="D9DCE1"/>
+            </a:solidFill>
+          </a:ln>
+        </p:spPr>
+      </p:pic>
+      <p:sp>
+        <p:nvSpPr>
           <p:cNvPr id="10" name="TextBox 9"/>
           <p:cNvSpPr txBox="1"/>
           <p:nvPr/>
@@ -7996,7 +7981,7 @@
           <a:noFill/>
         </p:spPr>
         <p:txBody>
-          <a:bodyPr wrap="square" lIns="0" rIns="0" tIns="0" bIns="0" anchor="t">
+          <a:bodyPr wrap="square" lIns="0" tIns="0" rIns="0" bIns="0" anchor="t">
             <a:spAutoFit/>
           </a:bodyPr>
           <a:lstStyle/>
@@ -8031,7 +8016,7 @@
           <a:noFill/>
         </p:spPr>
         <p:txBody>
-          <a:bodyPr wrap="square" lIns="0" rIns="0" tIns="0" bIns="0">
+          <a:bodyPr wrap="square" lIns="0" tIns="0" rIns="0" bIns="0">
             <a:spAutoFit/>
           </a:bodyPr>
           <a:lstStyle/>
@@ -8155,7 +8140,7 @@
 </file>
 
 <file path=ppt/slides/slide15.xml><?xml version="1.0" encoding="utf-8"?>
-<p:sld xmlns:a="http://schemas.openxmlformats.org/drawingml/2006/main" xmlns:p="http://schemas.openxmlformats.org/presentationml/2006/main" xmlns:r="http://schemas.openxmlformats.org/officeDocument/2006/relationships">
+<p:sld xmlns:a="http://schemas.openxmlformats.org/drawingml/2006/main" xmlns:r="http://schemas.openxmlformats.org/officeDocument/2006/relationships" xmlns:p="http://schemas.openxmlformats.org/presentationml/2006/main">
   <p:cSld>
     <p:bg>
       <p:bgPr>
@@ -8171,7 +8156,14 @@
         <p:cNvGrpSpPr/>
         <p:nvPr/>
       </p:nvGrpSpPr>
-      <p:grpSpPr/>
+      <p:grpSpPr>
+        <a:xfrm>
+          <a:off x="0" y="0"/>
+          <a:ext cx="0" cy="0"/>
+          <a:chOff x="0" y="0"/>
+          <a:chExt cx="0" cy="0"/>
+        </a:xfrm>
+      </p:grpSpPr>
       <p:sp>
         <p:nvSpPr>
           <p:cNvPr id="2" name="TextBox 1"/>
@@ -8189,7 +8181,7 @@
           <a:noFill/>
         </p:spPr>
         <p:txBody>
-          <a:bodyPr wrap="square" lIns="0" rIns="0" tIns="0" bIns="0" anchor="t">
+          <a:bodyPr wrap="square" lIns="0" tIns="0" rIns="0" bIns="0" anchor="t">
             <a:spAutoFit/>
           </a:bodyPr>
           <a:lstStyle/>
@@ -8224,7 +8216,7 @@
           <a:noFill/>
         </p:spPr>
         <p:txBody>
-          <a:bodyPr wrap="square" lIns="0" rIns="0" tIns="0" bIns="0" anchor="t">
+          <a:bodyPr wrap="square" lIns="0" tIns="0" rIns="0" bIns="0" anchor="t">
             <a:spAutoFit/>
           </a:bodyPr>
           <a:lstStyle/>
@@ -8259,7 +8251,7 @@
           <a:noFill/>
         </p:spPr>
         <p:txBody>
-          <a:bodyPr wrap="square" lIns="0" rIns="0" tIns="0" bIns="0" anchor="t">
+          <a:bodyPr wrap="square" lIns="0" tIns="0" rIns="0" bIns="0" anchor="t">
             <a:spAutoFit/>
           </a:bodyPr>
           <a:lstStyle/>
@@ -8294,7 +8286,7 @@
           <a:noFill/>
         </p:spPr>
         <p:txBody>
-          <a:bodyPr wrap="square" lIns="0" rIns="0" tIns="0" bIns="0" anchor="t">
+          <a:bodyPr wrap="square" lIns="0" tIns="0" rIns="0" bIns="0" anchor="t">
             <a:spAutoFit/>
           </a:bodyPr>
           <a:lstStyle/>
@@ -8329,7 +8321,7 @@
           <a:noFill/>
         </p:spPr>
         <p:txBody>
-          <a:bodyPr wrap="square" lIns="0" rIns="0" tIns="0" bIns="0" anchor="t">
+          <a:bodyPr wrap="square" lIns="0" tIns="0" rIns="0" bIns="0" anchor="t">
             <a:spAutoFit/>
           </a:bodyPr>
           <a:lstStyle/>
@@ -8364,7 +8356,7 @@
           <a:noFill/>
         </p:spPr>
         <p:txBody>
-          <a:bodyPr wrap="square" lIns="0" rIns="0" tIns="0" bIns="0" anchor="t">
+          <a:bodyPr wrap="square" lIns="0" tIns="0" rIns="0" bIns="0" anchor="t">
             <a:spAutoFit/>
           </a:bodyPr>
           <a:lstStyle/>
@@ -8391,7 +8383,7 @@
         <p:spPr>
           <a:xfrm>
             <a:off x="6217920" y="2377440"/>
-            <a:ext cx="2560320" cy="822960"/>
+            <a:ext cx="2560320" cy="677108"/>
           </a:xfrm>
           <a:prstGeom prst="rect">
             <a:avLst/>
@@ -8399,21 +8391,27 @@
           <a:noFill/>
         </p:spPr>
         <p:txBody>
-          <a:bodyPr wrap="square" lIns="0" rIns="0" tIns="0" bIns="0" anchor="t">
+          <a:bodyPr wrap="square" lIns="0" tIns="0" rIns="0" bIns="0" anchor="t">
             <a:spAutoFit/>
           </a:bodyPr>
           <a:lstStyle/>
           <a:p>
             <a:pPr algn="l"/>
             <a:r>
-              <a:rPr sz="4400" b="1">
+              <a:rPr lang="en-US" sz="4400" b="1">
                 <a:solidFill>
                   <a:srgbClr val="FFFFFF"/>
                 </a:solidFill>
                 <a:latin typeface="Calibri"/>
               </a:rPr>
-              <a:t>37</a:t>
-            </a:r>
+              <a:t>48</a:t>
+            </a:r>
+            <a:endParaRPr sz="4400" b="1" dirty="0">
+              <a:solidFill>
+                <a:srgbClr val="FFFFFF"/>
+              </a:solidFill>
+              <a:latin typeface="Calibri"/>
+            </a:endParaRPr>
           </a:p>
         </p:txBody>
       </p:sp>
@@ -8434,7 +8432,7 @@
           <a:noFill/>
         </p:spPr>
         <p:txBody>
-          <a:bodyPr wrap="square" lIns="0" rIns="0" tIns="0" bIns="0" anchor="t">
+          <a:bodyPr wrap="square" lIns="0" tIns="0" rIns="0" bIns="0" anchor="t">
             <a:spAutoFit/>
           </a:bodyPr>
           <a:lstStyle/>
@@ -8469,7 +8467,7 @@
           <a:noFill/>
         </p:spPr>
         <p:txBody>
-          <a:bodyPr wrap="square" lIns="0" rIns="0" tIns="0" bIns="0" anchor="t">
+          <a:bodyPr wrap="square" lIns="0" tIns="0" rIns="0" bIns="0" anchor="t">
             <a:spAutoFit/>
           </a:bodyPr>
           <a:lstStyle/>
@@ -8504,7 +8502,7 @@
           <a:noFill/>
         </p:spPr>
         <p:txBody>
-          <a:bodyPr wrap="square" lIns="0" rIns="0" tIns="0" bIns="0" anchor="t">
+          <a:bodyPr wrap="square" lIns="0" tIns="0" rIns="0" bIns="0" anchor="t">
             <a:spAutoFit/>
           </a:bodyPr>
           <a:lstStyle/>
@@ -8539,7 +8537,7 @@
           <a:noFill/>
         </p:spPr>
         <p:txBody>
-          <a:bodyPr wrap="square" lIns="0" rIns="0" tIns="0" bIns="0" anchor="t">
+          <a:bodyPr wrap="square" lIns="0" tIns="0" rIns="0" bIns="0" anchor="t">
             <a:spAutoFit/>
           </a:bodyPr>
           <a:lstStyle/>
@@ -8574,7 +8572,7 @@
           <a:noFill/>
         </p:spPr>
         <p:txBody>
-          <a:bodyPr wrap="square" lIns="0" rIns="0" tIns="0" bIns="0" anchor="t">
+          <a:bodyPr wrap="square" lIns="0" tIns="0" rIns="0" bIns="0" anchor="t">
             <a:spAutoFit/>
           </a:bodyPr>
           <a:lstStyle/>
@@ -8621,7 +8619,7 @@
           <a:noFill/>
         </p:spPr>
         <p:txBody>
-          <a:bodyPr wrap="square" lIns="0" rIns="0" tIns="0" bIns="0" anchor="t">
+          <a:bodyPr wrap="square" lIns="0" tIns="0" rIns="0" bIns="0" anchor="t">
             <a:spAutoFit/>
           </a:bodyPr>
           <a:lstStyle/>
@@ -8648,7 +8646,7 @@
 </file>
 
 <file path=ppt/slides/slide2.xml><?xml version="1.0" encoding="utf-8"?>
-<p:sld xmlns:a="http://schemas.openxmlformats.org/drawingml/2006/main" xmlns:p="http://schemas.openxmlformats.org/presentationml/2006/main" xmlns:r="http://schemas.openxmlformats.org/officeDocument/2006/relationships">
+<p:sld xmlns:a="http://schemas.openxmlformats.org/drawingml/2006/main" xmlns:r="http://schemas.openxmlformats.org/officeDocument/2006/relationships" xmlns:p="http://schemas.openxmlformats.org/presentationml/2006/main">
   <p:cSld>
     <p:bg>
       <p:bgPr>
@@ -8664,7 +8662,14 @@
         <p:cNvGrpSpPr/>
         <p:nvPr/>
       </p:nvGrpSpPr>
-      <p:grpSpPr/>
+      <p:grpSpPr>
+        <a:xfrm>
+          <a:off x="0" y="0"/>
+          <a:ext cx="0" cy="0"/>
+          <a:chOff x="0" y="0"/>
+          <a:chExt cx="0" cy="0"/>
+        </a:xfrm>
+      </p:grpSpPr>
       <p:sp>
         <p:nvSpPr>
           <p:cNvPr id="2" name="TextBox 1"/>
@@ -8682,7 +8687,7 @@
           <a:noFill/>
         </p:spPr>
         <p:txBody>
-          <a:bodyPr wrap="square" lIns="0" rIns="0" tIns="0" bIns="0" anchor="t">
+          <a:bodyPr wrap="square" lIns="0" tIns="0" rIns="0" bIns="0" anchor="t">
             <a:spAutoFit/>
           </a:bodyPr>
           <a:lstStyle/>
@@ -8717,7 +8722,7 @@
           <a:noFill/>
         </p:spPr>
         <p:txBody>
-          <a:bodyPr wrap="square" lIns="0" rIns="0" tIns="0" bIns="0" anchor="t">
+          <a:bodyPr wrap="square" lIns="0" tIns="0" rIns="0" bIns="0" anchor="t">
             <a:spAutoFit/>
           </a:bodyPr>
           <a:lstStyle/>
@@ -8776,6 +8781,7 @@
           <a:lstStyle/>
           <a:p>
             <a:pPr algn="ctr"/>
+            <a:endParaRPr/>
           </a:p>
         </p:txBody>
       </p:sp>
@@ -8796,7 +8802,7 @@
           <a:noFill/>
         </p:spPr>
         <p:txBody>
-          <a:bodyPr wrap="square" lIns="0" rIns="0" tIns="0" bIns="0" anchor="t">
+          <a:bodyPr wrap="square" lIns="0" tIns="0" rIns="0" bIns="0" anchor="t">
             <a:spAutoFit/>
           </a:bodyPr>
           <a:lstStyle/>
@@ -8831,7 +8837,7 @@
           <a:noFill/>
         </p:spPr>
         <p:txBody>
-          <a:bodyPr wrap="square" lIns="0" rIns="0" tIns="0" bIns="0" anchor="t">
+          <a:bodyPr wrap="square" lIns="0" tIns="0" rIns="0" bIns="0" anchor="t">
             <a:spAutoFit/>
           </a:bodyPr>
           <a:lstStyle/>
@@ -8890,6 +8896,7 @@
           <a:lstStyle/>
           <a:p>
             <a:pPr algn="ctr"/>
+            <a:endParaRPr/>
           </a:p>
         </p:txBody>
       </p:sp>
@@ -8930,7 +8937,7 @@
           </a:fontRef>
         </p:style>
         <p:txBody>
-          <a:bodyPr rtlCol="0" anchor="ctr" lIns="0" rIns="0" tIns="0" bIns="0"/>
+          <a:bodyPr lIns="0" tIns="0" rIns="0" bIns="0" rtlCol="0" anchor="ctr"/>
           <a:lstStyle/>
           <a:p>
             <a:pPr algn="ctr"/>
@@ -8963,7 +8970,7 @@
           <a:noFill/>
         </p:spPr>
         <p:txBody>
-          <a:bodyPr wrap="square" lIns="0" rIns="0" tIns="0" bIns="0" anchor="t">
+          <a:bodyPr wrap="square" lIns="0" tIns="0" rIns="0" bIns="0" anchor="t">
             <a:spAutoFit/>
           </a:bodyPr>
           <a:lstStyle/>
@@ -8998,7 +9005,7 @@
           <a:noFill/>
         </p:spPr>
         <p:txBody>
-          <a:bodyPr wrap="square" lIns="0" rIns="0" tIns="0" bIns="0" anchor="t">
+          <a:bodyPr wrap="square" lIns="0" tIns="0" rIns="0" bIns="0" anchor="t">
             <a:spAutoFit/>
           </a:bodyPr>
           <a:lstStyle/>
@@ -9057,6 +9064,7 @@
           <a:lstStyle/>
           <a:p>
             <a:pPr algn="ctr"/>
+            <a:endParaRPr/>
           </a:p>
         </p:txBody>
       </p:sp>
@@ -9097,7 +9105,7 @@
           </a:fontRef>
         </p:style>
         <p:txBody>
-          <a:bodyPr rtlCol="0" anchor="ctr" lIns="0" rIns="0" tIns="0" bIns="0"/>
+          <a:bodyPr lIns="0" tIns="0" rIns="0" bIns="0" rtlCol="0" anchor="ctr"/>
           <a:lstStyle/>
           <a:p>
             <a:pPr algn="ctr"/>
@@ -9130,7 +9138,7 @@
           <a:noFill/>
         </p:spPr>
         <p:txBody>
-          <a:bodyPr wrap="square" lIns="0" rIns="0" tIns="0" bIns="0" anchor="t">
+          <a:bodyPr wrap="square" lIns="0" tIns="0" rIns="0" bIns="0" anchor="t">
             <a:spAutoFit/>
           </a:bodyPr>
           <a:lstStyle/>
@@ -9165,7 +9173,7 @@
           <a:noFill/>
         </p:spPr>
         <p:txBody>
-          <a:bodyPr wrap="square" lIns="0" rIns="0" tIns="0" bIns="0" anchor="t">
+          <a:bodyPr wrap="square" lIns="0" tIns="0" rIns="0" bIns="0" anchor="t">
             <a:spAutoFit/>
           </a:bodyPr>
           <a:lstStyle/>
@@ -9224,6 +9232,7 @@
           <a:lstStyle/>
           <a:p>
             <a:pPr algn="ctr"/>
+            <a:endParaRPr/>
           </a:p>
         </p:txBody>
       </p:sp>
@@ -9264,7 +9273,7 @@
           </a:fontRef>
         </p:style>
         <p:txBody>
-          <a:bodyPr rtlCol="0" anchor="ctr" lIns="0" rIns="0" tIns="0" bIns="0"/>
+          <a:bodyPr lIns="0" tIns="0" rIns="0" bIns="0" rtlCol="0" anchor="ctr"/>
           <a:lstStyle/>
           <a:p>
             <a:pPr algn="ctr"/>
@@ -9297,7 +9306,7 @@
           <a:noFill/>
         </p:spPr>
         <p:txBody>
-          <a:bodyPr wrap="square" lIns="0" rIns="0" tIns="0" bIns="0" anchor="t">
+          <a:bodyPr wrap="square" lIns="0" tIns="0" rIns="0" bIns="0" anchor="t">
             <a:spAutoFit/>
           </a:bodyPr>
           <a:lstStyle/>
@@ -9332,7 +9341,7 @@
           <a:noFill/>
         </p:spPr>
         <p:txBody>
-          <a:bodyPr wrap="square" lIns="0" rIns="0" tIns="0" bIns="0" anchor="t">
+          <a:bodyPr wrap="square" lIns="0" tIns="0" rIns="0" bIns="0" anchor="t">
             <a:spAutoFit/>
           </a:bodyPr>
           <a:lstStyle/>
@@ -9391,6 +9400,7 @@
           <a:lstStyle/>
           <a:p>
             <a:pPr algn="ctr"/>
+            <a:endParaRPr/>
           </a:p>
         </p:txBody>
       </p:sp>
@@ -9431,7 +9441,7 @@
           </a:fontRef>
         </p:style>
         <p:txBody>
-          <a:bodyPr rtlCol="0" anchor="ctr" lIns="0" rIns="0" tIns="0" bIns="0"/>
+          <a:bodyPr lIns="0" tIns="0" rIns="0" bIns="0" rtlCol="0" anchor="ctr"/>
           <a:lstStyle/>
           <a:p>
             <a:pPr algn="ctr"/>
@@ -9464,7 +9474,7 @@
           <a:noFill/>
         </p:spPr>
         <p:txBody>
-          <a:bodyPr wrap="square" lIns="0" rIns="0" tIns="0" bIns="0" anchor="t">
+          <a:bodyPr wrap="square" lIns="0" tIns="0" rIns="0" bIns="0" anchor="t">
             <a:spAutoFit/>
           </a:bodyPr>
           <a:lstStyle/>
@@ -9499,7 +9509,7 @@
           <a:noFill/>
         </p:spPr>
         <p:txBody>
-          <a:bodyPr wrap="square" lIns="0" rIns="0" tIns="0" bIns="0" anchor="t">
+          <a:bodyPr wrap="square" lIns="0" tIns="0" rIns="0" bIns="0" anchor="t">
             <a:spAutoFit/>
           </a:bodyPr>
           <a:lstStyle/>
@@ -9558,6 +9568,7 @@
           <a:lstStyle/>
           <a:p>
             <a:pPr algn="ctr"/>
+            <a:endParaRPr/>
           </a:p>
         </p:txBody>
       </p:sp>
@@ -9598,7 +9609,7 @@
           </a:fontRef>
         </p:style>
         <p:txBody>
-          <a:bodyPr rtlCol="0" anchor="ctr" lIns="0" rIns="0" tIns="0" bIns="0"/>
+          <a:bodyPr lIns="0" tIns="0" rIns="0" bIns="0" rtlCol="0" anchor="ctr"/>
           <a:lstStyle/>
           <a:p>
             <a:pPr algn="ctr"/>
@@ -9631,7 +9642,7 @@
           <a:noFill/>
         </p:spPr>
         <p:txBody>
-          <a:bodyPr wrap="square" lIns="0" rIns="0" tIns="0" bIns="0" anchor="t">
+          <a:bodyPr wrap="square" lIns="0" tIns="0" rIns="0" bIns="0" anchor="t">
             <a:spAutoFit/>
           </a:bodyPr>
           <a:lstStyle/>
@@ -9666,7 +9677,7 @@
           <a:noFill/>
         </p:spPr>
         <p:txBody>
-          <a:bodyPr wrap="square" lIns="0" rIns="0" tIns="0" bIns="0" anchor="t">
+          <a:bodyPr wrap="square" lIns="0" tIns="0" rIns="0" bIns="0" anchor="t">
             <a:spAutoFit/>
           </a:bodyPr>
           <a:lstStyle/>
@@ -9725,6 +9736,7 @@
           <a:lstStyle/>
           <a:p>
             <a:pPr algn="ctr"/>
+            <a:endParaRPr/>
           </a:p>
         </p:txBody>
       </p:sp>
@@ -9765,7 +9777,7 @@
           </a:fontRef>
         </p:style>
         <p:txBody>
-          <a:bodyPr rtlCol="0" anchor="ctr" lIns="0" rIns="0" tIns="0" bIns="0"/>
+          <a:bodyPr lIns="0" tIns="0" rIns="0" bIns="0" rtlCol="0" anchor="ctr"/>
           <a:lstStyle/>
           <a:p>
             <a:pPr algn="ctr"/>
@@ -9798,7 +9810,7 @@
           <a:noFill/>
         </p:spPr>
         <p:txBody>
-          <a:bodyPr wrap="square" lIns="0" rIns="0" tIns="0" bIns="0" anchor="t">
+          <a:bodyPr wrap="square" lIns="0" tIns="0" rIns="0" bIns="0" anchor="t">
             <a:spAutoFit/>
           </a:bodyPr>
           <a:lstStyle/>
@@ -9833,7 +9845,7 @@
           <a:noFill/>
         </p:spPr>
         <p:txBody>
-          <a:bodyPr wrap="square" lIns="0" rIns="0" tIns="0" bIns="0" anchor="t">
+          <a:bodyPr wrap="square" lIns="0" tIns="0" rIns="0" bIns="0" anchor="t">
             <a:spAutoFit/>
           </a:bodyPr>
           <a:lstStyle/>
@@ -9892,6 +9904,7 @@
           <a:lstStyle/>
           <a:p>
             <a:pPr algn="ctr"/>
+            <a:endParaRPr/>
           </a:p>
         </p:txBody>
       </p:sp>
@@ -9932,7 +9945,7 @@
           </a:fontRef>
         </p:style>
         <p:txBody>
-          <a:bodyPr rtlCol="0" anchor="ctr" lIns="0" rIns="0" tIns="0" bIns="0"/>
+          <a:bodyPr lIns="0" tIns="0" rIns="0" bIns="0" rtlCol="0" anchor="ctr"/>
           <a:lstStyle/>
           <a:p>
             <a:pPr algn="ctr"/>
@@ -9965,7 +9978,7 @@
           <a:noFill/>
         </p:spPr>
         <p:txBody>
-          <a:bodyPr wrap="square" lIns="0" rIns="0" tIns="0" bIns="0" anchor="t">
+          <a:bodyPr wrap="square" lIns="0" tIns="0" rIns="0" bIns="0" anchor="t">
             <a:spAutoFit/>
           </a:bodyPr>
           <a:lstStyle/>
@@ -10000,7 +10013,7 @@
           <a:noFill/>
         </p:spPr>
         <p:txBody>
-          <a:bodyPr wrap="square" lIns="0" rIns="0" tIns="0" bIns="0" anchor="t">
+          <a:bodyPr wrap="square" lIns="0" tIns="0" rIns="0" bIns="0" anchor="t">
             <a:spAutoFit/>
           </a:bodyPr>
           <a:lstStyle/>
@@ -10059,6 +10072,7 @@
           <a:lstStyle/>
           <a:p>
             <a:pPr algn="ctr"/>
+            <a:endParaRPr/>
           </a:p>
         </p:txBody>
       </p:sp>
@@ -10099,7 +10113,7 @@
           </a:fontRef>
         </p:style>
         <p:txBody>
-          <a:bodyPr rtlCol="0" anchor="ctr" lIns="0" rIns="0" tIns="0" bIns="0"/>
+          <a:bodyPr lIns="0" tIns="0" rIns="0" bIns="0" rtlCol="0" anchor="ctr"/>
           <a:lstStyle/>
           <a:p>
             <a:pPr algn="ctr"/>
@@ -10132,7 +10146,7 @@
           <a:noFill/>
         </p:spPr>
         <p:txBody>
-          <a:bodyPr wrap="square" lIns="0" rIns="0" tIns="0" bIns="0" anchor="t">
+          <a:bodyPr wrap="square" lIns="0" tIns="0" rIns="0" bIns="0" anchor="t">
             <a:spAutoFit/>
           </a:bodyPr>
           <a:lstStyle/>
@@ -10167,7 +10181,7 @@
           <a:noFill/>
         </p:spPr>
         <p:txBody>
-          <a:bodyPr wrap="square" lIns="0" rIns="0" tIns="0" bIns="0" anchor="t">
+          <a:bodyPr wrap="square" lIns="0" tIns="0" rIns="0" bIns="0" anchor="t">
             <a:spAutoFit/>
           </a:bodyPr>
           <a:lstStyle/>
@@ -10226,6 +10240,7 @@
           <a:lstStyle/>
           <a:p>
             <a:pPr algn="ctr"/>
+            <a:endParaRPr/>
           </a:p>
         </p:txBody>
       </p:sp>
@@ -10266,7 +10281,7 @@
           </a:fontRef>
         </p:style>
         <p:txBody>
-          <a:bodyPr rtlCol="0" anchor="ctr" lIns="0" rIns="0" tIns="0" bIns="0"/>
+          <a:bodyPr lIns="0" tIns="0" rIns="0" bIns="0" rtlCol="0" anchor="ctr"/>
           <a:lstStyle/>
           <a:p>
             <a:pPr algn="ctr"/>
@@ -10299,7 +10314,7 @@
           <a:noFill/>
         </p:spPr>
         <p:txBody>
-          <a:bodyPr wrap="square" lIns="0" rIns="0" tIns="0" bIns="0" anchor="t">
+          <a:bodyPr wrap="square" lIns="0" tIns="0" rIns="0" bIns="0" anchor="t">
             <a:spAutoFit/>
           </a:bodyPr>
           <a:lstStyle/>
@@ -10334,7 +10349,7 @@
           <a:noFill/>
         </p:spPr>
         <p:txBody>
-          <a:bodyPr wrap="square" lIns="0" rIns="0" tIns="0" bIns="0" anchor="t">
+          <a:bodyPr wrap="square" lIns="0" tIns="0" rIns="0" bIns="0" anchor="t">
             <a:spAutoFit/>
           </a:bodyPr>
           <a:lstStyle/>
@@ -10361,7 +10376,7 @@
 </file>
 
 <file path=ppt/slides/slide3.xml><?xml version="1.0" encoding="utf-8"?>
-<p:sld xmlns:a="http://schemas.openxmlformats.org/drawingml/2006/main" xmlns:p="http://schemas.openxmlformats.org/presentationml/2006/main" xmlns:r="http://schemas.openxmlformats.org/officeDocument/2006/relationships">
+<p:sld xmlns:a="http://schemas.openxmlformats.org/drawingml/2006/main" xmlns:r="http://schemas.openxmlformats.org/officeDocument/2006/relationships" xmlns:p="http://schemas.openxmlformats.org/presentationml/2006/main">
   <p:cSld>
     <p:bg>
       <p:bgPr>
@@ -10377,7 +10392,14 @@
         <p:cNvGrpSpPr/>
         <p:nvPr/>
       </p:nvGrpSpPr>
-      <p:grpSpPr/>
+      <p:grpSpPr>
+        <a:xfrm>
+          <a:off x="0" y="0"/>
+          <a:ext cx="0" cy="0"/>
+          <a:chOff x="0" y="0"/>
+          <a:chExt cx="0" cy="0"/>
+        </a:xfrm>
+      </p:grpSpPr>
       <p:sp>
         <p:nvSpPr>
           <p:cNvPr id="2" name="TextBox 1"/>
@@ -10395,7 +10417,7 @@
           <a:noFill/>
         </p:spPr>
         <p:txBody>
-          <a:bodyPr wrap="square" lIns="0" rIns="0" tIns="0" bIns="0" anchor="t">
+          <a:bodyPr wrap="square" lIns="0" tIns="0" rIns="0" bIns="0" anchor="t">
             <a:spAutoFit/>
           </a:bodyPr>
           <a:lstStyle/>
@@ -10430,7 +10452,7 @@
           <a:noFill/>
         </p:spPr>
         <p:txBody>
-          <a:bodyPr wrap="square" lIns="0" rIns="0" tIns="0" bIns="0" anchor="t">
+          <a:bodyPr wrap="square" lIns="0" tIns="0" rIns="0" bIns="0" anchor="t">
             <a:spAutoFit/>
           </a:bodyPr>
           <a:lstStyle/>
@@ -10489,6 +10511,7 @@
           <a:lstStyle/>
           <a:p>
             <a:pPr algn="ctr"/>
+            <a:endParaRPr/>
           </a:p>
         </p:txBody>
       </p:sp>
@@ -10509,7 +10532,7 @@
           <a:noFill/>
         </p:spPr>
         <p:txBody>
-          <a:bodyPr wrap="square" lIns="0" rIns="0" tIns="0" bIns="0" anchor="t">
+          <a:bodyPr wrap="square" lIns="0" tIns="0" rIns="0" bIns="0" anchor="t">
             <a:spAutoFit/>
           </a:bodyPr>
           <a:lstStyle/>
@@ -10544,7 +10567,7 @@
           <a:noFill/>
         </p:spPr>
         <p:txBody>
-          <a:bodyPr wrap="square" lIns="0" rIns="0" tIns="0" bIns="0" anchor="t">
+          <a:bodyPr wrap="square" lIns="0" tIns="0" rIns="0" bIns="0" anchor="t">
             <a:spAutoFit/>
           </a:bodyPr>
           <a:lstStyle/>
@@ -10571,7 +10594,7 @@
           <p:nvPr/>
         </p:nvPicPr>
         <p:blipFill>
-          <a:blip r:embed="rId2"/>
+          <a:blip r:embed="rId3"/>
           <a:stretch>
             <a:fillRect/>
           </a:stretch>
@@ -10595,7 +10618,7 @@
 </file>
 
 <file path=ppt/slides/slide4.xml><?xml version="1.0" encoding="utf-8"?>
-<p:sld xmlns:a="http://schemas.openxmlformats.org/drawingml/2006/main" xmlns:p="http://schemas.openxmlformats.org/presentationml/2006/main" xmlns:r="http://schemas.openxmlformats.org/officeDocument/2006/relationships">
+<p:sld xmlns:a="http://schemas.openxmlformats.org/drawingml/2006/main" xmlns:r="http://schemas.openxmlformats.org/officeDocument/2006/relationships" xmlns:p="http://schemas.openxmlformats.org/presentationml/2006/main">
   <p:cSld>
     <p:bg>
       <p:bgPr>
@@ -10611,7 +10634,14 @@
         <p:cNvGrpSpPr/>
         <p:nvPr/>
       </p:nvGrpSpPr>
-      <p:grpSpPr/>
+      <p:grpSpPr>
+        <a:xfrm>
+          <a:off x="0" y="0"/>
+          <a:ext cx="0" cy="0"/>
+          <a:chOff x="0" y="0"/>
+          <a:chExt cx="0" cy="0"/>
+        </a:xfrm>
+      </p:grpSpPr>
       <p:sp>
         <p:nvSpPr>
           <p:cNvPr id="2" name="TextBox 1"/>
@@ -10629,7 +10659,7 @@
           <a:noFill/>
         </p:spPr>
         <p:txBody>
-          <a:bodyPr wrap="square" lIns="0" rIns="0" tIns="0" bIns="0" anchor="t">
+          <a:bodyPr wrap="square" lIns="0" tIns="0" rIns="0" bIns="0" anchor="t">
             <a:spAutoFit/>
           </a:bodyPr>
           <a:lstStyle/>
@@ -10664,7 +10694,7 @@
           <a:noFill/>
         </p:spPr>
         <p:txBody>
-          <a:bodyPr wrap="square" lIns="0" rIns="0" tIns="0" bIns="0" anchor="t">
+          <a:bodyPr wrap="square" lIns="0" tIns="0" rIns="0" bIns="0" anchor="t">
             <a:spAutoFit/>
           </a:bodyPr>
           <a:lstStyle/>
@@ -10723,6 +10753,7 @@
           <a:lstStyle/>
           <a:p>
             <a:pPr algn="ctr"/>
+            <a:endParaRPr/>
           </a:p>
         </p:txBody>
       </p:sp>
@@ -10743,7 +10774,7 @@
           <a:noFill/>
         </p:spPr>
         <p:txBody>
-          <a:bodyPr wrap="square" lIns="0" rIns="0" tIns="0" bIns="0" anchor="t">
+          <a:bodyPr wrap="square" lIns="0" tIns="0" rIns="0" bIns="0" anchor="t">
             <a:spAutoFit/>
           </a:bodyPr>
           <a:lstStyle/>
@@ -10778,7 +10809,7 @@
           <a:noFill/>
         </p:spPr>
         <p:txBody>
-          <a:bodyPr wrap="square" lIns="0" rIns="0" tIns="0" bIns="0" anchor="t">
+          <a:bodyPr wrap="square" lIns="0" tIns="0" rIns="0" bIns="0" anchor="t">
             <a:spAutoFit/>
           </a:bodyPr>
           <a:lstStyle/>
@@ -10813,7 +10844,7 @@
           <a:noFill/>
         </p:spPr>
         <p:txBody>
-          <a:bodyPr wrap="square" lIns="0" rIns="0" tIns="0" bIns="0" anchor="t">
+          <a:bodyPr wrap="square" lIns="0" tIns="0" rIns="0" bIns="0" anchor="t">
             <a:spAutoFit/>
           </a:bodyPr>
           <a:lstStyle/>
@@ -10848,7 +10879,7 @@
           <a:noFill/>
         </p:spPr>
         <p:txBody>
-          <a:bodyPr wrap="square" lIns="0" rIns="0" tIns="0" bIns="0" anchor="t">
+          <a:bodyPr wrap="square" lIns="0" tIns="0" rIns="0" bIns="0" anchor="t">
             <a:spAutoFit/>
           </a:bodyPr>
           <a:lstStyle/>
@@ -10883,7 +10914,7 @@
           <a:noFill/>
         </p:spPr>
         <p:txBody>
-          <a:bodyPr wrap="square" lIns="0" rIns="0" tIns="0" bIns="0" anchor="t">
+          <a:bodyPr wrap="square" lIns="0" tIns="0" rIns="0" bIns="0" anchor="t">
             <a:spAutoFit/>
           </a:bodyPr>
           <a:lstStyle/>
@@ -10918,7 +10949,7 @@
           <a:noFill/>
         </p:spPr>
         <p:txBody>
-          <a:bodyPr wrap="square" lIns="0" rIns="0" tIns="0" bIns="0" anchor="t">
+          <a:bodyPr wrap="square" lIns="0" tIns="0" rIns="0" bIns="0" anchor="t">
             <a:spAutoFit/>
           </a:bodyPr>
           <a:lstStyle/>
@@ -10953,7 +10984,7 @@
           <a:noFill/>
         </p:spPr>
         <p:txBody>
-          <a:bodyPr wrap="square" lIns="0" rIns="0" tIns="0" bIns="0" anchor="t">
+          <a:bodyPr wrap="square" lIns="0" tIns="0" rIns="0" bIns="0" anchor="t">
             <a:spAutoFit/>
           </a:bodyPr>
           <a:lstStyle/>
@@ -10988,7 +11019,7 @@
           <a:noFill/>
         </p:spPr>
         <p:txBody>
-          <a:bodyPr wrap="square" lIns="0" rIns="0" tIns="0" bIns="0" anchor="t">
+          <a:bodyPr wrap="square" lIns="0" tIns="0" rIns="0" bIns="0" anchor="t">
             <a:spAutoFit/>
           </a:bodyPr>
           <a:lstStyle/>
@@ -11023,7 +11054,7 @@
           <a:noFill/>
         </p:spPr>
         <p:txBody>
-          <a:bodyPr wrap="square" lIns="0" rIns="0" tIns="0" bIns="0" anchor="t">
+          <a:bodyPr wrap="square" lIns="0" tIns="0" rIns="0" bIns="0" anchor="t">
             <a:spAutoFit/>
           </a:bodyPr>
           <a:lstStyle/>
@@ -11058,7 +11089,7 @@
           <a:noFill/>
         </p:spPr>
         <p:txBody>
-          <a:bodyPr wrap="square" lIns="0" rIns="0" tIns="0" bIns="0" anchor="t">
+          <a:bodyPr wrap="square" lIns="0" tIns="0" rIns="0" bIns="0" anchor="t">
             <a:spAutoFit/>
           </a:bodyPr>
           <a:lstStyle/>
@@ -11093,7 +11124,7 @@
           <a:noFill/>
         </p:spPr>
         <p:txBody>
-          <a:bodyPr wrap="square" lIns="0" rIns="0" tIns="0" bIns="0">
+          <a:bodyPr wrap="square" lIns="0" tIns="0" rIns="0" bIns="0">
             <a:spAutoFit/>
           </a:bodyPr>
           <a:lstStyle/>
@@ -11210,7 +11241,7 @@
           <p:nvPr/>
         </p:nvPicPr>
         <p:blipFill>
-          <a:blip r:embed="rId2"/>
+          <a:blip r:embed="rId3"/>
           <a:stretch>
             <a:fillRect/>
           </a:stretch>
@@ -11239,7 +11270,7 @@
 </file>
 
 <file path=ppt/slides/slide5.xml><?xml version="1.0" encoding="utf-8"?>
-<p:sld xmlns:a="http://schemas.openxmlformats.org/drawingml/2006/main" xmlns:p="http://schemas.openxmlformats.org/presentationml/2006/main" xmlns:r="http://schemas.openxmlformats.org/officeDocument/2006/relationships">
+<p:sld xmlns:a="http://schemas.openxmlformats.org/drawingml/2006/main" xmlns:r="http://schemas.openxmlformats.org/officeDocument/2006/relationships" xmlns:p="http://schemas.openxmlformats.org/presentationml/2006/main">
   <p:cSld>
     <p:bg>
       <p:bgPr>
@@ -11255,7 +11286,14 @@
         <p:cNvGrpSpPr/>
         <p:nvPr/>
       </p:nvGrpSpPr>
-      <p:grpSpPr/>
+      <p:grpSpPr>
+        <a:xfrm>
+          <a:off x="0" y="0"/>
+          <a:ext cx="0" cy="0"/>
+          <a:chOff x="0" y="0"/>
+          <a:chExt cx="0" cy="0"/>
+        </a:xfrm>
+      </p:grpSpPr>
       <p:sp>
         <p:nvSpPr>
           <p:cNvPr id="2" name="TextBox 1"/>
@@ -11273,7 +11311,7 @@
           <a:noFill/>
         </p:spPr>
         <p:txBody>
-          <a:bodyPr wrap="square" lIns="0" rIns="0" tIns="0" bIns="0" anchor="t">
+          <a:bodyPr wrap="square" lIns="0" tIns="0" rIns="0" bIns="0" anchor="t">
             <a:spAutoFit/>
           </a:bodyPr>
           <a:lstStyle/>
@@ -11308,7 +11346,7 @@
           <a:noFill/>
         </p:spPr>
         <p:txBody>
-          <a:bodyPr wrap="square" lIns="0" rIns="0" tIns="0" bIns="0" anchor="t">
+          <a:bodyPr wrap="square" lIns="0" tIns="0" rIns="0" bIns="0" anchor="t">
             <a:spAutoFit/>
           </a:bodyPr>
           <a:lstStyle/>
@@ -11367,6 +11405,7 @@
           <a:lstStyle/>
           <a:p>
             <a:pPr algn="ctr"/>
+            <a:endParaRPr/>
           </a:p>
         </p:txBody>
       </p:sp>
@@ -11387,7 +11426,7 @@
           <a:noFill/>
         </p:spPr>
         <p:txBody>
-          <a:bodyPr wrap="square" lIns="0" rIns="0" tIns="0" bIns="0" anchor="t">
+          <a:bodyPr wrap="square" lIns="0" tIns="0" rIns="0" bIns="0" anchor="t">
             <a:spAutoFit/>
           </a:bodyPr>
           <a:lstStyle/>
@@ -11422,7 +11461,7 @@
           <a:noFill/>
         </p:spPr>
         <p:txBody>
-          <a:bodyPr wrap="square" lIns="0" rIns="0" tIns="0" bIns="0" anchor="t">
+          <a:bodyPr wrap="square" lIns="0" tIns="0" rIns="0" bIns="0" anchor="t">
             <a:spAutoFit/>
           </a:bodyPr>
           <a:lstStyle/>
@@ -11449,7 +11488,7 @@
           <p:nvPr/>
         </p:nvPicPr>
         <p:blipFill>
-          <a:blip r:embed="rId2"/>
+          <a:blip r:embed="rId3"/>
           <a:stretch>
             <a:fillRect/>
           </a:stretch>
@@ -11478,7 +11517,7 @@
           <p:nvPr/>
         </p:nvPicPr>
         <p:blipFill>
-          <a:blip r:embed="rId3"/>
+          <a:blip r:embed="rId4"/>
           <a:stretch>
             <a:fillRect/>
           </a:stretch>
@@ -11515,7 +11554,7 @@
           <a:noFill/>
         </p:spPr>
         <p:txBody>
-          <a:bodyPr wrap="square" lIns="0" rIns="0" tIns="0" bIns="0">
+          <a:bodyPr wrap="square" lIns="0" tIns="0" rIns="0" bIns="0">
             <a:spAutoFit/>
           </a:bodyPr>
           <a:lstStyle/>
@@ -11632,7 +11671,7 @@
 </file>
 
 <file path=ppt/slides/slide6.xml><?xml version="1.0" encoding="utf-8"?>
-<p:sld xmlns:a="http://schemas.openxmlformats.org/drawingml/2006/main" xmlns:p="http://schemas.openxmlformats.org/presentationml/2006/main" xmlns:r="http://schemas.openxmlformats.org/officeDocument/2006/relationships">
+<p:sld xmlns:a="http://schemas.openxmlformats.org/drawingml/2006/main" xmlns:r="http://schemas.openxmlformats.org/officeDocument/2006/relationships" xmlns:p="http://schemas.openxmlformats.org/presentationml/2006/main">
   <p:cSld>
     <p:bg>
       <p:bgPr>
@@ -11648,7 +11687,14 @@
         <p:cNvGrpSpPr/>
         <p:nvPr/>
       </p:nvGrpSpPr>
-      <p:grpSpPr/>
+      <p:grpSpPr>
+        <a:xfrm>
+          <a:off x="0" y="0"/>
+          <a:ext cx="0" cy="0"/>
+          <a:chOff x="0" y="0"/>
+          <a:chExt cx="0" cy="0"/>
+        </a:xfrm>
+      </p:grpSpPr>
       <p:sp>
         <p:nvSpPr>
           <p:cNvPr id="2" name="TextBox 1"/>
@@ -11666,7 +11712,7 @@
           <a:noFill/>
         </p:spPr>
         <p:txBody>
-          <a:bodyPr wrap="square" lIns="0" rIns="0" tIns="0" bIns="0" anchor="t">
+          <a:bodyPr wrap="square" lIns="0" tIns="0" rIns="0" bIns="0" anchor="t">
             <a:spAutoFit/>
           </a:bodyPr>
           <a:lstStyle/>
@@ -11701,7 +11747,7 @@
           <a:noFill/>
         </p:spPr>
         <p:txBody>
-          <a:bodyPr wrap="square" lIns="0" rIns="0" tIns="0" bIns="0" anchor="t">
+          <a:bodyPr wrap="square" lIns="0" tIns="0" rIns="0" bIns="0" anchor="t">
             <a:spAutoFit/>
           </a:bodyPr>
           <a:lstStyle/>
@@ -11760,6 +11806,7 @@
           <a:lstStyle/>
           <a:p>
             <a:pPr algn="ctr"/>
+            <a:endParaRPr/>
           </a:p>
         </p:txBody>
       </p:sp>
@@ -11780,7 +11827,7 @@
           <a:noFill/>
         </p:spPr>
         <p:txBody>
-          <a:bodyPr wrap="square" lIns="0" rIns="0" tIns="0" bIns="0" anchor="t">
+          <a:bodyPr wrap="square" lIns="0" tIns="0" rIns="0" bIns="0" anchor="t">
             <a:spAutoFit/>
           </a:bodyPr>
           <a:lstStyle/>
@@ -11815,7 +11862,7 @@
           <a:noFill/>
         </p:spPr>
         <p:txBody>
-          <a:bodyPr wrap="square" lIns="0" rIns="0" tIns="0" bIns="0" anchor="t">
+          <a:bodyPr wrap="square" lIns="0" tIns="0" rIns="0" bIns="0" anchor="t">
             <a:spAutoFit/>
           </a:bodyPr>
           <a:lstStyle/>
@@ -11874,6 +11921,7 @@
           <a:lstStyle/>
           <a:p>
             <a:pPr algn="ctr"/>
+            <a:endParaRPr/>
           </a:p>
         </p:txBody>
       </p:sp>
@@ -11894,7 +11942,7 @@
           <a:noFill/>
         </p:spPr>
         <p:txBody>
-          <a:bodyPr wrap="square" lIns="0" rIns="0" tIns="0" bIns="0" anchor="t">
+          <a:bodyPr wrap="square" lIns="0" tIns="0" rIns="0" bIns="0" anchor="t">
             <a:spAutoFit/>
           </a:bodyPr>
           <a:lstStyle/>
@@ -11929,7 +11977,7 @@
           <a:noFill/>
         </p:spPr>
         <p:txBody>
-          <a:bodyPr wrap="square" lIns="0" rIns="0" tIns="0" bIns="0" anchor="t">
+          <a:bodyPr wrap="square" lIns="0" tIns="0" rIns="0" bIns="0" anchor="t">
             <a:spAutoFit/>
           </a:bodyPr>
           <a:lstStyle/>
@@ -11964,7 +12012,7 @@
           <a:noFill/>
         </p:spPr>
         <p:txBody>
-          <a:bodyPr wrap="square" lIns="0" rIns="0" tIns="0" bIns="0" anchor="t">
+          <a:bodyPr wrap="square" lIns="0" tIns="0" rIns="0" bIns="0" anchor="t">
             <a:spAutoFit/>
           </a:bodyPr>
           <a:lstStyle/>
@@ -12023,6 +12071,7 @@
           <a:lstStyle/>
           <a:p>
             <a:pPr algn="ctr"/>
+            <a:endParaRPr/>
           </a:p>
         </p:txBody>
       </p:sp>
@@ -12043,7 +12092,7 @@
           <a:noFill/>
         </p:spPr>
         <p:txBody>
-          <a:bodyPr wrap="square" lIns="0" rIns="0" tIns="0" bIns="0" anchor="t">
+          <a:bodyPr wrap="square" lIns="0" tIns="0" rIns="0" bIns="0" anchor="t">
             <a:spAutoFit/>
           </a:bodyPr>
           <a:lstStyle/>
@@ -12078,7 +12127,7 @@
           <a:noFill/>
         </p:spPr>
         <p:txBody>
-          <a:bodyPr wrap="square" lIns="0" rIns="0" tIns="0" bIns="0" anchor="t">
+          <a:bodyPr wrap="square" lIns="0" tIns="0" rIns="0" bIns="0" anchor="t">
             <a:spAutoFit/>
           </a:bodyPr>
           <a:lstStyle/>
@@ -12113,7 +12162,7 @@
           <a:noFill/>
         </p:spPr>
         <p:txBody>
-          <a:bodyPr wrap="square" lIns="0" rIns="0" tIns="0" bIns="0" anchor="t">
+          <a:bodyPr wrap="square" lIns="0" tIns="0" rIns="0" bIns="0" anchor="t">
             <a:spAutoFit/>
           </a:bodyPr>
           <a:lstStyle/>
@@ -12172,6 +12221,7 @@
           <a:lstStyle/>
           <a:p>
             <a:pPr algn="ctr"/>
+            <a:endParaRPr/>
           </a:p>
         </p:txBody>
       </p:sp>
@@ -12192,7 +12242,7 @@
           <a:noFill/>
         </p:spPr>
         <p:txBody>
-          <a:bodyPr wrap="square" lIns="0" rIns="0" tIns="0" bIns="0" anchor="t">
+          <a:bodyPr wrap="square" lIns="0" tIns="0" rIns="0" bIns="0" anchor="t">
             <a:spAutoFit/>
           </a:bodyPr>
           <a:lstStyle/>
@@ -12227,7 +12277,7 @@
           <a:noFill/>
         </p:spPr>
         <p:txBody>
-          <a:bodyPr wrap="square" lIns="0" rIns="0" tIns="0" bIns="0" anchor="t">
+          <a:bodyPr wrap="square" lIns="0" tIns="0" rIns="0" bIns="0" anchor="t">
             <a:spAutoFit/>
           </a:bodyPr>
           <a:lstStyle/>
@@ -12262,7 +12312,7 @@
           <a:noFill/>
         </p:spPr>
         <p:txBody>
-          <a:bodyPr wrap="square" lIns="0" rIns="0" tIns="0" bIns="0" anchor="t">
+          <a:bodyPr wrap="square" lIns="0" tIns="0" rIns="0" bIns="0" anchor="t">
             <a:spAutoFit/>
           </a:bodyPr>
           <a:lstStyle/>
@@ -12321,6 +12371,7 @@
           <a:lstStyle/>
           <a:p>
             <a:pPr algn="ctr"/>
+            <a:endParaRPr/>
           </a:p>
         </p:txBody>
       </p:sp>
@@ -12341,7 +12392,7 @@
           <a:noFill/>
         </p:spPr>
         <p:txBody>
-          <a:bodyPr wrap="square" lIns="0" rIns="0" tIns="0" bIns="0" anchor="t">
+          <a:bodyPr wrap="square" lIns="0" tIns="0" rIns="0" bIns="0" anchor="t">
             <a:spAutoFit/>
           </a:bodyPr>
           <a:lstStyle/>
@@ -12376,7 +12427,7 @@
           <a:noFill/>
         </p:spPr>
         <p:txBody>
-          <a:bodyPr wrap="square" lIns="0" rIns="0" tIns="0" bIns="0" anchor="t">
+          <a:bodyPr wrap="square" lIns="0" tIns="0" rIns="0" bIns="0" anchor="t">
             <a:spAutoFit/>
           </a:bodyPr>
           <a:lstStyle/>
@@ -12411,7 +12462,7 @@
           <a:noFill/>
         </p:spPr>
         <p:txBody>
-          <a:bodyPr wrap="square" lIns="0" rIns="0" tIns="0" bIns="0">
+          <a:bodyPr wrap="square" lIns="0" tIns="0" rIns="0" bIns="0">
             <a:spAutoFit/>
           </a:bodyPr>
           <a:lstStyle/>
@@ -12562,7 +12613,7 @@
           <p:nvPr/>
         </p:nvPicPr>
         <p:blipFill>
-          <a:blip r:embed="rId2"/>
+          <a:blip r:embed="rId3"/>
           <a:stretch>
             <a:fillRect/>
           </a:stretch>
@@ -12591,7 +12642,7 @@
 </file>
 
 <file path=ppt/slides/slide7.xml><?xml version="1.0" encoding="utf-8"?>
-<p:sld xmlns:a="http://schemas.openxmlformats.org/drawingml/2006/main" xmlns:p="http://schemas.openxmlformats.org/presentationml/2006/main" xmlns:r="http://schemas.openxmlformats.org/officeDocument/2006/relationships">
+<p:sld xmlns:a="http://schemas.openxmlformats.org/drawingml/2006/main" xmlns:r="http://schemas.openxmlformats.org/officeDocument/2006/relationships" xmlns:p="http://schemas.openxmlformats.org/presentationml/2006/main">
   <p:cSld>
     <p:bg>
       <p:bgPr>
@@ -12607,7 +12658,14 @@
         <p:cNvGrpSpPr/>
         <p:nvPr/>
       </p:nvGrpSpPr>
-      <p:grpSpPr/>
+      <p:grpSpPr>
+        <a:xfrm>
+          <a:off x="0" y="0"/>
+          <a:ext cx="0" cy="0"/>
+          <a:chOff x="0" y="0"/>
+          <a:chExt cx="0" cy="0"/>
+        </a:xfrm>
+      </p:grpSpPr>
       <p:sp>
         <p:nvSpPr>
           <p:cNvPr id="2" name="TextBox 1"/>
@@ -12625,7 +12683,7 @@
           <a:noFill/>
         </p:spPr>
         <p:txBody>
-          <a:bodyPr wrap="square" lIns="0" rIns="0" tIns="0" bIns="0" anchor="t">
+          <a:bodyPr wrap="square" lIns="0" tIns="0" rIns="0" bIns="0" anchor="t">
             <a:spAutoFit/>
           </a:bodyPr>
           <a:lstStyle/>
@@ -12660,7 +12718,7 @@
           <a:noFill/>
         </p:spPr>
         <p:txBody>
-          <a:bodyPr wrap="square" lIns="0" rIns="0" tIns="0" bIns="0" anchor="t">
+          <a:bodyPr wrap="square" lIns="0" tIns="0" rIns="0" bIns="0" anchor="t">
             <a:spAutoFit/>
           </a:bodyPr>
           <a:lstStyle/>
@@ -12719,6 +12777,7 @@
           <a:lstStyle/>
           <a:p>
             <a:pPr algn="ctr"/>
+            <a:endParaRPr/>
           </a:p>
         </p:txBody>
       </p:sp>
@@ -12739,7 +12798,7 @@
           <a:noFill/>
         </p:spPr>
         <p:txBody>
-          <a:bodyPr wrap="square" lIns="0" rIns="0" tIns="0" bIns="0" anchor="t">
+          <a:bodyPr wrap="square" lIns="0" tIns="0" rIns="0" bIns="0" anchor="t">
             <a:spAutoFit/>
           </a:bodyPr>
           <a:lstStyle/>
@@ -12774,7 +12833,7 @@
           <a:noFill/>
         </p:spPr>
         <p:txBody>
-          <a:bodyPr wrap="square" lIns="0" rIns="0" tIns="0" bIns="0" anchor="t">
+          <a:bodyPr wrap="square" lIns="0" tIns="0" rIns="0" bIns="0" anchor="t">
             <a:spAutoFit/>
           </a:bodyPr>
           <a:lstStyle/>
@@ -12806,7 +12865,7 @@
         </p:xfrm>
         <a:graphic>
           <a:graphicData uri="http://schemas.openxmlformats.org/drawingml/2006/chart">
-            <c:chart xmlns:c="http://schemas.openxmlformats.org/drawingml/2006/chart" r:id="rId2"/>
+            <c:chart xmlns:c="http://schemas.openxmlformats.org/drawingml/2006/chart" xmlns:r="http://schemas.openxmlformats.org/officeDocument/2006/relationships" r:id="rId3"/>
           </a:graphicData>
         </a:graphic>
       </p:graphicFrame>
@@ -12851,6 +12910,7 @@
           <a:lstStyle/>
           <a:p>
             <a:pPr algn="ctr"/>
+            <a:endParaRPr/>
           </a:p>
         </p:txBody>
       </p:sp>
@@ -12871,7 +12931,7 @@
           <a:noFill/>
         </p:spPr>
         <p:txBody>
-          <a:bodyPr wrap="square" lIns="0" rIns="0" tIns="0" bIns="0" anchor="t">
+          <a:bodyPr wrap="square" lIns="0" tIns="0" rIns="0" bIns="0" anchor="t">
             <a:spAutoFit/>
           </a:bodyPr>
           <a:lstStyle/>
@@ -12906,7 +12966,7 @@
           <a:noFill/>
         </p:spPr>
         <p:txBody>
-          <a:bodyPr wrap="square" lIns="0" rIns="0" tIns="0" bIns="0" anchor="t">
+          <a:bodyPr wrap="square" lIns="0" tIns="0" rIns="0" bIns="0" anchor="t">
             <a:spAutoFit/>
           </a:bodyPr>
           <a:lstStyle/>
@@ -12941,7 +13001,7 @@
           <a:noFill/>
         </p:spPr>
         <p:txBody>
-          <a:bodyPr wrap="square" lIns="0" rIns="0" tIns="0" bIns="0" anchor="t">
+          <a:bodyPr wrap="square" lIns="0" tIns="0" rIns="0" bIns="0" anchor="t">
             <a:spAutoFit/>
           </a:bodyPr>
           <a:lstStyle/>
@@ -12976,7 +13036,7 @@
           <a:noFill/>
         </p:spPr>
         <p:txBody>
-          <a:bodyPr wrap="square" lIns="0" rIns="0" tIns="0" bIns="0" anchor="t">
+          <a:bodyPr wrap="square" lIns="0" tIns="0" rIns="0" bIns="0" anchor="t">
             <a:spAutoFit/>
           </a:bodyPr>
           <a:lstStyle/>
@@ -13011,7 +13071,7 @@
           <a:noFill/>
         </p:spPr>
         <p:txBody>
-          <a:bodyPr wrap="square" lIns="0" rIns="0" tIns="0" bIns="0" anchor="t">
+          <a:bodyPr wrap="square" lIns="0" tIns="0" rIns="0" bIns="0" anchor="t">
             <a:spAutoFit/>
           </a:bodyPr>
           <a:lstStyle/>
@@ -13046,7 +13106,7 @@
           <a:noFill/>
         </p:spPr>
         <p:txBody>
-          <a:bodyPr wrap="square" lIns="0" rIns="0" tIns="0" bIns="0" anchor="t">
+          <a:bodyPr wrap="square" lIns="0" tIns="0" rIns="0" bIns="0" anchor="t">
             <a:spAutoFit/>
           </a:bodyPr>
           <a:lstStyle/>
@@ -13081,7 +13141,7 @@
           <a:noFill/>
         </p:spPr>
         <p:txBody>
-          <a:bodyPr wrap="square" lIns="0" rIns="0" tIns="0" bIns="0" anchor="t">
+          <a:bodyPr wrap="square" lIns="0" tIns="0" rIns="0" bIns="0" anchor="t">
             <a:spAutoFit/>
           </a:bodyPr>
           <a:lstStyle/>
@@ -13108,7 +13168,7 @@
 </file>
 
 <file path=ppt/slides/slide8.xml><?xml version="1.0" encoding="utf-8"?>
-<p:sld xmlns:a="http://schemas.openxmlformats.org/drawingml/2006/main" xmlns:p="http://schemas.openxmlformats.org/presentationml/2006/main" xmlns:r="http://schemas.openxmlformats.org/officeDocument/2006/relationships">
+<p:sld xmlns:a="http://schemas.openxmlformats.org/drawingml/2006/main" xmlns:r="http://schemas.openxmlformats.org/officeDocument/2006/relationships" xmlns:p="http://schemas.openxmlformats.org/presentationml/2006/main">
   <p:cSld>
     <p:bg>
       <p:bgPr>
@@ -13124,7 +13184,14 @@
         <p:cNvGrpSpPr/>
         <p:nvPr/>
       </p:nvGrpSpPr>
-      <p:grpSpPr/>
+      <p:grpSpPr>
+        <a:xfrm>
+          <a:off x="0" y="0"/>
+          <a:ext cx="0" cy="0"/>
+          <a:chOff x="0" y="0"/>
+          <a:chExt cx="0" cy="0"/>
+        </a:xfrm>
+      </p:grpSpPr>
       <p:sp>
         <p:nvSpPr>
           <p:cNvPr id="2" name="TextBox 1"/>
@@ -13142,7 +13209,7 @@
           <a:noFill/>
         </p:spPr>
         <p:txBody>
-          <a:bodyPr wrap="square" lIns="0" rIns="0" tIns="0" bIns="0" anchor="t">
+          <a:bodyPr wrap="square" lIns="0" tIns="0" rIns="0" bIns="0" anchor="t">
             <a:spAutoFit/>
           </a:bodyPr>
           <a:lstStyle/>
@@ -13177,7 +13244,7 @@
           <a:noFill/>
         </p:spPr>
         <p:txBody>
-          <a:bodyPr wrap="square" lIns="0" rIns="0" tIns="0" bIns="0" anchor="t">
+          <a:bodyPr wrap="square" lIns="0" tIns="0" rIns="0" bIns="0" anchor="t">
             <a:spAutoFit/>
           </a:bodyPr>
           <a:lstStyle/>
@@ -13236,6 +13303,7 @@
           <a:lstStyle/>
           <a:p>
             <a:pPr algn="ctr"/>
+            <a:endParaRPr/>
           </a:p>
         </p:txBody>
       </p:sp>
@@ -13256,7 +13324,7 @@
           <a:noFill/>
         </p:spPr>
         <p:txBody>
-          <a:bodyPr wrap="square" lIns="0" rIns="0" tIns="0" bIns="0" anchor="t">
+          <a:bodyPr wrap="square" lIns="0" tIns="0" rIns="0" bIns="0" anchor="t">
             <a:spAutoFit/>
           </a:bodyPr>
           <a:lstStyle/>
@@ -13291,7 +13359,7 @@
           <a:noFill/>
         </p:spPr>
         <p:txBody>
-          <a:bodyPr wrap="square" lIns="0" rIns="0" tIns="0" bIns="0" anchor="t">
+          <a:bodyPr wrap="square" lIns="0" tIns="0" rIns="0" bIns="0" anchor="t">
             <a:spAutoFit/>
           </a:bodyPr>
           <a:lstStyle/>
@@ -13318,7 +13386,7 @@
           <p:nvPr/>
         </p:nvPicPr>
         <p:blipFill>
-          <a:blip r:embed="rId2"/>
+          <a:blip r:embed="rId3"/>
           <a:stretch>
             <a:fillRect/>
           </a:stretch>
@@ -13355,7 +13423,7 @@
           <a:noFill/>
         </p:spPr>
         <p:txBody>
-          <a:bodyPr wrap="square" lIns="0" rIns="0" tIns="0" bIns="0" anchor="t">
+          <a:bodyPr wrap="square" lIns="0" tIns="0" rIns="0" bIns="0" anchor="t">
             <a:spAutoFit/>
           </a:bodyPr>
           <a:lstStyle/>
@@ -13390,7 +13458,7 @@
           <a:noFill/>
         </p:spPr>
         <p:txBody>
-          <a:bodyPr wrap="square" lIns="0" rIns="0" tIns="0" bIns="0" anchor="t">
+          <a:bodyPr wrap="square" lIns="0" tIns="0" rIns="0" bIns="0" anchor="t">
             <a:spAutoFit/>
           </a:bodyPr>
           <a:lstStyle/>
@@ -13425,7 +13493,7 @@
           <a:noFill/>
         </p:spPr>
         <p:txBody>
-          <a:bodyPr wrap="square" lIns="0" rIns="0" tIns="0" bIns="0" anchor="t">
+          <a:bodyPr wrap="square" lIns="0" tIns="0" rIns="0" bIns="0" anchor="t">
             <a:spAutoFit/>
           </a:bodyPr>
           <a:lstStyle/>
@@ -13460,7 +13528,7 @@
           <a:noFill/>
         </p:spPr>
         <p:txBody>
-          <a:bodyPr wrap="square" lIns="0" rIns="0" tIns="0" bIns="0" anchor="t">
+          <a:bodyPr wrap="square" lIns="0" tIns="0" rIns="0" bIns="0" anchor="t">
             <a:spAutoFit/>
           </a:bodyPr>
           <a:lstStyle/>
@@ -13495,7 +13563,7 @@
           <a:noFill/>
         </p:spPr>
         <p:txBody>
-          <a:bodyPr wrap="square" lIns="0" rIns="0" tIns="0" bIns="0" anchor="t">
+          <a:bodyPr wrap="square" lIns="0" tIns="0" rIns="0" bIns="0" anchor="t">
             <a:spAutoFit/>
           </a:bodyPr>
           <a:lstStyle/>
@@ -13530,7 +13598,7 @@
           <a:noFill/>
         </p:spPr>
         <p:txBody>
-          <a:bodyPr wrap="square" lIns="0" rIns="0" tIns="0" bIns="0" anchor="t">
+          <a:bodyPr wrap="square" lIns="0" tIns="0" rIns="0" bIns="0" anchor="t">
             <a:spAutoFit/>
           </a:bodyPr>
           <a:lstStyle/>
@@ -13565,7 +13633,7 @@
           <a:noFill/>
         </p:spPr>
         <p:txBody>
-          <a:bodyPr wrap="square" lIns="0" rIns="0" tIns="0" bIns="0" anchor="t">
+          <a:bodyPr wrap="square" lIns="0" tIns="0" rIns="0" bIns="0" anchor="t">
             <a:spAutoFit/>
           </a:bodyPr>
           <a:lstStyle/>
@@ -13600,7 +13668,7 @@
           <a:noFill/>
         </p:spPr>
         <p:txBody>
-          <a:bodyPr wrap="square" lIns="0" rIns="0" tIns="0" bIns="0" anchor="t">
+          <a:bodyPr wrap="square" lIns="0" tIns="0" rIns="0" bIns="0" anchor="t">
             <a:spAutoFit/>
           </a:bodyPr>
           <a:lstStyle/>
@@ -13627,7 +13695,7 @@
 </file>
 
 <file path=ppt/slides/slide9.xml><?xml version="1.0" encoding="utf-8"?>
-<p:sld xmlns:a="http://schemas.openxmlformats.org/drawingml/2006/main" xmlns:p="http://schemas.openxmlformats.org/presentationml/2006/main" xmlns:r="http://schemas.openxmlformats.org/officeDocument/2006/relationships">
+<p:sld xmlns:a="http://schemas.openxmlformats.org/drawingml/2006/main" xmlns:r="http://schemas.openxmlformats.org/officeDocument/2006/relationships" xmlns:p="http://schemas.openxmlformats.org/presentationml/2006/main">
   <p:cSld>
     <p:bg>
       <p:bgPr>
@@ -13643,7 +13711,14 @@
         <p:cNvGrpSpPr/>
         <p:nvPr/>
       </p:nvGrpSpPr>
-      <p:grpSpPr/>
+      <p:grpSpPr>
+        <a:xfrm>
+          <a:off x="0" y="0"/>
+          <a:ext cx="0" cy="0"/>
+          <a:chOff x="0" y="0"/>
+          <a:chExt cx="0" cy="0"/>
+        </a:xfrm>
+      </p:grpSpPr>
       <p:sp>
         <p:nvSpPr>
           <p:cNvPr id="2" name="TextBox 1"/>
@@ -13661,7 +13736,7 @@
           <a:noFill/>
         </p:spPr>
         <p:txBody>
-          <a:bodyPr wrap="square" lIns="0" rIns="0" tIns="0" bIns="0" anchor="t">
+          <a:bodyPr wrap="square" lIns="0" tIns="0" rIns="0" bIns="0" anchor="t">
             <a:spAutoFit/>
           </a:bodyPr>
           <a:lstStyle/>
@@ -13696,7 +13771,7 @@
           <a:noFill/>
         </p:spPr>
         <p:txBody>
-          <a:bodyPr wrap="square" lIns="0" rIns="0" tIns="0" bIns="0" anchor="t">
+          <a:bodyPr wrap="square" lIns="0" tIns="0" rIns="0" bIns="0" anchor="t">
             <a:spAutoFit/>
           </a:bodyPr>
           <a:lstStyle/>
@@ -13755,6 +13830,7 @@
           <a:lstStyle/>
           <a:p>
             <a:pPr algn="ctr"/>
+            <a:endParaRPr/>
           </a:p>
         </p:txBody>
       </p:sp>
@@ -13775,7 +13851,7 @@
           <a:noFill/>
         </p:spPr>
         <p:txBody>
-          <a:bodyPr wrap="square" lIns="0" rIns="0" tIns="0" bIns="0" anchor="t">
+          <a:bodyPr wrap="square" lIns="0" tIns="0" rIns="0" bIns="0" anchor="t">
             <a:spAutoFit/>
           </a:bodyPr>
           <a:lstStyle/>
@@ -13810,7 +13886,7 @@
           <a:noFill/>
         </p:spPr>
         <p:txBody>
-          <a:bodyPr wrap="square" lIns="0" rIns="0" tIns="0" bIns="0" anchor="t">
+          <a:bodyPr wrap="square" lIns="0" tIns="0" rIns="0" bIns="0" anchor="t">
             <a:spAutoFit/>
           </a:bodyPr>
           <a:lstStyle/>
@@ -13831,70 +13907,6 @@
       <p:pic>
         <p:nvPicPr>
           <p:cNvPr id="7" name="Picture 6" descr="01_mlflow_experiments.png"/>
-          <p:cNvPicPr>
-            <a:picLocks noChangeAspect="1"/>
-          </p:cNvPicPr>
-          <p:nvPr/>
-        </p:nvPicPr>
-        <p:blipFill>
-          <a:blip r:embed="rId2"/>
-          <a:stretch>
-            <a:fillRect/>
-          </a:stretch>
-        </p:blipFill>
-        <p:spPr>
-          <a:xfrm>
-            <a:off x="548640" y="1402572"/>
-            <a:ext cx="5486400" cy="3229896"/>
-          </a:xfrm>
-          <a:prstGeom prst="rect">
-            <a:avLst/>
-          </a:prstGeom>
-          <a:ln w="9525">
-            <a:solidFill>
-              <a:srgbClr val="D9DCE1"/>
-            </a:solidFill>
-          </a:ln>
-        </p:spPr>
-      </p:pic>
-      <p:sp>
-        <p:nvSpPr>
-          <p:cNvPr id="8" name="TextBox 7"/>
-          <p:cNvSpPr txBox="1"/>
-          <p:nvPr/>
-        </p:nvSpPr>
-        <p:spPr>
-          <a:xfrm>
-            <a:off x="548640" y="4709160"/>
-            <a:ext cx="5486400" cy="274320"/>
-          </a:xfrm>
-          <a:prstGeom prst="rect">
-            <a:avLst/>
-          </a:prstGeom>
-          <a:noFill/>
-        </p:spPr>
-        <p:txBody>
-          <a:bodyPr wrap="square" lIns="0" rIns="0" tIns="0" bIns="0" anchor="t">
-            <a:spAutoFit/>
-          </a:bodyPr>
-          <a:lstStyle/>
-          <a:p>
-            <a:pPr algn="ctr"/>
-            <a:r>
-              <a:rPr sz="1100" b="0">
-                <a:solidFill>
-                  <a:srgbClr val="6B7280"/>
-                </a:solidFill>
-                <a:latin typeface="Calibri"/>
-              </a:rPr>
-              <a:t>Parent + nested runs</a:t>
-            </a:r>
-          </a:p>
-        </p:txBody>
-      </p:sp>
-      <p:pic>
-        <p:nvPicPr>
-          <p:cNvPr id="9" name="Picture 8" descr="02_mlflow_run_compare.png"/>
           <p:cNvPicPr>
             <a:picLocks noChangeAspect="1"/>
           </p:cNvPicPr>
@@ -13908,7 +13920,7 @@
         </p:blipFill>
         <p:spPr>
           <a:xfrm>
-            <a:off x="6172200" y="1402572"/>
+            <a:off x="548640" y="1402572"/>
             <a:ext cx="5486400" cy="3229896"/>
           </a:xfrm>
           <a:prstGeom prst="rect">
@@ -13923,6 +13935,70 @@
       </p:pic>
       <p:sp>
         <p:nvSpPr>
+          <p:cNvPr id="8" name="TextBox 7"/>
+          <p:cNvSpPr txBox="1"/>
+          <p:nvPr/>
+        </p:nvSpPr>
+        <p:spPr>
+          <a:xfrm>
+            <a:off x="548640" y="4709160"/>
+            <a:ext cx="5486400" cy="274320"/>
+          </a:xfrm>
+          <a:prstGeom prst="rect">
+            <a:avLst/>
+          </a:prstGeom>
+          <a:noFill/>
+        </p:spPr>
+        <p:txBody>
+          <a:bodyPr wrap="square" lIns="0" tIns="0" rIns="0" bIns="0" anchor="t">
+            <a:spAutoFit/>
+          </a:bodyPr>
+          <a:lstStyle/>
+          <a:p>
+            <a:pPr algn="ctr"/>
+            <a:r>
+              <a:rPr sz="1100" b="0">
+                <a:solidFill>
+                  <a:srgbClr val="6B7280"/>
+                </a:solidFill>
+                <a:latin typeface="Calibri"/>
+              </a:rPr>
+              <a:t>Parent + nested runs</a:t>
+            </a:r>
+          </a:p>
+        </p:txBody>
+      </p:sp>
+      <p:pic>
+        <p:nvPicPr>
+          <p:cNvPr id="9" name="Picture 8" descr="02_mlflow_run_compare.png"/>
+          <p:cNvPicPr>
+            <a:picLocks noChangeAspect="1"/>
+          </p:cNvPicPr>
+          <p:nvPr/>
+        </p:nvPicPr>
+        <p:blipFill>
+          <a:blip r:embed="rId4"/>
+          <a:stretch>
+            <a:fillRect/>
+          </a:stretch>
+        </p:blipFill>
+        <p:spPr>
+          <a:xfrm>
+            <a:off x="6172200" y="1402572"/>
+            <a:ext cx="5486400" cy="3229896"/>
+          </a:xfrm>
+          <a:prstGeom prst="rect">
+            <a:avLst/>
+          </a:prstGeom>
+          <a:ln w="9525">
+            <a:solidFill>
+              <a:srgbClr val="D9DCE1"/>
+            </a:solidFill>
+          </a:ln>
+        </p:spPr>
+      </p:pic>
+      <p:sp>
+        <p:nvSpPr>
           <p:cNvPr id="10" name="TextBox 9"/>
           <p:cNvSpPr txBox="1"/>
           <p:nvPr/>
@@ -13938,7 +14014,7 @@
           <a:noFill/>
         </p:spPr>
         <p:txBody>
-          <a:bodyPr wrap="square" lIns="0" rIns="0" tIns="0" bIns="0" anchor="t">
+          <a:bodyPr wrap="square" lIns="0" tIns="0" rIns="0" bIns="0" anchor="t">
             <a:spAutoFit/>
           </a:bodyPr>
           <a:lstStyle/>
@@ -13973,7 +14049,7 @@
           <a:noFill/>
         </p:spPr>
         <p:txBody>
-          <a:bodyPr wrap="square" lIns="0" rIns="0" tIns="0" bIns="0">
+          <a:bodyPr wrap="square" lIns="0" tIns="0" rIns="0" bIns="0">
             <a:spAutoFit/>
           </a:bodyPr>
           <a:lstStyle/>
@@ -14420,44 +14496,44 @@
         <a:sysClr val="window" lastClr="FFFFFF"/>
       </a:lt1>
       <a:dk2>
-        <a:srgbClr val="1F497D"/>
+        <a:srgbClr val="0E2841"/>
       </a:dk2>
       <a:lt2>
-        <a:srgbClr val="EEECE1"/>
+        <a:srgbClr val="E8E8E8"/>
       </a:lt2>
       <a:accent1>
-        <a:srgbClr val="4F81BD"/>
+        <a:srgbClr val="156082"/>
       </a:accent1>
       <a:accent2>
-        <a:srgbClr val="C0504D"/>
+        <a:srgbClr val="E97132"/>
       </a:accent2>
       <a:accent3>
-        <a:srgbClr val="9BBB59"/>
+        <a:srgbClr val="196B24"/>
       </a:accent3>
       <a:accent4>
-        <a:srgbClr val="8064A2"/>
+        <a:srgbClr val="0F9ED5"/>
       </a:accent4>
       <a:accent5>
-        <a:srgbClr val="4BACC6"/>
+        <a:srgbClr val="A02B93"/>
       </a:accent5>
       <a:accent6>
-        <a:srgbClr val="F79646"/>
+        <a:srgbClr val="4EA72E"/>
       </a:accent6>
       <a:hlink>
-        <a:srgbClr val="0000FF"/>
+        <a:srgbClr val="467886"/>
       </a:hlink>
       <a:folHlink>
-        <a:srgbClr val="800080"/>
+        <a:srgbClr val="96607D"/>
       </a:folHlink>
     </a:clrScheme>
     <a:fontScheme name="Office">
       <a:majorFont>
-        <a:latin typeface="Calibri"/>
+        <a:latin typeface="Aptos Display" panose="02110004020202020204"/>
         <a:ea typeface=""/>
         <a:cs typeface=""/>
-        <a:font script="Jpan" typeface="ＭＳ Ｐゴシック"/>
+        <a:font script="Jpan" typeface="游ゴシック Light"/>
         <a:font script="Hang" typeface="맑은 고딕"/>
-        <a:font script="Hans" typeface="宋体"/>
+        <a:font script="Hans" typeface="等线 Light"/>
         <a:font script="Hant" typeface="新細明體"/>
         <a:font script="Arab" typeface="Times New Roman"/>
         <a:font script="Hebr" typeface="Times New Roman"/>
@@ -14485,14 +14561,31 @@
         <a:font script="Viet" typeface="Times New Roman"/>
         <a:font script="Uigh" typeface="Microsoft Uighur"/>
         <a:font script="Geor" typeface="Sylfaen"/>
+        <a:font script="Armn" typeface="Arial"/>
+        <a:font script="Bugi" typeface="Leelawadee UI"/>
+        <a:font script="Bopo" typeface="Microsoft JhengHei"/>
+        <a:font script="Java" typeface="Javanese Text"/>
+        <a:font script="Lisu" typeface="Segoe UI"/>
+        <a:font script="Mymr" typeface="Myanmar Text"/>
+        <a:font script="Nkoo" typeface="Ebrima"/>
+        <a:font script="Olck" typeface="Nirmala UI"/>
+        <a:font script="Osma" typeface="Ebrima"/>
+        <a:font script="Phag" typeface="Phagspa"/>
+        <a:font script="Syrn" typeface="Estrangelo Edessa"/>
+        <a:font script="Syrj" typeface="Estrangelo Edessa"/>
+        <a:font script="Syre" typeface="Estrangelo Edessa"/>
+        <a:font script="Sora" typeface="Nirmala UI"/>
+        <a:font script="Tale" typeface="Microsoft Tai Le"/>
+        <a:font script="Talu" typeface="Microsoft New Tai Lue"/>
+        <a:font script="Tfng" typeface="Ebrima"/>
       </a:majorFont>
       <a:minorFont>
-        <a:latin typeface="Calibri"/>
+        <a:latin typeface="Aptos" panose="02110004020202020204"/>
         <a:ea typeface=""/>
         <a:cs typeface=""/>
-        <a:font script="Jpan" typeface="ＭＳ Ｐゴシック"/>
+        <a:font script="Jpan" typeface="游ゴシック"/>
         <a:font script="Hang" typeface="맑은 고딕"/>
-        <a:font script="Hans" typeface="宋体"/>
+        <a:font script="Hans" typeface="等线"/>
         <a:font script="Hant" typeface="新細明體"/>
         <a:font script="Arab" typeface="Arial"/>
         <a:font script="Hebr" typeface="Arial"/>
@@ -14520,6 +14613,23 @@
         <a:font script="Viet" typeface="Arial"/>
         <a:font script="Uigh" typeface="Microsoft Uighur"/>
         <a:font script="Geor" typeface="Sylfaen"/>
+        <a:font script="Armn" typeface="Arial"/>
+        <a:font script="Bugi" typeface="Leelawadee UI"/>
+        <a:font script="Bopo" typeface="Microsoft JhengHei"/>
+        <a:font script="Java" typeface="Javanese Text"/>
+        <a:font script="Lisu" typeface="Segoe UI"/>
+        <a:font script="Mymr" typeface="Myanmar Text"/>
+        <a:font script="Nkoo" typeface="Ebrima"/>
+        <a:font script="Olck" typeface="Nirmala UI"/>
+        <a:font script="Osma" typeface="Ebrima"/>
+        <a:font script="Phag" typeface="Phagspa"/>
+        <a:font script="Syrn" typeface="Estrangelo Edessa"/>
+        <a:font script="Syrj" typeface="Estrangelo Edessa"/>
+        <a:font script="Syre" typeface="Estrangelo Edessa"/>
+        <a:font script="Sora" typeface="Nirmala UI"/>
+        <a:font script="Tale" typeface="Microsoft Tai Le"/>
+        <a:font script="Talu" typeface="Microsoft New Tai Lue"/>
+        <a:font script="Tfng" typeface="Ebrima"/>
       </a:minorFont>
     </a:fontScheme>
     <a:fmtScheme name="Office">
@@ -14531,180 +14641,136 @@
           <a:gsLst>
             <a:gs pos="0">
               <a:schemeClr val="phClr">
-                <a:tint val="50000"/>
-                <a:satMod val="300000"/>
+                <a:lumMod val="110000"/>
+                <a:satMod val="105000"/>
+                <a:tint val="67000"/>
               </a:schemeClr>
             </a:gs>
-            <a:gs pos="35000">
+            <a:gs pos="50000">
               <a:schemeClr val="phClr">
-                <a:tint val="37000"/>
-                <a:satMod val="300000"/>
+                <a:lumMod val="105000"/>
+                <a:satMod val="103000"/>
+                <a:tint val="73000"/>
               </a:schemeClr>
             </a:gs>
             <a:gs pos="100000">
               <a:schemeClr val="phClr">
-                <a:tint val="15000"/>
-                <a:satMod val="350000"/>
+                <a:lumMod val="105000"/>
+                <a:satMod val="109000"/>
+                <a:tint val="81000"/>
               </a:schemeClr>
             </a:gs>
           </a:gsLst>
-          <a:lin ang="16200000" scaled="1"/>
+          <a:lin ang="5400000" scaled="0"/>
         </a:gradFill>
         <a:gradFill rotWithShape="1">
           <a:gsLst>
             <a:gs pos="0">
               <a:schemeClr val="phClr">
-                <a:tint val="100000"/>
+                <a:satMod val="103000"/>
+                <a:lumMod val="102000"/>
+                <a:tint val="94000"/>
+              </a:schemeClr>
+            </a:gs>
+            <a:gs pos="50000">
+              <a:schemeClr val="phClr">
+                <a:satMod val="110000"/>
+                <a:lumMod val="100000"/>
                 <a:shade val="100000"/>
-                <a:satMod val="130000"/>
               </a:schemeClr>
             </a:gs>
             <a:gs pos="100000">
               <a:schemeClr val="phClr">
-                <a:tint val="50000"/>
-                <a:shade val="100000"/>
-                <a:satMod val="350000"/>
+                <a:lumMod val="99000"/>
+                <a:satMod val="120000"/>
+                <a:shade val="78000"/>
               </a:schemeClr>
             </a:gs>
           </a:gsLst>
-          <a:lin ang="16200000" scaled="0"/>
+          <a:lin ang="5400000" scaled="0"/>
         </a:gradFill>
       </a:fillStyleLst>
       <a:lnStyleLst>
-        <a:ln w="9525" cap="flat" cmpd="sng" algn="ctr">
+        <a:ln w="12700" cap="flat" cmpd="sng" algn="ctr">
           <a:solidFill>
-            <a:schemeClr val="phClr">
-              <a:shade val="95000"/>
-              <a:satMod val="105000"/>
-            </a:schemeClr>
+            <a:schemeClr val="phClr"/>
           </a:solidFill>
           <a:prstDash val="solid"/>
+          <a:miter lim="800000"/>
+        </a:ln>
+        <a:ln w="19050" cap="flat" cmpd="sng" algn="ctr">
+          <a:solidFill>
+            <a:schemeClr val="phClr"/>
+          </a:solidFill>
+          <a:prstDash val="solid"/>
+          <a:miter lim="800000"/>
         </a:ln>
         <a:ln w="25400" cap="flat" cmpd="sng" algn="ctr">
           <a:solidFill>
             <a:schemeClr val="phClr"/>
           </a:solidFill>
           <a:prstDash val="solid"/>
-        </a:ln>
-        <a:ln w="38100" cap="flat" cmpd="sng" algn="ctr">
-          <a:solidFill>
-            <a:schemeClr val="phClr"/>
-          </a:solidFill>
-          <a:prstDash val="solid"/>
+          <a:miter lim="800000"/>
         </a:ln>
       </a:lnStyleLst>
       <a:effectStyleLst>
         <a:effectStyle>
+          <a:effectLst/>
+        </a:effectStyle>
+        <a:effectStyle>
+          <a:effectLst/>
+        </a:effectStyle>
+        <a:effectStyle>
           <a:effectLst>
-            <a:outerShdw blurRad="40000" dist="20000" dir="5400000" rotWithShape="0">
+            <a:outerShdw blurRad="57150" dist="19050" dir="5400000" algn="ctr" rotWithShape="0">
               <a:srgbClr val="000000">
-                <a:alpha val="38000"/>
+                <a:alpha val="63000"/>
               </a:srgbClr>
             </a:outerShdw>
           </a:effectLst>
-        </a:effectStyle>
-        <a:effectStyle>
-          <a:effectLst>
-            <a:outerShdw blurRad="40000" dist="23000" dir="5400000" rotWithShape="0">
-              <a:srgbClr val="000000">
-                <a:alpha val="35000"/>
-              </a:srgbClr>
-            </a:outerShdw>
-          </a:effectLst>
-        </a:effectStyle>
-        <a:effectStyle>
-          <a:effectLst>
-            <a:outerShdw blurRad="40000" dist="23000" dir="5400000" rotWithShape="0">
-              <a:srgbClr val="000000">
-                <a:alpha val="35000"/>
-              </a:srgbClr>
-            </a:outerShdw>
-          </a:effectLst>
-          <a:scene3d>
-            <a:camera prst="orthographicFront">
-              <a:rot lat="0" lon="0" rev="0"/>
-            </a:camera>
-            <a:lightRig rig="threePt" dir="t">
-              <a:rot lat="0" lon="0" rev="1200000"/>
-            </a:lightRig>
-          </a:scene3d>
-          <a:sp3d>
-            <a:bevelT w="63500" h="25400"/>
-          </a:sp3d>
         </a:effectStyle>
       </a:effectStyleLst>
       <a:bgFillStyleLst>
         <a:solidFill>
           <a:schemeClr val="phClr"/>
         </a:solidFill>
+        <a:solidFill>
+          <a:schemeClr val="phClr">
+            <a:tint val="95000"/>
+            <a:satMod val="170000"/>
+          </a:schemeClr>
+        </a:solidFill>
         <a:gradFill rotWithShape="1">
           <a:gsLst>
             <a:gs pos="0">
               <a:schemeClr val="phClr">
-                <a:tint val="40000"/>
-                <a:satMod val="350000"/>
+                <a:tint val="93000"/>
+                <a:satMod val="150000"/>
+                <a:shade val="98000"/>
+                <a:lumMod val="102000"/>
               </a:schemeClr>
             </a:gs>
-            <a:gs pos="40000">
+            <a:gs pos="50000">
               <a:schemeClr val="phClr">
-                <a:tint val="45000"/>
-                <a:shade val="99000"/>
-                <a:satMod val="350000"/>
+                <a:tint val="98000"/>
+                <a:satMod val="130000"/>
+                <a:shade val="90000"/>
+                <a:lumMod val="103000"/>
               </a:schemeClr>
             </a:gs>
             <a:gs pos="100000">
               <a:schemeClr val="phClr">
-                <a:shade val="20000"/>
-                <a:satMod val="255000"/>
+                <a:shade val="63000"/>
+                <a:satMod val="120000"/>
               </a:schemeClr>
             </a:gs>
           </a:gsLst>
-          <a:path path="circle">
-            <a:fillToRect l="50000" t="-80000" r="50000" b="180000"/>
-          </a:path>
-        </a:gradFill>
-        <a:gradFill rotWithShape="1">
-          <a:gsLst>
-            <a:gs pos="0">
-              <a:schemeClr val="phClr">
-                <a:tint val="80000"/>
-                <a:satMod val="300000"/>
-              </a:schemeClr>
-            </a:gs>
-            <a:gs pos="100000">
-              <a:schemeClr val="phClr">
-                <a:shade val="30000"/>
-                <a:satMod val="200000"/>
-              </a:schemeClr>
-            </a:gs>
-          </a:gsLst>
-          <a:path path="circle">
-            <a:fillToRect l="50000" t="50000" r="50000" b="50000"/>
-          </a:path>
+          <a:lin ang="5400000" scaled="0"/>
         </a:gradFill>
       </a:bgFillStyleLst>
     </a:fmtScheme>
   </a:themeElements>
   <a:objectDefaults>
-    <a:spDef>
-      <a:spPr/>
-      <a:bodyPr/>
-      <a:lstStyle/>
-      <a:style>
-        <a:lnRef idx="1">
-          <a:schemeClr val="accent1"/>
-        </a:lnRef>
-        <a:fillRef idx="3">
-          <a:schemeClr val="accent1"/>
-        </a:fillRef>
-        <a:effectRef idx="2">
-          <a:schemeClr val="accent1"/>
-        </a:effectRef>
-        <a:fontRef idx="minor">
-          <a:schemeClr val="lt1"/>
-        </a:fontRef>
-      </a:style>
-    </a:spDef>
     <a:lnDef>
       <a:spPr/>
       <a:bodyPr/>
@@ -14726,5 +14792,10 @@
     </a:lnDef>
   </a:objectDefaults>
   <a:extraClrSchemeLst/>
+  <a:extLst>
+    <a:ext uri="{05A4C25C-085E-4340-85A3-A5531E510DB2}">
+      <thm15:themeFamily xmlns:thm15="http://schemas.microsoft.com/office/thememl/2012/main" name="Office Theme" id="{2E142A2C-CD16-42D6-873A-C26D2A0506FA}" vid="{1BDDFF52-6CD6-40A5-AB3C-68EB2F1E4D0A}"/>
+    </a:ext>
+  </a:extLst>
 </a:theme>
 </file>